--- a/docs/ASV-Console-Programming-by-Conversation.pptx
+++ b/docs/ASV-Console-Programming-by-Conversation.pptx
@@ -18,9 +18,10 @@
     <p:sldId id="266" r:id="rId12"/>
     <p:sldId id="267" r:id="rId13"/>
     <p:sldId id="268" r:id="rId14"/>
+    <p:sldId id="269" r:id="rId15"/>
   </p:sldIdLst>
   <p:notesMasterIdLst>
-    <p:notesMasterId r:id="rId15"/>
+    <p:notesMasterId r:id="rId16"/>
   </p:notesMasterIdLst>
   <p:sldSz cx="12192000" cy="6858000"/>
   <p:notesSz cx="6858000" cy="12192000"/>
@@ -207,9 +208,9 @@
           </c:dLbls>
           <c:cat>
             <c:multiLvlStrRef>
-              <c:f>Sheet1!$A$2:$A$3</c:f>
+              <c:f>Sheet1!$A$2:$A$4</c:f>
               <c:multiLvlStrCache>
-                <c:ptCount val="2"/>
+                <c:ptCount val="3"/>
                 <c:lvl>
                   <c:pt idx="0">
                     <c:v>Starlink monitor</c:v>
@@ -217,21 +218,27 @@
                   <c:pt idx="1">
                     <c:v>Q-Hub relay</c:v>
                   </c:pt>
+                  <c:pt idx="2">
+                    <c:v>ASV console</c:v>
+                  </c:pt>
                 </c:lvl>
               </c:multiLvlStrCache>
             </c:multiLvlStrRef>
           </c:cat>
           <c:val>
             <c:numRef>
-              <c:f>Sheet1!$B$2:$B$3</c:f>
+              <c:f>Sheet1!$B$2:$B$4</c:f>
               <c:numCache>
                 <c:formatCode>General</c:formatCode>
-                <c:ptCount val="2"/>
+                <c:ptCount val="3"/>
                 <c:pt idx="0">
                   <c:v>40.3</c:v>
                 </c:pt>
                 <c:pt idx="1">
                   <c:v>32</c:v>
+                </c:pt>
+                <c:pt idx="2">
+                  <c:v>199.8</c:v>
                 </c:pt>
               </c:numCache>
             </c:numRef>
@@ -284,9 +291,9 @@
           </c:dLbls>
           <c:cat>
             <c:multiLvlStrRef>
-              <c:f>Sheet1!$A$2:$A$3</c:f>
+              <c:f>Sheet1!$A$2:$A$4</c:f>
               <c:multiLvlStrCache>
-                <c:ptCount val="2"/>
+                <c:ptCount val="3"/>
                 <c:lvl>
                   <c:pt idx="0">
                     <c:v>Starlink monitor</c:v>
@@ -294,21 +301,27 @@
                   <c:pt idx="1">
                     <c:v>Q-Hub relay</c:v>
                   </c:pt>
+                  <c:pt idx="2">
+                    <c:v>ASV console</c:v>
+                  </c:pt>
                 </c:lvl>
               </c:multiLvlStrCache>
             </c:multiLvlStrRef>
           </c:cat>
           <c:val>
             <c:numRef>
-              <c:f>Sheet1!$C$2:$C$3</c:f>
+              <c:f>Sheet1!$C$2:$C$4</c:f>
               <c:numCache>
                 <c:formatCode>General</c:formatCode>
-                <c:ptCount val="2"/>
+                <c:ptCount val="3"/>
                 <c:pt idx="0">
                   <c:v>4</c:v>
                 </c:pt>
                 <c:pt idx="1">
                   <c:v>2</c:v>
+                </c:pt>
+                <c:pt idx="2">
+                  <c:v>30</c:v>
                 </c:pt>
               </c:numCache>
             </c:numRef>
@@ -1079,7 +1092,7 @@
           <a:p>
             <a:r>
               <a:rPr lang="en-US" dirty="0"/>
-              <a:t>For the software-engineering audience: these are the generalizable outputs. Each shape was hit repeatedly, named, written into the project's generated development guide, and then used as a checklist ('check for that shape first'). The conversation method makes this feedback loop unusually tight — the same agent that fixed the bug writes the taxonomy and carries it into the next session's context.</a:t>
+              <a:t>Walk the table top-down: UI and test infrastructure dominate — different from the small tools, where protocol discovery was the largest line. That shift is the scaling story: as the artifact grows, the effort moves from discovery to construction and verification, and the compression ratio falls from ~10-16x to ~7x. The papers predicted exactly this ('ratios from single-purpose instrumentation should not be stretched to large systems').</a:t>
             </a:r>
             <a:endParaRPr lang="en-US" dirty="0"/>
           </a:p>
@@ -1167,7 +1180,7 @@
           <a:p>
             <a:r>
               <a:rPr lang="en-US" dirty="0"/>
-              <a:t>Be explicit that the author of the papers makes these caveats himself, prominently. The honest framing: four data points pointing the same direction are a reason to run the controlled study, not a substitute for it.</a:t>
+              <a:t>For the software-engineering audience: these are the generalizable outputs. Each shape was hit repeatedly, named, written into the project's generated development guide, and then used as a checklist ('check for that shape first'). The conversation method makes this feedback loop unusually tight — the same agent that fixed the bug writes the taxonomy and carries it into the next session's context.</a:t>
             </a:r>
             <a:endParaRPr lang="en-US" dirty="0"/>
           </a:p>
@@ -1255,7 +1268,7 @@
           <a:p>
             <a:r>
               <a:rPr lang="en-US" dirty="0"/>
-              <a:t>Close by returning the question to the audience: the schema is deliberately falsifiable — it predicts which turns disappear under a structured opening and which cannot. That is a measurable claim, and the paired study on the previous slide is the way to test it beyond n = 4.</a:t>
+              <a:t>Be explicit that the author of the papers makes these caveats himself, prominently. The honest framing: four data points pointing the same direction are a reason to run the controlled study, not a substitute for it.</a:t>
             </a:r>
             <a:endParaRPr lang="en-US" dirty="0"/>
           </a:p>
@@ -1279,6 +1292,94 @@
             <a:fld id="{F7021451-1387-4CA6-816F-3879F97B5CBC}" type="slidenum">
               <a:rPr lang="en-US"/>
               <a:t>13</a:t>
+            </a:fld>
+            <a:endParaRPr lang="en-US"/>
+          </a:p>
+        </p:txBody>
+      </p:sp>
+    </p:spTree>
+    <p:extLst>
+      <p:ext uri="{BB962C8B-B14F-4D97-AF65-F5344CB8AC3E}">
+        <p14:creationId xmlns:p14="http://schemas.microsoft.com/office/powerpoint/2010/main" val="1024086991"/>
+      </p:ext>
+    </p:extLst>
+  </p:cSld>
+  <p:clrMapOvr>
+    <a:masterClrMapping/>
+  </p:clrMapOvr>
+</p:notes>
+</file>
+
+<file path=ppt/notesSlides/notesSlide14.xml><?xml version="1.0" encoding="utf-8"?>
+<p:notes xmlns:a="http://schemas.openxmlformats.org/drawingml/2006/main" xmlns:r="http://schemas.openxmlformats.org/officeDocument/2006/relationships" xmlns:p="http://schemas.openxmlformats.org/presentationml/2006/main">
+  <p:cSld>
+    <p:spTree>
+      <p:nvGrpSpPr>
+        <p:cNvPr id="1" name=""/>
+        <p:cNvGrpSpPr/>
+        <p:nvPr/>
+      </p:nvGrpSpPr>
+      <p:grpSpPr>
+        <a:xfrm>
+          <a:off x="0" y="0"/>
+          <a:ext cx="0" cy="0"/>
+          <a:chOff x="0" y="0"/>
+          <a:chExt cx="0" cy="0"/>
+        </a:xfrm>
+      </p:grpSpPr>
+      <p:sp>
+        <p:nvSpPr>
+          <p:cNvPr id="2" name="Slide Image Placeholder 1"/>
+          <p:cNvSpPr>
+            <a:spLocks noGrp="1" noRot="1" noChangeAspect="1"/>
+          </p:cNvSpPr>
+          <p:nvPr>
+            <p:ph type="sldImg"/>
+          </p:nvPr>
+        </p:nvSpPr>
+        <p:spPr/>
+      </p:sp>
+      <p:sp>
+        <p:nvSpPr>
+          <p:cNvPr id="3" name="Notes Placeholder 2"/>
+          <p:cNvSpPr>
+            <a:spLocks noGrp="1"/>
+          </p:cNvSpPr>
+          <p:nvPr>
+            <p:ph type="body" idx="1"/>
+          </p:nvPr>
+        </p:nvSpPr>
+        <p:spPr/>
+        <p:txBody>
+          <a:bodyPr/>
+          <a:lstStyle/>
+          <a:p>
+            <a:r>
+              <a:rPr lang="en-US" dirty="0"/>
+              <a:t>Close by returning the question to the audience: the schema is deliberately falsifiable — it predicts which turns disappear under a structured opening and which cannot. That is a measurable claim, and the paired study on the previous slide is the way to test it beyond n = 4.</a:t>
+            </a:r>
+            <a:endParaRPr lang="en-US" dirty="0"/>
+          </a:p>
+        </p:txBody>
+      </p:sp>
+      <p:sp>
+        <p:nvSpPr>
+          <p:cNvPr id="4" name="Slide Number Placeholder 3"/>
+          <p:cNvSpPr>
+            <a:spLocks noGrp="1"/>
+          </p:cNvSpPr>
+          <p:nvPr>
+            <p:ph type="sldNum" sz="quarter" idx="10"/>
+          </p:nvPr>
+        </p:nvSpPr>
+        <p:spPr/>
+        <p:txBody>
+          <a:bodyPr/>
+          <a:lstStyle/>
+          <a:p>
+            <a:fld id="{F7021451-1387-4CA6-816F-3879F97B5CBC}" type="slidenum">
+              <a:rPr lang="en-US"/>
+              <a:t>14</a:t>
             </a:fld>
             <a:endParaRPr lang="en-US"/>
           </a:p>
@@ -2819,7 +2920,7 @@
                 <a:ea typeface="Calibri" pitchFamily="34" charset="-122"/>
                 <a:cs typeface="Calibri" pitchFamily="34" charset="-120"/>
               </a:rPr>
-              <a:t>The ASV console was not formally estimated, but is several times larger than either charted artifact and was built and hardened in 14 days of short sessions alongside operational duties.</a:t>
+              <a:t>Estimated by the same method (component table, next slide): ≈200 person-hours unaided vs ≈30 measured from the commit record — a smaller multiple (≈7×) than the small tools, exactly as the series' own scaling caveat predicts.</a:t>
             </a:r>
             <a:endParaRPr lang="en-US" sz="1200" dirty="0"/>
           </a:p>
@@ -2890,7 +2991,7 @@
                 <a:ea typeface="Calibri" pitchFamily="34" charset="-122"/>
                 <a:cs typeface="Calibri" pitchFamily="34" charset="-120"/>
               </a:rPr>
-              <a:t>THEORY FROM PRACTICE</a:t>
+              <a:t>EFFORT ECONOMICS</a:t>
             </a:r>
             <a:endParaRPr lang="en-US" sz="1200" dirty="0"/>
           </a:p>
@@ -2929,93 +3030,4931 @@
                 <a:ea typeface="Cambria" pitchFamily="34" charset="-122"/>
                 <a:cs typeface="Cambria" pitchFamily="34" charset="-120"/>
               </a:rPr>
-              <a:t>Recurring defect shapes the conversation method surfaced</a:t>
+              <a:t>The same method, applied to this project</a:t>
             </a:r>
             <a:endParaRPr lang="en-US" sz="3100" dirty="0"/>
           </a:p>
         </p:txBody>
       </p:sp>
-      <p:sp>
-        <p:nvSpPr>
-          <p:cNvPr id="4" name="Shape 2"/>
-          <p:cNvSpPr/>
-          <p:nvPr/>
-        </p:nvSpPr>
-        <p:spPr>
-          <a:xfrm>
-            <a:off x="548640" y="1463040"/>
-            <a:ext cx="3611880" cy="2194560"/>
-          </a:xfrm>
-          <a:prstGeom prst="roundRect">
-            <a:avLst>
-              <a:gd name="adj" fmla="val 3333"/>
-            </a:avLst>
-          </a:prstGeom>
-          <a:solidFill>
-            <a:srgbClr val="FFFFFF"/>
-          </a:solidFill>
-          <a:ln w="9525">
-            <a:solidFill>
-              <a:srgbClr val="D5E2EC"/>
-            </a:solidFill>
-            <a:prstDash val="solid"/>
-          </a:ln>
-        </p:spPr>
-      </p:sp>
-      <p:sp>
-        <p:nvSpPr>
-          <p:cNvPr id="5" name="Shape 3"/>
-          <p:cNvSpPr/>
-          <p:nvPr/>
-        </p:nvSpPr>
-        <p:spPr>
-          <a:xfrm>
-            <a:off x="731520" y="1645920"/>
-            <a:ext cx="438912" cy="438912"/>
-          </a:xfrm>
-          <a:prstGeom prst="ellipse">
-            <a:avLst/>
-          </a:prstGeom>
-          <a:solidFill>
-            <a:srgbClr val="065A82"/>
-          </a:solidFill>
-          <a:ln/>
-        </p:spPr>
-      </p:sp>
-      <p:pic>
-        <p:nvPicPr>
-          <p:cNvPr id="6" name="Image 0" descr="preencoded.png">    </p:cNvPr>
-          <p:cNvPicPr>
-            <a:picLocks noChangeAspect="1"/>
-          </p:cNvPicPr>
-          <p:nvPr/>
-        </p:nvPicPr>
-        <p:blipFill>
-          <a:blip r:embed="rId1"/>
-          <a:stretch>
-            <a:fillRect/>
-          </a:stretch>
-        </p:blipFill>
-        <p:spPr>
-          <a:xfrm>
-            <a:off x="845637" y="1760037"/>
-            <a:ext cx="210678" cy="210678"/>
-          </a:xfrm>
-          <a:prstGeom prst="rect">
-            <a:avLst/>
-          </a:prstGeom>
-        </p:spPr>
-      </p:pic>
-      <p:sp>
-        <p:nvSpPr>
-          <p:cNvPr id="7" name="Text 4"/>
-          <p:cNvSpPr/>
-          <p:nvPr/>
-        </p:nvSpPr>
-        <p:spPr>
-          <a:xfrm>
-            <a:off x="1298448" y="1664208"/>
-            <a:ext cx="2743200" cy="594360"/>
+      <p:graphicFrame>
+        <p:nvGraphicFramePr>
+          <p:cNvPr id="12" name="Table 0"/>
+          <p:cNvGraphicFramePr>
+            <a:graphicFrameLocks noGrp="1"/>
+          </p:cNvGraphicFramePr>
+          <p:nvPr>
+            <p:extLst>
+              <p:ext uri="{D42A27DB-BD31-4B8C-83A1-F6EECF244321}">
+                <p14:modId xmlns:p14="http://schemas.microsoft.com/office/powerpoint/2010/main" val="1579011935"/>
+              </p:ext>
+            </p:extLst>
+          </p:nvPr>
+        </p:nvGraphicFramePr>
+        <p:xfrm>
+          <a:off x="548640" y="1371600"/>
+          <a:ext cx="8229600" cy="914400"/>
+        </p:xfrm>
+        <a:graphic>
+          <a:graphicData uri="http://schemas.openxmlformats.org/drawingml/2006/table">
+            <a:tbl>
+              <a:tblPr/>
+              <a:tblGrid>
+                <a:gridCol w="5943600"/>
+                <a:gridCol w="457200"/>
+                <a:gridCol w="457200"/>
+                <a:gridCol w="457200"/>
+                <a:gridCol w="457200"/>
+                <a:gridCol w="457200"/>
+              </a:tblGrid>
+              <a:tr h="0">
+                <a:tc>
+                  <a:txBody>
+                    <a:bodyPr/>
+                    <a:lstStyle/>
+                    <a:p>
+                      <a:pPr indent="0" marL="0">
+                        <a:buNone/>
+                      </a:pPr>
+                      <a:r>
+                        <a:rPr lang="en-US" sz="1050" b="1" dirty="0">
+                          <a:solidFill>
+                            <a:srgbClr val="FFFFFF"/>
+                          </a:solidFill>
+                          <a:latin typeface="Calibri" pitchFamily="34" charset="0"/>
+                          <a:ea typeface="Calibri" pitchFamily="34" charset="-122"/>
+                          <a:cs typeface="Calibri" pitchFamily="34" charset="-120"/>
+                        </a:rPr>
+                        <a:t>Work component</a:t>
+                      </a:r>
+                      <a:endParaRPr lang="en-US" sz="1050" dirty="0">
+                        <a:latin typeface="Calibri" charset="0"/>
+                        <a:ea typeface="Calibri" charset="0"/>
+                        <a:cs typeface="Calibri" charset="0"/>
+                      </a:endParaRPr>
+                    </a:p>
+                  </a:txBody>
+                  <a:tcPr marL="36576" marR="36576" marT="36576" marB="36576" anchor="ctr">
+                    <a:lnL w="6350" cap="flat" cmpd="sng" algn="ctr">
+                      <a:solidFill>
+                        <a:srgbClr val="D5E2EC"/>
+                      </a:solidFill>
+                      <a:prstDash val="solid"/>
+                      <a:round/>
+                      <a:headEnd type="none" w="med" len="med"/>
+                      <a:tailEnd type="none" w="med" len="med"/>
+                    </a:lnL>
+                    <a:lnR w="6350" cap="flat" cmpd="sng" algn="ctr">
+                      <a:solidFill>
+                        <a:srgbClr val="D5E2EC"/>
+                      </a:solidFill>
+                      <a:prstDash val="solid"/>
+                      <a:round/>
+                      <a:headEnd type="none" w="med" len="med"/>
+                      <a:tailEnd type="none" w="med" len="med"/>
+                    </a:lnR>
+                    <a:lnT w="6350" cap="flat" cmpd="sng" algn="ctr">
+                      <a:solidFill>
+                        <a:srgbClr val="D5E2EC"/>
+                      </a:solidFill>
+                      <a:prstDash val="solid"/>
+                      <a:round/>
+                      <a:headEnd type="none" w="med" len="med"/>
+                      <a:tailEnd type="none" w="med" len="med"/>
+                    </a:lnT>
+                    <a:lnB w="6350" cap="flat" cmpd="sng" algn="ctr">
+                      <a:solidFill>
+                        <a:srgbClr val="D5E2EC"/>
+                      </a:solidFill>
+                      <a:prstDash val="solid"/>
+                      <a:round/>
+                      <a:headEnd type="none" w="med" len="med"/>
+                      <a:tailEnd type="none" w="med" len="med"/>
+                    </a:lnB>
+                    <a:solidFill>
+                      <a:srgbClr val="065A82"/>
+                    </a:solidFill>
+                  </a:tcPr>
+                </a:tc>
+                <a:tc>
+                  <a:txBody>
+                    <a:bodyPr/>
+                    <a:lstStyle/>
+                    <a:p>
+                      <a:pPr algn="ctr" indent="0" marL="0">
+                        <a:buNone/>
+                      </a:pPr>
+                      <a:r>
+                        <a:rPr lang="en-US" sz="1050" b="1" dirty="0">
+                          <a:solidFill>
+                            <a:srgbClr val="FFFFFF"/>
+                          </a:solidFill>
+                          <a:latin typeface="Calibri" pitchFamily="34" charset="0"/>
+                          <a:ea typeface="Calibri" pitchFamily="34" charset="-122"/>
+                          <a:cs typeface="Calibri" pitchFamily="34" charset="-120"/>
+                        </a:rPr>
+                        <a:t>a</a:t>
+                      </a:r>
+                      <a:endParaRPr lang="en-US" sz="1050" dirty="0">
+                        <a:latin typeface="Calibri" charset="0"/>
+                        <a:ea typeface="Calibri" charset="0"/>
+                        <a:cs typeface="Calibri" charset="0"/>
+                      </a:endParaRPr>
+                    </a:p>
+                  </a:txBody>
+                  <a:tcPr marL="36576" marR="36576" marT="36576" marB="36576" anchor="ctr">
+                    <a:lnL w="6350" cap="flat" cmpd="sng" algn="ctr">
+                      <a:solidFill>
+                        <a:srgbClr val="D5E2EC"/>
+                      </a:solidFill>
+                      <a:prstDash val="solid"/>
+                      <a:round/>
+                      <a:headEnd type="none" w="med" len="med"/>
+                      <a:tailEnd type="none" w="med" len="med"/>
+                    </a:lnL>
+                    <a:lnR w="6350" cap="flat" cmpd="sng" algn="ctr">
+                      <a:solidFill>
+                        <a:srgbClr val="D5E2EC"/>
+                      </a:solidFill>
+                      <a:prstDash val="solid"/>
+                      <a:round/>
+                      <a:headEnd type="none" w="med" len="med"/>
+                      <a:tailEnd type="none" w="med" len="med"/>
+                    </a:lnR>
+                    <a:lnT w="6350" cap="flat" cmpd="sng" algn="ctr">
+                      <a:solidFill>
+                        <a:srgbClr val="D5E2EC"/>
+                      </a:solidFill>
+                      <a:prstDash val="solid"/>
+                      <a:round/>
+                      <a:headEnd type="none" w="med" len="med"/>
+                      <a:tailEnd type="none" w="med" len="med"/>
+                    </a:lnT>
+                    <a:lnB w="6350" cap="flat" cmpd="sng" algn="ctr">
+                      <a:solidFill>
+                        <a:srgbClr val="D5E2EC"/>
+                      </a:solidFill>
+                      <a:prstDash val="solid"/>
+                      <a:round/>
+                      <a:headEnd type="none" w="med" len="med"/>
+                      <a:tailEnd type="none" w="med" len="med"/>
+                    </a:lnB>
+                    <a:solidFill>
+                      <a:srgbClr val="065A82"/>
+                    </a:solidFill>
+                  </a:tcPr>
+                </a:tc>
+                <a:tc>
+                  <a:txBody>
+                    <a:bodyPr/>
+                    <a:lstStyle/>
+                    <a:p>
+                      <a:pPr algn="ctr" indent="0" marL="0">
+                        <a:buNone/>
+                      </a:pPr>
+                      <a:r>
+                        <a:rPr lang="en-US" sz="1050" b="1" dirty="0">
+                          <a:solidFill>
+                            <a:srgbClr val="FFFFFF"/>
+                          </a:solidFill>
+                          <a:latin typeface="Calibri" pitchFamily="34" charset="0"/>
+                          <a:ea typeface="Calibri" pitchFamily="34" charset="-122"/>
+                          <a:cs typeface="Calibri" pitchFamily="34" charset="-120"/>
+                        </a:rPr>
+                        <a:t>m</a:t>
+                      </a:r>
+                      <a:endParaRPr lang="en-US" sz="1050" dirty="0">
+                        <a:latin typeface="Calibri" charset="0"/>
+                        <a:ea typeface="Calibri" charset="0"/>
+                        <a:cs typeface="Calibri" charset="0"/>
+                      </a:endParaRPr>
+                    </a:p>
+                  </a:txBody>
+                  <a:tcPr marL="36576" marR="36576" marT="36576" marB="36576" anchor="ctr">
+                    <a:lnL w="6350" cap="flat" cmpd="sng" algn="ctr">
+                      <a:solidFill>
+                        <a:srgbClr val="D5E2EC"/>
+                      </a:solidFill>
+                      <a:prstDash val="solid"/>
+                      <a:round/>
+                      <a:headEnd type="none" w="med" len="med"/>
+                      <a:tailEnd type="none" w="med" len="med"/>
+                    </a:lnL>
+                    <a:lnR w="6350" cap="flat" cmpd="sng" algn="ctr">
+                      <a:solidFill>
+                        <a:srgbClr val="D5E2EC"/>
+                      </a:solidFill>
+                      <a:prstDash val="solid"/>
+                      <a:round/>
+                      <a:headEnd type="none" w="med" len="med"/>
+                      <a:tailEnd type="none" w="med" len="med"/>
+                    </a:lnR>
+                    <a:lnT w="6350" cap="flat" cmpd="sng" algn="ctr">
+                      <a:solidFill>
+                        <a:srgbClr val="D5E2EC"/>
+                      </a:solidFill>
+                      <a:prstDash val="solid"/>
+                      <a:round/>
+                      <a:headEnd type="none" w="med" len="med"/>
+                      <a:tailEnd type="none" w="med" len="med"/>
+                    </a:lnT>
+                    <a:lnB w="6350" cap="flat" cmpd="sng" algn="ctr">
+                      <a:solidFill>
+                        <a:srgbClr val="D5E2EC"/>
+                      </a:solidFill>
+                      <a:prstDash val="solid"/>
+                      <a:round/>
+                      <a:headEnd type="none" w="med" len="med"/>
+                      <a:tailEnd type="none" w="med" len="med"/>
+                    </a:lnB>
+                    <a:solidFill>
+                      <a:srgbClr val="065A82"/>
+                    </a:solidFill>
+                  </a:tcPr>
+                </a:tc>
+                <a:tc>
+                  <a:txBody>
+                    <a:bodyPr/>
+                    <a:lstStyle/>
+                    <a:p>
+                      <a:pPr algn="ctr" indent="0" marL="0">
+                        <a:buNone/>
+                      </a:pPr>
+                      <a:r>
+                        <a:rPr lang="en-US" sz="1050" b="1" dirty="0">
+                          <a:solidFill>
+                            <a:srgbClr val="FFFFFF"/>
+                          </a:solidFill>
+                          <a:latin typeface="Calibri" pitchFamily="34" charset="0"/>
+                          <a:ea typeface="Calibri" pitchFamily="34" charset="-122"/>
+                          <a:cs typeface="Calibri" pitchFamily="34" charset="-120"/>
+                        </a:rPr>
+                        <a:t>b</a:t>
+                      </a:r>
+                      <a:endParaRPr lang="en-US" sz="1050" dirty="0">
+                        <a:latin typeface="Calibri" charset="0"/>
+                        <a:ea typeface="Calibri" charset="0"/>
+                        <a:cs typeface="Calibri" charset="0"/>
+                      </a:endParaRPr>
+                    </a:p>
+                  </a:txBody>
+                  <a:tcPr marL="36576" marR="36576" marT="36576" marB="36576" anchor="ctr">
+                    <a:lnL w="6350" cap="flat" cmpd="sng" algn="ctr">
+                      <a:solidFill>
+                        <a:srgbClr val="D5E2EC"/>
+                      </a:solidFill>
+                      <a:prstDash val="solid"/>
+                      <a:round/>
+                      <a:headEnd type="none" w="med" len="med"/>
+                      <a:tailEnd type="none" w="med" len="med"/>
+                    </a:lnL>
+                    <a:lnR w="6350" cap="flat" cmpd="sng" algn="ctr">
+                      <a:solidFill>
+                        <a:srgbClr val="D5E2EC"/>
+                      </a:solidFill>
+                      <a:prstDash val="solid"/>
+                      <a:round/>
+                      <a:headEnd type="none" w="med" len="med"/>
+                      <a:tailEnd type="none" w="med" len="med"/>
+                    </a:lnR>
+                    <a:lnT w="6350" cap="flat" cmpd="sng" algn="ctr">
+                      <a:solidFill>
+                        <a:srgbClr val="D5E2EC"/>
+                      </a:solidFill>
+                      <a:prstDash val="solid"/>
+                      <a:round/>
+                      <a:headEnd type="none" w="med" len="med"/>
+                      <a:tailEnd type="none" w="med" len="med"/>
+                    </a:lnT>
+                    <a:lnB w="6350" cap="flat" cmpd="sng" algn="ctr">
+                      <a:solidFill>
+                        <a:srgbClr val="D5E2EC"/>
+                      </a:solidFill>
+                      <a:prstDash val="solid"/>
+                      <a:round/>
+                      <a:headEnd type="none" w="med" len="med"/>
+                      <a:tailEnd type="none" w="med" len="med"/>
+                    </a:lnB>
+                    <a:solidFill>
+                      <a:srgbClr val="065A82"/>
+                    </a:solidFill>
+                  </a:tcPr>
+                </a:tc>
+                <a:tc>
+                  <a:txBody>
+                    <a:bodyPr/>
+                    <a:lstStyle/>
+                    <a:p>
+                      <a:pPr algn="ctr" indent="0" marL="0">
+                        <a:buNone/>
+                      </a:pPr>
+                      <a:r>
+                        <a:rPr lang="en-US" sz="1050" b="1" dirty="0">
+                          <a:solidFill>
+                            <a:srgbClr val="FFFFFF"/>
+                          </a:solidFill>
+                          <a:latin typeface="Calibri" pitchFamily="34" charset="0"/>
+                          <a:ea typeface="Calibri" pitchFamily="34" charset="-122"/>
+                          <a:cs typeface="Calibri" pitchFamily="34" charset="-120"/>
+                        </a:rPr>
+                        <a:t>tₑ</a:t>
+                      </a:r>
+                      <a:endParaRPr lang="en-US" sz="1050" dirty="0">
+                        <a:latin typeface="Calibri" charset="0"/>
+                        <a:ea typeface="Calibri" charset="0"/>
+                        <a:cs typeface="Calibri" charset="0"/>
+                      </a:endParaRPr>
+                    </a:p>
+                  </a:txBody>
+                  <a:tcPr marL="36576" marR="36576" marT="36576" marB="36576" anchor="ctr">
+                    <a:lnL w="6350" cap="flat" cmpd="sng" algn="ctr">
+                      <a:solidFill>
+                        <a:srgbClr val="D5E2EC"/>
+                      </a:solidFill>
+                      <a:prstDash val="solid"/>
+                      <a:round/>
+                      <a:headEnd type="none" w="med" len="med"/>
+                      <a:tailEnd type="none" w="med" len="med"/>
+                    </a:lnL>
+                    <a:lnR w="6350" cap="flat" cmpd="sng" algn="ctr">
+                      <a:solidFill>
+                        <a:srgbClr val="D5E2EC"/>
+                      </a:solidFill>
+                      <a:prstDash val="solid"/>
+                      <a:round/>
+                      <a:headEnd type="none" w="med" len="med"/>
+                      <a:tailEnd type="none" w="med" len="med"/>
+                    </a:lnR>
+                    <a:lnT w="6350" cap="flat" cmpd="sng" algn="ctr">
+                      <a:solidFill>
+                        <a:srgbClr val="D5E2EC"/>
+                      </a:solidFill>
+                      <a:prstDash val="solid"/>
+                      <a:round/>
+                      <a:headEnd type="none" w="med" len="med"/>
+                      <a:tailEnd type="none" w="med" len="med"/>
+                    </a:lnT>
+                    <a:lnB w="6350" cap="flat" cmpd="sng" algn="ctr">
+                      <a:solidFill>
+                        <a:srgbClr val="D5E2EC"/>
+                      </a:solidFill>
+                      <a:prstDash val="solid"/>
+                      <a:round/>
+                      <a:headEnd type="none" w="med" len="med"/>
+                      <a:tailEnd type="none" w="med" len="med"/>
+                    </a:lnB>
+                    <a:solidFill>
+                      <a:srgbClr val="065A82"/>
+                    </a:solidFill>
+                  </a:tcPr>
+                </a:tc>
+                <a:tc>
+                  <a:txBody>
+                    <a:bodyPr/>
+                    <a:lstStyle/>
+                    <a:p>
+                      <a:pPr algn="ctr" indent="0" marL="0">
+                        <a:buNone/>
+                      </a:pPr>
+                      <a:r>
+                        <a:rPr lang="en-US" sz="1050" b="1" dirty="0">
+                          <a:solidFill>
+                            <a:srgbClr val="FFFFFF"/>
+                          </a:solidFill>
+                          <a:latin typeface="Calibri" pitchFamily="34" charset="0"/>
+                          <a:ea typeface="Calibri" pitchFamily="34" charset="-122"/>
+                          <a:cs typeface="Calibri" pitchFamily="34" charset="-120"/>
+                        </a:rPr>
+                        <a:t>σ</a:t>
+                      </a:r>
+                      <a:endParaRPr lang="en-US" sz="1050" dirty="0">
+                        <a:latin typeface="Calibri" charset="0"/>
+                        <a:ea typeface="Calibri" charset="0"/>
+                        <a:cs typeface="Calibri" charset="0"/>
+                      </a:endParaRPr>
+                    </a:p>
+                  </a:txBody>
+                  <a:tcPr marL="36576" marR="36576" marT="36576" marB="36576" anchor="ctr">
+                    <a:lnL w="6350" cap="flat" cmpd="sng" algn="ctr">
+                      <a:solidFill>
+                        <a:srgbClr val="D5E2EC"/>
+                      </a:solidFill>
+                      <a:prstDash val="solid"/>
+                      <a:round/>
+                      <a:headEnd type="none" w="med" len="med"/>
+                      <a:tailEnd type="none" w="med" len="med"/>
+                    </a:lnL>
+                    <a:lnR w="6350" cap="flat" cmpd="sng" algn="ctr">
+                      <a:solidFill>
+                        <a:srgbClr val="D5E2EC"/>
+                      </a:solidFill>
+                      <a:prstDash val="solid"/>
+                      <a:round/>
+                      <a:headEnd type="none" w="med" len="med"/>
+                      <a:tailEnd type="none" w="med" len="med"/>
+                    </a:lnR>
+                    <a:lnT w="6350" cap="flat" cmpd="sng" algn="ctr">
+                      <a:solidFill>
+                        <a:srgbClr val="D5E2EC"/>
+                      </a:solidFill>
+                      <a:prstDash val="solid"/>
+                      <a:round/>
+                      <a:headEnd type="none" w="med" len="med"/>
+                      <a:tailEnd type="none" w="med" len="med"/>
+                    </a:lnT>
+                    <a:lnB w="6350" cap="flat" cmpd="sng" algn="ctr">
+                      <a:solidFill>
+                        <a:srgbClr val="D5E2EC"/>
+                      </a:solidFill>
+                      <a:prstDash val="solid"/>
+                      <a:round/>
+                      <a:headEnd type="none" w="med" len="med"/>
+                      <a:tailEnd type="none" w="med" len="med"/>
+                    </a:lnB>
+                    <a:solidFill>
+                      <a:srgbClr val="065A82"/>
+                    </a:solidFill>
+                  </a:tcPr>
+                </a:tc>
+              </a:tr>
+              <a:tr h="0">
+                <a:tc>
+                  <a:txBody>
+                    <a:bodyPr/>
+                    <a:lstStyle/>
+                    <a:p>
+                      <a:pPr indent="0" marL="0">
+                        <a:buNone/>
+                      </a:pPr>
+                      <a:r>
+                        <a:rPr lang="en-US" sz="1000" dirty="0">
+                          <a:solidFill>
+                            <a:srgbClr val="1A2733"/>
+                          </a:solidFill>
+                          <a:latin typeface="Calibri" pitchFamily="34" charset="0"/>
+                          <a:ea typeface="Calibri" pitchFamily="34" charset="-122"/>
+                          <a:cs typeface="Calibri" pitchFamily="34" charset="-120"/>
+                        </a:rPr>
+                        <a:t>ENC chart integration &amp; nogo model (tiles, feature extraction, depth gating, offline prep)</a:t>
+                      </a:r>
+                      <a:endParaRPr lang="en-US" sz="1000" dirty="0">
+                        <a:latin typeface="Calibri" charset="0"/>
+                        <a:ea typeface="Calibri" charset="0"/>
+                        <a:cs typeface="Calibri" charset="0"/>
+                      </a:endParaRPr>
+                    </a:p>
+                  </a:txBody>
+                  <a:tcPr marL="36576" marR="36576" marT="36576" marB="36576" anchor="ctr">
+                    <a:lnL w="6350" cap="flat" cmpd="sng" algn="ctr">
+                      <a:solidFill>
+                        <a:srgbClr val="D5E2EC"/>
+                      </a:solidFill>
+                      <a:prstDash val="solid"/>
+                      <a:round/>
+                      <a:headEnd type="none" w="med" len="med"/>
+                      <a:tailEnd type="none" w="med" len="med"/>
+                    </a:lnL>
+                    <a:lnR w="6350" cap="flat" cmpd="sng" algn="ctr">
+                      <a:solidFill>
+                        <a:srgbClr val="D5E2EC"/>
+                      </a:solidFill>
+                      <a:prstDash val="solid"/>
+                      <a:round/>
+                      <a:headEnd type="none" w="med" len="med"/>
+                      <a:tailEnd type="none" w="med" len="med"/>
+                    </a:lnR>
+                    <a:lnT w="6350" cap="flat" cmpd="sng" algn="ctr">
+                      <a:solidFill>
+                        <a:srgbClr val="D5E2EC"/>
+                      </a:solidFill>
+                      <a:prstDash val="solid"/>
+                      <a:round/>
+                      <a:headEnd type="none" w="med" len="med"/>
+                      <a:tailEnd type="none" w="med" len="med"/>
+                    </a:lnT>
+                    <a:lnB w="6350" cap="flat" cmpd="sng" algn="ctr">
+                      <a:solidFill>
+                        <a:srgbClr val="D5E2EC"/>
+                      </a:solidFill>
+                      <a:prstDash val="solid"/>
+                      <a:round/>
+                      <a:headEnd type="none" w="med" len="med"/>
+                      <a:tailEnd type="none" w="med" len="med"/>
+                    </a:lnB>
+                    <a:solidFill>
+                      <a:srgbClr val="EAF2F8"/>
+                    </a:solidFill>
+                  </a:tcPr>
+                </a:tc>
+                <a:tc>
+                  <a:txBody>
+                    <a:bodyPr/>
+                    <a:lstStyle/>
+                    <a:p>
+                      <a:pPr algn="ctr" indent="0" marL="0">
+                        <a:buNone/>
+                      </a:pPr>
+                      <a:r>
+                        <a:rPr lang="en-US" sz="1000" dirty="0">
+                          <a:solidFill>
+                            <a:srgbClr val="1A2733"/>
+                          </a:solidFill>
+                          <a:latin typeface="Calibri" pitchFamily="34" charset="0"/>
+                          <a:ea typeface="Calibri" pitchFamily="34" charset="-122"/>
+                          <a:cs typeface="Calibri" pitchFamily="34" charset="-120"/>
+                        </a:rPr>
+                        <a:t>8.0</a:t>
+                      </a:r>
+                      <a:endParaRPr lang="en-US" sz="1000" dirty="0">
+                        <a:latin typeface="Calibri" charset="0"/>
+                        <a:ea typeface="Calibri" charset="0"/>
+                        <a:cs typeface="Calibri" charset="0"/>
+                      </a:endParaRPr>
+                    </a:p>
+                  </a:txBody>
+                  <a:tcPr marL="36576" marR="36576" marT="36576" marB="36576" anchor="ctr">
+                    <a:lnL w="6350" cap="flat" cmpd="sng" algn="ctr">
+                      <a:solidFill>
+                        <a:srgbClr val="D5E2EC"/>
+                      </a:solidFill>
+                      <a:prstDash val="solid"/>
+                      <a:round/>
+                      <a:headEnd type="none" w="med" len="med"/>
+                      <a:tailEnd type="none" w="med" len="med"/>
+                    </a:lnL>
+                    <a:lnR w="6350" cap="flat" cmpd="sng" algn="ctr">
+                      <a:solidFill>
+                        <a:srgbClr val="D5E2EC"/>
+                      </a:solidFill>
+                      <a:prstDash val="solid"/>
+                      <a:round/>
+                      <a:headEnd type="none" w="med" len="med"/>
+                      <a:tailEnd type="none" w="med" len="med"/>
+                    </a:lnR>
+                    <a:lnT w="6350" cap="flat" cmpd="sng" algn="ctr">
+                      <a:solidFill>
+                        <a:srgbClr val="D5E2EC"/>
+                      </a:solidFill>
+                      <a:prstDash val="solid"/>
+                      <a:round/>
+                      <a:headEnd type="none" w="med" len="med"/>
+                      <a:tailEnd type="none" w="med" len="med"/>
+                    </a:lnT>
+                    <a:lnB w="6350" cap="flat" cmpd="sng" algn="ctr">
+                      <a:solidFill>
+                        <a:srgbClr val="D5E2EC"/>
+                      </a:solidFill>
+                      <a:prstDash val="solid"/>
+                      <a:round/>
+                      <a:headEnd type="none" w="med" len="med"/>
+                      <a:tailEnd type="none" w="med" len="med"/>
+                    </a:lnB>
+                    <a:solidFill>
+                      <a:srgbClr val="EAF2F8"/>
+                    </a:solidFill>
+                  </a:tcPr>
+                </a:tc>
+                <a:tc>
+                  <a:txBody>
+                    <a:bodyPr/>
+                    <a:lstStyle/>
+                    <a:p>
+                      <a:pPr algn="ctr" indent="0" marL="0">
+                        <a:buNone/>
+                      </a:pPr>
+                      <a:r>
+                        <a:rPr lang="en-US" sz="1000" dirty="0">
+                          <a:solidFill>
+                            <a:srgbClr val="1A2733"/>
+                          </a:solidFill>
+                          <a:latin typeface="Calibri" pitchFamily="34" charset="0"/>
+                          <a:ea typeface="Calibri" pitchFamily="34" charset="-122"/>
+                          <a:cs typeface="Calibri" pitchFamily="34" charset="-120"/>
+                        </a:rPr>
+                        <a:t>16.0</a:t>
+                      </a:r>
+                      <a:endParaRPr lang="en-US" sz="1000" dirty="0">
+                        <a:latin typeface="Calibri" charset="0"/>
+                        <a:ea typeface="Calibri" charset="0"/>
+                        <a:cs typeface="Calibri" charset="0"/>
+                      </a:endParaRPr>
+                    </a:p>
+                  </a:txBody>
+                  <a:tcPr marL="36576" marR="36576" marT="36576" marB="36576" anchor="ctr">
+                    <a:lnL w="6350" cap="flat" cmpd="sng" algn="ctr">
+                      <a:solidFill>
+                        <a:srgbClr val="D5E2EC"/>
+                      </a:solidFill>
+                      <a:prstDash val="solid"/>
+                      <a:round/>
+                      <a:headEnd type="none" w="med" len="med"/>
+                      <a:tailEnd type="none" w="med" len="med"/>
+                    </a:lnL>
+                    <a:lnR w="6350" cap="flat" cmpd="sng" algn="ctr">
+                      <a:solidFill>
+                        <a:srgbClr val="D5E2EC"/>
+                      </a:solidFill>
+                      <a:prstDash val="solid"/>
+                      <a:round/>
+                      <a:headEnd type="none" w="med" len="med"/>
+                      <a:tailEnd type="none" w="med" len="med"/>
+                    </a:lnR>
+                    <a:lnT w="6350" cap="flat" cmpd="sng" algn="ctr">
+                      <a:solidFill>
+                        <a:srgbClr val="D5E2EC"/>
+                      </a:solidFill>
+                      <a:prstDash val="solid"/>
+                      <a:round/>
+                      <a:headEnd type="none" w="med" len="med"/>
+                      <a:tailEnd type="none" w="med" len="med"/>
+                    </a:lnT>
+                    <a:lnB w="6350" cap="flat" cmpd="sng" algn="ctr">
+                      <a:solidFill>
+                        <a:srgbClr val="D5E2EC"/>
+                      </a:solidFill>
+                      <a:prstDash val="solid"/>
+                      <a:round/>
+                      <a:headEnd type="none" w="med" len="med"/>
+                      <a:tailEnd type="none" w="med" len="med"/>
+                    </a:lnB>
+                    <a:solidFill>
+                      <a:srgbClr val="EAF2F8"/>
+                    </a:solidFill>
+                  </a:tcPr>
+                </a:tc>
+                <a:tc>
+                  <a:txBody>
+                    <a:bodyPr/>
+                    <a:lstStyle/>
+                    <a:p>
+                      <a:pPr algn="ctr" indent="0" marL="0">
+                        <a:buNone/>
+                      </a:pPr>
+                      <a:r>
+                        <a:rPr lang="en-US" sz="1000" dirty="0">
+                          <a:solidFill>
+                            <a:srgbClr val="1A2733"/>
+                          </a:solidFill>
+                          <a:latin typeface="Calibri" pitchFamily="34" charset="0"/>
+                          <a:ea typeface="Calibri" pitchFamily="34" charset="-122"/>
+                          <a:cs typeface="Calibri" pitchFamily="34" charset="-120"/>
+                        </a:rPr>
+                        <a:t>32.0</a:t>
+                      </a:r>
+                      <a:endParaRPr lang="en-US" sz="1000" dirty="0">
+                        <a:latin typeface="Calibri" charset="0"/>
+                        <a:ea typeface="Calibri" charset="0"/>
+                        <a:cs typeface="Calibri" charset="0"/>
+                      </a:endParaRPr>
+                    </a:p>
+                  </a:txBody>
+                  <a:tcPr marL="36576" marR="36576" marT="36576" marB="36576" anchor="ctr">
+                    <a:lnL w="6350" cap="flat" cmpd="sng" algn="ctr">
+                      <a:solidFill>
+                        <a:srgbClr val="D5E2EC"/>
+                      </a:solidFill>
+                      <a:prstDash val="solid"/>
+                      <a:round/>
+                      <a:headEnd type="none" w="med" len="med"/>
+                      <a:tailEnd type="none" w="med" len="med"/>
+                    </a:lnL>
+                    <a:lnR w="6350" cap="flat" cmpd="sng" algn="ctr">
+                      <a:solidFill>
+                        <a:srgbClr val="D5E2EC"/>
+                      </a:solidFill>
+                      <a:prstDash val="solid"/>
+                      <a:round/>
+                      <a:headEnd type="none" w="med" len="med"/>
+                      <a:tailEnd type="none" w="med" len="med"/>
+                    </a:lnR>
+                    <a:lnT w="6350" cap="flat" cmpd="sng" algn="ctr">
+                      <a:solidFill>
+                        <a:srgbClr val="D5E2EC"/>
+                      </a:solidFill>
+                      <a:prstDash val="solid"/>
+                      <a:round/>
+                      <a:headEnd type="none" w="med" len="med"/>
+                      <a:tailEnd type="none" w="med" len="med"/>
+                    </a:lnT>
+                    <a:lnB w="6350" cap="flat" cmpd="sng" algn="ctr">
+                      <a:solidFill>
+                        <a:srgbClr val="D5E2EC"/>
+                      </a:solidFill>
+                      <a:prstDash val="solid"/>
+                      <a:round/>
+                      <a:headEnd type="none" w="med" len="med"/>
+                      <a:tailEnd type="none" w="med" len="med"/>
+                    </a:lnB>
+                    <a:solidFill>
+                      <a:srgbClr val="EAF2F8"/>
+                    </a:solidFill>
+                  </a:tcPr>
+                </a:tc>
+                <a:tc>
+                  <a:txBody>
+                    <a:bodyPr/>
+                    <a:lstStyle/>
+                    <a:p>
+                      <a:pPr algn="ctr" indent="0" marL="0">
+                        <a:buNone/>
+                      </a:pPr>
+                      <a:r>
+                        <a:rPr lang="en-US" sz="1000" dirty="0">
+                          <a:solidFill>
+                            <a:srgbClr val="1A2733"/>
+                          </a:solidFill>
+                          <a:latin typeface="Calibri" pitchFamily="34" charset="0"/>
+                          <a:ea typeface="Calibri" pitchFamily="34" charset="-122"/>
+                          <a:cs typeface="Calibri" pitchFamily="34" charset="-120"/>
+                        </a:rPr>
+                        <a:t>17.3</a:t>
+                      </a:r>
+                      <a:endParaRPr lang="en-US" sz="1000" dirty="0">
+                        <a:latin typeface="Calibri" charset="0"/>
+                        <a:ea typeface="Calibri" charset="0"/>
+                        <a:cs typeface="Calibri" charset="0"/>
+                      </a:endParaRPr>
+                    </a:p>
+                  </a:txBody>
+                  <a:tcPr marL="36576" marR="36576" marT="36576" marB="36576" anchor="ctr">
+                    <a:lnL w="6350" cap="flat" cmpd="sng" algn="ctr">
+                      <a:solidFill>
+                        <a:srgbClr val="D5E2EC"/>
+                      </a:solidFill>
+                      <a:prstDash val="solid"/>
+                      <a:round/>
+                      <a:headEnd type="none" w="med" len="med"/>
+                      <a:tailEnd type="none" w="med" len="med"/>
+                    </a:lnL>
+                    <a:lnR w="6350" cap="flat" cmpd="sng" algn="ctr">
+                      <a:solidFill>
+                        <a:srgbClr val="D5E2EC"/>
+                      </a:solidFill>
+                      <a:prstDash val="solid"/>
+                      <a:round/>
+                      <a:headEnd type="none" w="med" len="med"/>
+                      <a:tailEnd type="none" w="med" len="med"/>
+                    </a:lnR>
+                    <a:lnT w="6350" cap="flat" cmpd="sng" algn="ctr">
+                      <a:solidFill>
+                        <a:srgbClr val="D5E2EC"/>
+                      </a:solidFill>
+                      <a:prstDash val="solid"/>
+                      <a:round/>
+                      <a:headEnd type="none" w="med" len="med"/>
+                      <a:tailEnd type="none" w="med" len="med"/>
+                    </a:lnT>
+                    <a:lnB w="6350" cap="flat" cmpd="sng" algn="ctr">
+                      <a:solidFill>
+                        <a:srgbClr val="D5E2EC"/>
+                      </a:solidFill>
+                      <a:prstDash val="solid"/>
+                      <a:round/>
+                      <a:headEnd type="none" w="med" len="med"/>
+                      <a:tailEnd type="none" w="med" len="med"/>
+                    </a:lnB>
+                    <a:solidFill>
+                      <a:srgbClr val="EAF2F8"/>
+                    </a:solidFill>
+                  </a:tcPr>
+                </a:tc>
+                <a:tc>
+                  <a:txBody>
+                    <a:bodyPr/>
+                    <a:lstStyle/>
+                    <a:p>
+                      <a:pPr algn="ctr" indent="0" marL="0">
+                        <a:buNone/>
+                      </a:pPr>
+                      <a:r>
+                        <a:rPr lang="en-US" sz="1000" dirty="0">
+                          <a:solidFill>
+                            <a:srgbClr val="1A2733"/>
+                          </a:solidFill>
+                          <a:latin typeface="Calibri" pitchFamily="34" charset="0"/>
+                          <a:ea typeface="Calibri" pitchFamily="34" charset="-122"/>
+                          <a:cs typeface="Calibri" pitchFamily="34" charset="-120"/>
+                        </a:rPr>
+                        <a:t>4.0</a:t>
+                      </a:r>
+                      <a:endParaRPr lang="en-US" sz="1000" dirty="0">
+                        <a:latin typeface="Calibri" charset="0"/>
+                        <a:ea typeface="Calibri" charset="0"/>
+                        <a:cs typeface="Calibri" charset="0"/>
+                      </a:endParaRPr>
+                    </a:p>
+                  </a:txBody>
+                  <a:tcPr marL="36576" marR="36576" marT="36576" marB="36576" anchor="ctr">
+                    <a:lnL w="6350" cap="flat" cmpd="sng" algn="ctr">
+                      <a:solidFill>
+                        <a:srgbClr val="D5E2EC"/>
+                      </a:solidFill>
+                      <a:prstDash val="solid"/>
+                      <a:round/>
+                      <a:headEnd type="none" w="med" len="med"/>
+                      <a:tailEnd type="none" w="med" len="med"/>
+                    </a:lnL>
+                    <a:lnR w="6350" cap="flat" cmpd="sng" algn="ctr">
+                      <a:solidFill>
+                        <a:srgbClr val="D5E2EC"/>
+                      </a:solidFill>
+                      <a:prstDash val="solid"/>
+                      <a:round/>
+                      <a:headEnd type="none" w="med" len="med"/>
+                      <a:tailEnd type="none" w="med" len="med"/>
+                    </a:lnR>
+                    <a:lnT w="6350" cap="flat" cmpd="sng" algn="ctr">
+                      <a:solidFill>
+                        <a:srgbClr val="D5E2EC"/>
+                      </a:solidFill>
+                      <a:prstDash val="solid"/>
+                      <a:round/>
+                      <a:headEnd type="none" w="med" len="med"/>
+                      <a:tailEnd type="none" w="med" len="med"/>
+                    </a:lnT>
+                    <a:lnB w="6350" cap="flat" cmpd="sng" algn="ctr">
+                      <a:solidFill>
+                        <a:srgbClr val="D5E2EC"/>
+                      </a:solidFill>
+                      <a:prstDash val="solid"/>
+                      <a:round/>
+                      <a:headEnd type="none" w="med" len="med"/>
+                      <a:tailEnd type="none" w="med" len="med"/>
+                    </a:lnB>
+                    <a:solidFill>
+                      <a:srgbClr val="EAF2F8"/>
+                    </a:solidFill>
+                  </a:tcPr>
+                </a:tc>
+              </a:tr>
+              <a:tr h="0">
+                <a:tc>
+                  <a:txBody>
+                    <a:bodyPr/>
+                    <a:lstStyle/>
+                    <a:p>
+                      <a:pPr indent="0" marL="0">
+                        <a:buNone/>
+                      </a:pPr>
+                      <a:r>
+                        <a:rPr lang="en-US" sz="1000" dirty="0">
+                          <a:solidFill>
+                            <a:srgbClr val="1A2733"/>
+                          </a:solidFill>
+                          <a:latin typeface="Calibri" pitchFamily="34" charset="0"/>
+                          <a:ea typeface="Calibri" pitchFamily="34" charset="-122"/>
+                          <a:cs typeface="Calibri" pitchFamily="34" charset="-120"/>
+                        </a:rPr>
+                        <a:t>Route planning (A* raster, hazard extents, Rule 9 channel lane, turn geometry, survey/search patterns)</a:t>
+                      </a:r>
+                      <a:endParaRPr lang="en-US" sz="1000" dirty="0">
+                        <a:latin typeface="Calibri" charset="0"/>
+                        <a:ea typeface="Calibri" charset="0"/>
+                        <a:cs typeface="Calibri" charset="0"/>
+                      </a:endParaRPr>
+                    </a:p>
+                  </a:txBody>
+                  <a:tcPr marL="36576" marR="36576" marT="36576" marB="36576" anchor="ctr">
+                    <a:lnL w="6350" cap="flat" cmpd="sng" algn="ctr">
+                      <a:solidFill>
+                        <a:srgbClr val="D5E2EC"/>
+                      </a:solidFill>
+                      <a:prstDash val="solid"/>
+                      <a:round/>
+                      <a:headEnd type="none" w="med" len="med"/>
+                      <a:tailEnd type="none" w="med" len="med"/>
+                    </a:lnL>
+                    <a:lnR w="6350" cap="flat" cmpd="sng" algn="ctr">
+                      <a:solidFill>
+                        <a:srgbClr val="D5E2EC"/>
+                      </a:solidFill>
+                      <a:prstDash val="solid"/>
+                      <a:round/>
+                      <a:headEnd type="none" w="med" len="med"/>
+                      <a:tailEnd type="none" w="med" len="med"/>
+                    </a:lnR>
+                    <a:lnT w="6350" cap="flat" cmpd="sng" algn="ctr">
+                      <a:solidFill>
+                        <a:srgbClr val="D5E2EC"/>
+                      </a:solidFill>
+                      <a:prstDash val="solid"/>
+                      <a:round/>
+                      <a:headEnd type="none" w="med" len="med"/>
+                      <a:tailEnd type="none" w="med" len="med"/>
+                    </a:lnT>
+                    <a:lnB w="6350" cap="flat" cmpd="sng" algn="ctr">
+                      <a:solidFill>
+                        <a:srgbClr val="D5E2EC"/>
+                      </a:solidFill>
+                      <a:prstDash val="solid"/>
+                      <a:round/>
+                      <a:headEnd type="none" w="med" len="med"/>
+                      <a:tailEnd type="none" w="med" len="med"/>
+                    </a:lnB>
+                    <a:solidFill>
+                      <a:srgbClr val="FFFFFF"/>
+                    </a:solidFill>
+                  </a:tcPr>
+                </a:tc>
+                <a:tc>
+                  <a:txBody>
+                    <a:bodyPr/>
+                    <a:lstStyle/>
+                    <a:p>
+                      <a:pPr algn="ctr" indent="0" marL="0">
+                        <a:buNone/>
+                      </a:pPr>
+                      <a:r>
+                        <a:rPr lang="en-US" sz="1000" dirty="0">
+                          <a:solidFill>
+                            <a:srgbClr val="1A2733"/>
+                          </a:solidFill>
+                          <a:latin typeface="Calibri" pitchFamily="34" charset="0"/>
+                          <a:ea typeface="Calibri" pitchFamily="34" charset="-122"/>
+                          <a:cs typeface="Calibri" pitchFamily="34" charset="-120"/>
+                        </a:rPr>
+                        <a:t>10.0</a:t>
+                      </a:r>
+                      <a:endParaRPr lang="en-US" sz="1000" dirty="0">
+                        <a:latin typeface="Calibri" charset="0"/>
+                        <a:ea typeface="Calibri" charset="0"/>
+                        <a:cs typeface="Calibri" charset="0"/>
+                      </a:endParaRPr>
+                    </a:p>
+                  </a:txBody>
+                  <a:tcPr marL="36576" marR="36576" marT="36576" marB="36576" anchor="ctr">
+                    <a:lnL w="6350" cap="flat" cmpd="sng" algn="ctr">
+                      <a:solidFill>
+                        <a:srgbClr val="D5E2EC"/>
+                      </a:solidFill>
+                      <a:prstDash val="solid"/>
+                      <a:round/>
+                      <a:headEnd type="none" w="med" len="med"/>
+                      <a:tailEnd type="none" w="med" len="med"/>
+                    </a:lnL>
+                    <a:lnR w="6350" cap="flat" cmpd="sng" algn="ctr">
+                      <a:solidFill>
+                        <a:srgbClr val="D5E2EC"/>
+                      </a:solidFill>
+                      <a:prstDash val="solid"/>
+                      <a:round/>
+                      <a:headEnd type="none" w="med" len="med"/>
+                      <a:tailEnd type="none" w="med" len="med"/>
+                    </a:lnR>
+                    <a:lnT w="6350" cap="flat" cmpd="sng" algn="ctr">
+                      <a:solidFill>
+                        <a:srgbClr val="D5E2EC"/>
+                      </a:solidFill>
+                      <a:prstDash val="solid"/>
+                      <a:round/>
+                      <a:headEnd type="none" w="med" len="med"/>
+                      <a:tailEnd type="none" w="med" len="med"/>
+                    </a:lnT>
+                    <a:lnB w="6350" cap="flat" cmpd="sng" algn="ctr">
+                      <a:solidFill>
+                        <a:srgbClr val="D5E2EC"/>
+                      </a:solidFill>
+                      <a:prstDash val="solid"/>
+                      <a:round/>
+                      <a:headEnd type="none" w="med" len="med"/>
+                      <a:tailEnd type="none" w="med" len="med"/>
+                    </a:lnB>
+                    <a:solidFill>
+                      <a:srgbClr val="FFFFFF"/>
+                    </a:solidFill>
+                  </a:tcPr>
+                </a:tc>
+                <a:tc>
+                  <a:txBody>
+                    <a:bodyPr/>
+                    <a:lstStyle/>
+                    <a:p>
+                      <a:pPr algn="ctr" indent="0" marL="0">
+                        <a:buNone/>
+                      </a:pPr>
+                      <a:r>
+                        <a:rPr lang="en-US" sz="1000" dirty="0">
+                          <a:solidFill>
+                            <a:srgbClr val="1A2733"/>
+                          </a:solidFill>
+                          <a:latin typeface="Calibri" pitchFamily="34" charset="0"/>
+                          <a:ea typeface="Calibri" pitchFamily="34" charset="-122"/>
+                          <a:cs typeface="Calibri" pitchFamily="34" charset="-120"/>
+                        </a:rPr>
+                        <a:t>20.0</a:t>
+                      </a:r>
+                      <a:endParaRPr lang="en-US" sz="1000" dirty="0">
+                        <a:latin typeface="Calibri" charset="0"/>
+                        <a:ea typeface="Calibri" charset="0"/>
+                        <a:cs typeface="Calibri" charset="0"/>
+                      </a:endParaRPr>
+                    </a:p>
+                  </a:txBody>
+                  <a:tcPr marL="36576" marR="36576" marT="36576" marB="36576" anchor="ctr">
+                    <a:lnL w="6350" cap="flat" cmpd="sng" algn="ctr">
+                      <a:solidFill>
+                        <a:srgbClr val="D5E2EC"/>
+                      </a:solidFill>
+                      <a:prstDash val="solid"/>
+                      <a:round/>
+                      <a:headEnd type="none" w="med" len="med"/>
+                      <a:tailEnd type="none" w="med" len="med"/>
+                    </a:lnL>
+                    <a:lnR w="6350" cap="flat" cmpd="sng" algn="ctr">
+                      <a:solidFill>
+                        <a:srgbClr val="D5E2EC"/>
+                      </a:solidFill>
+                      <a:prstDash val="solid"/>
+                      <a:round/>
+                      <a:headEnd type="none" w="med" len="med"/>
+                      <a:tailEnd type="none" w="med" len="med"/>
+                    </a:lnR>
+                    <a:lnT w="6350" cap="flat" cmpd="sng" algn="ctr">
+                      <a:solidFill>
+                        <a:srgbClr val="D5E2EC"/>
+                      </a:solidFill>
+                      <a:prstDash val="solid"/>
+                      <a:round/>
+                      <a:headEnd type="none" w="med" len="med"/>
+                      <a:tailEnd type="none" w="med" len="med"/>
+                    </a:lnT>
+                    <a:lnB w="6350" cap="flat" cmpd="sng" algn="ctr">
+                      <a:solidFill>
+                        <a:srgbClr val="D5E2EC"/>
+                      </a:solidFill>
+                      <a:prstDash val="solid"/>
+                      <a:round/>
+                      <a:headEnd type="none" w="med" len="med"/>
+                      <a:tailEnd type="none" w="med" len="med"/>
+                    </a:lnB>
+                    <a:solidFill>
+                      <a:srgbClr val="FFFFFF"/>
+                    </a:solidFill>
+                  </a:tcPr>
+                </a:tc>
+                <a:tc>
+                  <a:txBody>
+                    <a:bodyPr/>
+                    <a:lstStyle/>
+                    <a:p>
+                      <a:pPr algn="ctr" indent="0" marL="0">
+                        <a:buNone/>
+                      </a:pPr>
+                      <a:r>
+                        <a:rPr lang="en-US" sz="1000" dirty="0">
+                          <a:solidFill>
+                            <a:srgbClr val="1A2733"/>
+                          </a:solidFill>
+                          <a:latin typeface="Calibri" pitchFamily="34" charset="0"/>
+                          <a:ea typeface="Calibri" pitchFamily="34" charset="-122"/>
+                          <a:cs typeface="Calibri" pitchFamily="34" charset="-120"/>
+                        </a:rPr>
+                        <a:t>40.0</a:t>
+                      </a:r>
+                      <a:endParaRPr lang="en-US" sz="1000" dirty="0">
+                        <a:latin typeface="Calibri" charset="0"/>
+                        <a:ea typeface="Calibri" charset="0"/>
+                        <a:cs typeface="Calibri" charset="0"/>
+                      </a:endParaRPr>
+                    </a:p>
+                  </a:txBody>
+                  <a:tcPr marL="36576" marR="36576" marT="36576" marB="36576" anchor="ctr">
+                    <a:lnL w="6350" cap="flat" cmpd="sng" algn="ctr">
+                      <a:solidFill>
+                        <a:srgbClr val="D5E2EC"/>
+                      </a:solidFill>
+                      <a:prstDash val="solid"/>
+                      <a:round/>
+                      <a:headEnd type="none" w="med" len="med"/>
+                      <a:tailEnd type="none" w="med" len="med"/>
+                    </a:lnL>
+                    <a:lnR w="6350" cap="flat" cmpd="sng" algn="ctr">
+                      <a:solidFill>
+                        <a:srgbClr val="D5E2EC"/>
+                      </a:solidFill>
+                      <a:prstDash val="solid"/>
+                      <a:round/>
+                      <a:headEnd type="none" w="med" len="med"/>
+                      <a:tailEnd type="none" w="med" len="med"/>
+                    </a:lnR>
+                    <a:lnT w="6350" cap="flat" cmpd="sng" algn="ctr">
+                      <a:solidFill>
+                        <a:srgbClr val="D5E2EC"/>
+                      </a:solidFill>
+                      <a:prstDash val="solid"/>
+                      <a:round/>
+                      <a:headEnd type="none" w="med" len="med"/>
+                      <a:tailEnd type="none" w="med" len="med"/>
+                    </a:lnT>
+                    <a:lnB w="6350" cap="flat" cmpd="sng" algn="ctr">
+                      <a:solidFill>
+                        <a:srgbClr val="D5E2EC"/>
+                      </a:solidFill>
+                      <a:prstDash val="solid"/>
+                      <a:round/>
+                      <a:headEnd type="none" w="med" len="med"/>
+                      <a:tailEnd type="none" w="med" len="med"/>
+                    </a:lnB>
+                    <a:solidFill>
+                      <a:srgbClr val="FFFFFF"/>
+                    </a:solidFill>
+                  </a:tcPr>
+                </a:tc>
+                <a:tc>
+                  <a:txBody>
+                    <a:bodyPr/>
+                    <a:lstStyle/>
+                    <a:p>
+                      <a:pPr algn="ctr" indent="0" marL="0">
+                        <a:buNone/>
+                      </a:pPr>
+                      <a:r>
+                        <a:rPr lang="en-US" sz="1000" dirty="0">
+                          <a:solidFill>
+                            <a:srgbClr val="1A2733"/>
+                          </a:solidFill>
+                          <a:latin typeface="Calibri" pitchFamily="34" charset="0"/>
+                          <a:ea typeface="Calibri" pitchFamily="34" charset="-122"/>
+                          <a:cs typeface="Calibri" pitchFamily="34" charset="-120"/>
+                        </a:rPr>
+                        <a:t>21.7</a:t>
+                      </a:r>
+                      <a:endParaRPr lang="en-US" sz="1000" dirty="0">
+                        <a:latin typeface="Calibri" charset="0"/>
+                        <a:ea typeface="Calibri" charset="0"/>
+                        <a:cs typeface="Calibri" charset="0"/>
+                      </a:endParaRPr>
+                    </a:p>
+                  </a:txBody>
+                  <a:tcPr marL="36576" marR="36576" marT="36576" marB="36576" anchor="ctr">
+                    <a:lnL w="6350" cap="flat" cmpd="sng" algn="ctr">
+                      <a:solidFill>
+                        <a:srgbClr val="D5E2EC"/>
+                      </a:solidFill>
+                      <a:prstDash val="solid"/>
+                      <a:round/>
+                      <a:headEnd type="none" w="med" len="med"/>
+                      <a:tailEnd type="none" w="med" len="med"/>
+                    </a:lnL>
+                    <a:lnR w="6350" cap="flat" cmpd="sng" algn="ctr">
+                      <a:solidFill>
+                        <a:srgbClr val="D5E2EC"/>
+                      </a:solidFill>
+                      <a:prstDash val="solid"/>
+                      <a:round/>
+                      <a:headEnd type="none" w="med" len="med"/>
+                      <a:tailEnd type="none" w="med" len="med"/>
+                    </a:lnR>
+                    <a:lnT w="6350" cap="flat" cmpd="sng" algn="ctr">
+                      <a:solidFill>
+                        <a:srgbClr val="D5E2EC"/>
+                      </a:solidFill>
+                      <a:prstDash val="solid"/>
+                      <a:round/>
+                      <a:headEnd type="none" w="med" len="med"/>
+                      <a:tailEnd type="none" w="med" len="med"/>
+                    </a:lnT>
+                    <a:lnB w="6350" cap="flat" cmpd="sng" algn="ctr">
+                      <a:solidFill>
+                        <a:srgbClr val="D5E2EC"/>
+                      </a:solidFill>
+                      <a:prstDash val="solid"/>
+                      <a:round/>
+                      <a:headEnd type="none" w="med" len="med"/>
+                      <a:tailEnd type="none" w="med" len="med"/>
+                    </a:lnB>
+                    <a:solidFill>
+                      <a:srgbClr val="FFFFFF"/>
+                    </a:solidFill>
+                  </a:tcPr>
+                </a:tc>
+                <a:tc>
+                  <a:txBody>
+                    <a:bodyPr/>
+                    <a:lstStyle/>
+                    <a:p>
+                      <a:pPr algn="ctr" indent="0" marL="0">
+                        <a:buNone/>
+                      </a:pPr>
+                      <a:r>
+                        <a:rPr lang="en-US" sz="1000" dirty="0">
+                          <a:solidFill>
+                            <a:srgbClr val="1A2733"/>
+                          </a:solidFill>
+                          <a:latin typeface="Calibri" pitchFamily="34" charset="0"/>
+                          <a:ea typeface="Calibri" pitchFamily="34" charset="-122"/>
+                          <a:cs typeface="Calibri" pitchFamily="34" charset="-120"/>
+                        </a:rPr>
+                        <a:t>5.0</a:t>
+                      </a:r>
+                      <a:endParaRPr lang="en-US" sz="1000" dirty="0">
+                        <a:latin typeface="Calibri" charset="0"/>
+                        <a:ea typeface="Calibri" charset="0"/>
+                        <a:cs typeface="Calibri" charset="0"/>
+                      </a:endParaRPr>
+                    </a:p>
+                  </a:txBody>
+                  <a:tcPr marL="36576" marR="36576" marT="36576" marB="36576" anchor="ctr">
+                    <a:lnL w="6350" cap="flat" cmpd="sng" algn="ctr">
+                      <a:solidFill>
+                        <a:srgbClr val="D5E2EC"/>
+                      </a:solidFill>
+                      <a:prstDash val="solid"/>
+                      <a:round/>
+                      <a:headEnd type="none" w="med" len="med"/>
+                      <a:tailEnd type="none" w="med" len="med"/>
+                    </a:lnL>
+                    <a:lnR w="6350" cap="flat" cmpd="sng" algn="ctr">
+                      <a:solidFill>
+                        <a:srgbClr val="D5E2EC"/>
+                      </a:solidFill>
+                      <a:prstDash val="solid"/>
+                      <a:round/>
+                      <a:headEnd type="none" w="med" len="med"/>
+                      <a:tailEnd type="none" w="med" len="med"/>
+                    </a:lnR>
+                    <a:lnT w="6350" cap="flat" cmpd="sng" algn="ctr">
+                      <a:solidFill>
+                        <a:srgbClr val="D5E2EC"/>
+                      </a:solidFill>
+                      <a:prstDash val="solid"/>
+                      <a:round/>
+                      <a:headEnd type="none" w="med" len="med"/>
+                      <a:tailEnd type="none" w="med" len="med"/>
+                    </a:lnT>
+                    <a:lnB w="6350" cap="flat" cmpd="sng" algn="ctr">
+                      <a:solidFill>
+                        <a:srgbClr val="D5E2EC"/>
+                      </a:solidFill>
+                      <a:prstDash val="solid"/>
+                      <a:round/>
+                      <a:headEnd type="none" w="med" len="med"/>
+                      <a:tailEnd type="none" w="med" len="med"/>
+                    </a:lnB>
+                    <a:solidFill>
+                      <a:srgbClr val="FFFFFF"/>
+                    </a:solidFill>
+                  </a:tcPr>
+                </a:tc>
+              </a:tr>
+              <a:tr h="0">
+                <a:tc>
+                  <a:txBody>
+                    <a:bodyPr/>
+                    <a:lstStyle/>
+                    <a:p>
+                      <a:pPr indent="0" marL="0">
+                        <a:buNone/>
+                      </a:pPr>
+                      <a:r>
+                        <a:rPr lang="en-US" sz="1000" dirty="0">
+                          <a:solidFill>
+                            <a:srgbClr val="1A2733"/>
+                          </a:solidFill>
+                          <a:latin typeface="Calibri" pitchFamily="34" charset="0"/>
+                          <a:ea typeface="Calibri" pitchFamily="34" charset="-122"/>
+                          <a:cs typeface="Calibri" pitchFamily="34" charset="-120"/>
+                        </a:rPr>
+                        <a:t>Vessel simulator (hull physics, autopilot, battery &amp; diesel energy, live-weather environment)</a:t>
+                      </a:r>
+                      <a:endParaRPr lang="en-US" sz="1000" dirty="0">
+                        <a:latin typeface="Calibri" charset="0"/>
+                        <a:ea typeface="Calibri" charset="0"/>
+                        <a:cs typeface="Calibri" charset="0"/>
+                      </a:endParaRPr>
+                    </a:p>
+                  </a:txBody>
+                  <a:tcPr marL="36576" marR="36576" marT="36576" marB="36576" anchor="ctr">
+                    <a:lnL w="6350" cap="flat" cmpd="sng" algn="ctr">
+                      <a:solidFill>
+                        <a:srgbClr val="D5E2EC"/>
+                      </a:solidFill>
+                      <a:prstDash val="solid"/>
+                      <a:round/>
+                      <a:headEnd type="none" w="med" len="med"/>
+                      <a:tailEnd type="none" w="med" len="med"/>
+                    </a:lnL>
+                    <a:lnR w="6350" cap="flat" cmpd="sng" algn="ctr">
+                      <a:solidFill>
+                        <a:srgbClr val="D5E2EC"/>
+                      </a:solidFill>
+                      <a:prstDash val="solid"/>
+                      <a:round/>
+                      <a:headEnd type="none" w="med" len="med"/>
+                      <a:tailEnd type="none" w="med" len="med"/>
+                    </a:lnR>
+                    <a:lnT w="6350" cap="flat" cmpd="sng" algn="ctr">
+                      <a:solidFill>
+                        <a:srgbClr val="D5E2EC"/>
+                      </a:solidFill>
+                      <a:prstDash val="solid"/>
+                      <a:round/>
+                      <a:headEnd type="none" w="med" len="med"/>
+                      <a:tailEnd type="none" w="med" len="med"/>
+                    </a:lnT>
+                    <a:lnB w="6350" cap="flat" cmpd="sng" algn="ctr">
+                      <a:solidFill>
+                        <a:srgbClr val="D5E2EC"/>
+                      </a:solidFill>
+                      <a:prstDash val="solid"/>
+                      <a:round/>
+                      <a:headEnd type="none" w="med" len="med"/>
+                      <a:tailEnd type="none" w="med" len="med"/>
+                    </a:lnB>
+                    <a:solidFill>
+                      <a:srgbClr val="EAF2F8"/>
+                    </a:solidFill>
+                  </a:tcPr>
+                </a:tc>
+                <a:tc>
+                  <a:txBody>
+                    <a:bodyPr/>
+                    <a:lstStyle/>
+                    <a:p>
+                      <a:pPr algn="ctr" indent="0" marL="0">
+                        <a:buNone/>
+                      </a:pPr>
+                      <a:r>
+                        <a:rPr lang="en-US" sz="1000" dirty="0">
+                          <a:solidFill>
+                            <a:srgbClr val="1A2733"/>
+                          </a:solidFill>
+                          <a:latin typeface="Calibri" pitchFamily="34" charset="0"/>
+                          <a:ea typeface="Calibri" pitchFamily="34" charset="-122"/>
+                          <a:cs typeface="Calibri" pitchFamily="34" charset="-120"/>
+                        </a:rPr>
+                        <a:t>8.0</a:t>
+                      </a:r>
+                      <a:endParaRPr lang="en-US" sz="1000" dirty="0">
+                        <a:latin typeface="Calibri" charset="0"/>
+                        <a:ea typeface="Calibri" charset="0"/>
+                        <a:cs typeface="Calibri" charset="0"/>
+                      </a:endParaRPr>
+                    </a:p>
+                  </a:txBody>
+                  <a:tcPr marL="36576" marR="36576" marT="36576" marB="36576" anchor="ctr">
+                    <a:lnL w="6350" cap="flat" cmpd="sng" algn="ctr">
+                      <a:solidFill>
+                        <a:srgbClr val="D5E2EC"/>
+                      </a:solidFill>
+                      <a:prstDash val="solid"/>
+                      <a:round/>
+                      <a:headEnd type="none" w="med" len="med"/>
+                      <a:tailEnd type="none" w="med" len="med"/>
+                    </a:lnL>
+                    <a:lnR w="6350" cap="flat" cmpd="sng" algn="ctr">
+                      <a:solidFill>
+                        <a:srgbClr val="D5E2EC"/>
+                      </a:solidFill>
+                      <a:prstDash val="solid"/>
+                      <a:round/>
+                      <a:headEnd type="none" w="med" len="med"/>
+                      <a:tailEnd type="none" w="med" len="med"/>
+                    </a:lnR>
+                    <a:lnT w="6350" cap="flat" cmpd="sng" algn="ctr">
+                      <a:solidFill>
+                        <a:srgbClr val="D5E2EC"/>
+                      </a:solidFill>
+                      <a:prstDash val="solid"/>
+                      <a:round/>
+                      <a:headEnd type="none" w="med" len="med"/>
+                      <a:tailEnd type="none" w="med" len="med"/>
+                    </a:lnT>
+                    <a:lnB w="6350" cap="flat" cmpd="sng" algn="ctr">
+                      <a:solidFill>
+                        <a:srgbClr val="D5E2EC"/>
+                      </a:solidFill>
+                      <a:prstDash val="solid"/>
+                      <a:round/>
+                      <a:headEnd type="none" w="med" len="med"/>
+                      <a:tailEnd type="none" w="med" len="med"/>
+                    </a:lnB>
+                    <a:solidFill>
+                      <a:srgbClr val="EAF2F8"/>
+                    </a:solidFill>
+                  </a:tcPr>
+                </a:tc>
+                <a:tc>
+                  <a:txBody>
+                    <a:bodyPr/>
+                    <a:lstStyle/>
+                    <a:p>
+                      <a:pPr algn="ctr" indent="0" marL="0">
+                        <a:buNone/>
+                      </a:pPr>
+                      <a:r>
+                        <a:rPr lang="en-US" sz="1000" dirty="0">
+                          <a:solidFill>
+                            <a:srgbClr val="1A2733"/>
+                          </a:solidFill>
+                          <a:latin typeface="Calibri" pitchFamily="34" charset="0"/>
+                          <a:ea typeface="Calibri" pitchFamily="34" charset="-122"/>
+                          <a:cs typeface="Calibri" pitchFamily="34" charset="-120"/>
+                        </a:rPr>
+                        <a:t>16.0</a:t>
+                      </a:r>
+                      <a:endParaRPr lang="en-US" sz="1000" dirty="0">
+                        <a:latin typeface="Calibri" charset="0"/>
+                        <a:ea typeface="Calibri" charset="0"/>
+                        <a:cs typeface="Calibri" charset="0"/>
+                      </a:endParaRPr>
+                    </a:p>
+                  </a:txBody>
+                  <a:tcPr marL="36576" marR="36576" marT="36576" marB="36576" anchor="ctr">
+                    <a:lnL w="6350" cap="flat" cmpd="sng" algn="ctr">
+                      <a:solidFill>
+                        <a:srgbClr val="D5E2EC"/>
+                      </a:solidFill>
+                      <a:prstDash val="solid"/>
+                      <a:round/>
+                      <a:headEnd type="none" w="med" len="med"/>
+                      <a:tailEnd type="none" w="med" len="med"/>
+                    </a:lnL>
+                    <a:lnR w="6350" cap="flat" cmpd="sng" algn="ctr">
+                      <a:solidFill>
+                        <a:srgbClr val="D5E2EC"/>
+                      </a:solidFill>
+                      <a:prstDash val="solid"/>
+                      <a:round/>
+                      <a:headEnd type="none" w="med" len="med"/>
+                      <a:tailEnd type="none" w="med" len="med"/>
+                    </a:lnR>
+                    <a:lnT w="6350" cap="flat" cmpd="sng" algn="ctr">
+                      <a:solidFill>
+                        <a:srgbClr val="D5E2EC"/>
+                      </a:solidFill>
+                      <a:prstDash val="solid"/>
+                      <a:round/>
+                      <a:headEnd type="none" w="med" len="med"/>
+                      <a:tailEnd type="none" w="med" len="med"/>
+                    </a:lnT>
+                    <a:lnB w="6350" cap="flat" cmpd="sng" algn="ctr">
+                      <a:solidFill>
+                        <a:srgbClr val="D5E2EC"/>
+                      </a:solidFill>
+                      <a:prstDash val="solid"/>
+                      <a:round/>
+                      <a:headEnd type="none" w="med" len="med"/>
+                      <a:tailEnd type="none" w="med" len="med"/>
+                    </a:lnB>
+                    <a:solidFill>
+                      <a:srgbClr val="EAF2F8"/>
+                    </a:solidFill>
+                  </a:tcPr>
+                </a:tc>
+                <a:tc>
+                  <a:txBody>
+                    <a:bodyPr/>
+                    <a:lstStyle/>
+                    <a:p>
+                      <a:pPr algn="ctr" indent="0" marL="0">
+                        <a:buNone/>
+                      </a:pPr>
+                      <a:r>
+                        <a:rPr lang="en-US" sz="1000" dirty="0">
+                          <a:solidFill>
+                            <a:srgbClr val="1A2733"/>
+                          </a:solidFill>
+                          <a:latin typeface="Calibri" pitchFamily="34" charset="0"/>
+                          <a:ea typeface="Calibri" pitchFamily="34" charset="-122"/>
+                          <a:cs typeface="Calibri" pitchFamily="34" charset="-120"/>
+                        </a:rPr>
+                        <a:t>30.0</a:t>
+                      </a:r>
+                      <a:endParaRPr lang="en-US" sz="1000" dirty="0">
+                        <a:latin typeface="Calibri" charset="0"/>
+                        <a:ea typeface="Calibri" charset="0"/>
+                        <a:cs typeface="Calibri" charset="0"/>
+                      </a:endParaRPr>
+                    </a:p>
+                  </a:txBody>
+                  <a:tcPr marL="36576" marR="36576" marT="36576" marB="36576" anchor="ctr">
+                    <a:lnL w="6350" cap="flat" cmpd="sng" algn="ctr">
+                      <a:solidFill>
+                        <a:srgbClr val="D5E2EC"/>
+                      </a:solidFill>
+                      <a:prstDash val="solid"/>
+                      <a:round/>
+                      <a:headEnd type="none" w="med" len="med"/>
+                      <a:tailEnd type="none" w="med" len="med"/>
+                    </a:lnL>
+                    <a:lnR w="6350" cap="flat" cmpd="sng" algn="ctr">
+                      <a:solidFill>
+                        <a:srgbClr val="D5E2EC"/>
+                      </a:solidFill>
+                      <a:prstDash val="solid"/>
+                      <a:round/>
+                      <a:headEnd type="none" w="med" len="med"/>
+                      <a:tailEnd type="none" w="med" len="med"/>
+                    </a:lnR>
+                    <a:lnT w="6350" cap="flat" cmpd="sng" algn="ctr">
+                      <a:solidFill>
+                        <a:srgbClr val="D5E2EC"/>
+                      </a:solidFill>
+                      <a:prstDash val="solid"/>
+                      <a:round/>
+                      <a:headEnd type="none" w="med" len="med"/>
+                      <a:tailEnd type="none" w="med" len="med"/>
+                    </a:lnT>
+                    <a:lnB w="6350" cap="flat" cmpd="sng" algn="ctr">
+                      <a:solidFill>
+                        <a:srgbClr val="D5E2EC"/>
+                      </a:solidFill>
+                      <a:prstDash val="solid"/>
+                      <a:round/>
+                      <a:headEnd type="none" w="med" len="med"/>
+                      <a:tailEnd type="none" w="med" len="med"/>
+                    </a:lnB>
+                    <a:solidFill>
+                      <a:srgbClr val="EAF2F8"/>
+                    </a:solidFill>
+                  </a:tcPr>
+                </a:tc>
+                <a:tc>
+                  <a:txBody>
+                    <a:bodyPr/>
+                    <a:lstStyle/>
+                    <a:p>
+                      <a:pPr algn="ctr" indent="0" marL="0">
+                        <a:buNone/>
+                      </a:pPr>
+                      <a:r>
+                        <a:rPr lang="en-US" sz="1000" dirty="0">
+                          <a:solidFill>
+                            <a:srgbClr val="1A2733"/>
+                          </a:solidFill>
+                          <a:latin typeface="Calibri" pitchFamily="34" charset="0"/>
+                          <a:ea typeface="Calibri" pitchFamily="34" charset="-122"/>
+                          <a:cs typeface="Calibri" pitchFamily="34" charset="-120"/>
+                        </a:rPr>
+                        <a:t>17.0</a:t>
+                      </a:r>
+                      <a:endParaRPr lang="en-US" sz="1000" dirty="0">
+                        <a:latin typeface="Calibri" charset="0"/>
+                        <a:ea typeface="Calibri" charset="0"/>
+                        <a:cs typeface="Calibri" charset="0"/>
+                      </a:endParaRPr>
+                    </a:p>
+                  </a:txBody>
+                  <a:tcPr marL="36576" marR="36576" marT="36576" marB="36576" anchor="ctr">
+                    <a:lnL w="6350" cap="flat" cmpd="sng" algn="ctr">
+                      <a:solidFill>
+                        <a:srgbClr val="D5E2EC"/>
+                      </a:solidFill>
+                      <a:prstDash val="solid"/>
+                      <a:round/>
+                      <a:headEnd type="none" w="med" len="med"/>
+                      <a:tailEnd type="none" w="med" len="med"/>
+                    </a:lnL>
+                    <a:lnR w="6350" cap="flat" cmpd="sng" algn="ctr">
+                      <a:solidFill>
+                        <a:srgbClr val="D5E2EC"/>
+                      </a:solidFill>
+                      <a:prstDash val="solid"/>
+                      <a:round/>
+                      <a:headEnd type="none" w="med" len="med"/>
+                      <a:tailEnd type="none" w="med" len="med"/>
+                    </a:lnR>
+                    <a:lnT w="6350" cap="flat" cmpd="sng" algn="ctr">
+                      <a:solidFill>
+                        <a:srgbClr val="D5E2EC"/>
+                      </a:solidFill>
+                      <a:prstDash val="solid"/>
+                      <a:round/>
+                      <a:headEnd type="none" w="med" len="med"/>
+                      <a:tailEnd type="none" w="med" len="med"/>
+                    </a:lnT>
+                    <a:lnB w="6350" cap="flat" cmpd="sng" algn="ctr">
+                      <a:solidFill>
+                        <a:srgbClr val="D5E2EC"/>
+                      </a:solidFill>
+                      <a:prstDash val="solid"/>
+                      <a:round/>
+                      <a:headEnd type="none" w="med" len="med"/>
+                      <a:tailEnd type="none" w="med" len="med"/>
+                    </a:lnB>
+                    <a:solidFill>
+                      <a:srgbClr val="EAF2F8"/>
+                    </a:solidFill>
+                  </a:tcPr>
+                </a:tc>
+                <a:tc>
+                  <a:txBody>
+                    <a:bodyPr/>
+                    <a:lstStyle/>
+                    <a:p>
+                      <a:pPr algn="ctr" indent="0" marL="0">
+                        <a:buNone/>
+                      </a:pPr>
+                      <a:r>
+                        <a:rPr lang="en-US" sz="1000" dirty="0">
+                          <a:solidFill>
+                            <a:srgbClr val="1A2733"/>
+                          </a:solidFill>
+                          <a:latin typeface="Calibri" pitchFamily="34" charset="0"/>
+                          <a:ea typeface="Calibri" pitchFamily="34" charset="-122"/>
+                          <a:cs typeface="Calibri" pitchFamily="34" charset="-120"/>
+                        </a:rPr>
+                        <a:t>3.7</a:t>
+                      </a:r>
+                      <a:endParaRPr lang="en-US" sz="1000" dirty="0">
+                        <a:latin typeface="Calibri" charset="0"/>
+                        <a:ea typeface="Calibri" charset="0"/>
+                        <a:cs typeface="Calibri" charset="0"/>
+                      </a:endParaRPr>
+                    </a:p>
+                  </a:txBody>
+                  <a:tcPr marL="36576" marR="36576" marT="36576" marB="36576" anchor="ctr">
+                    <a:lnL w="6350" cap="flat" cmpd="sng" algn="ctr">
+                      <a:solidFill>
+                        <a:srgbClr val="D5E2EC"/>
+                      </a:solidFill>
+                      <a:prstDash val="solid"/>
+                      <a:round/>
+                      <a:headEnd type="none" w="med" len="med"/>
+                      <a:tailEnd type="none" w="med" len="med"/>
+                    </a:lnL>
+                    <a:lnR w="6350" cap="flat" cmpd="sng" algn="ctr">
+                      <a:solidFill>
+                        <a:srgbClr val="D5E2EC"/>
+                      </a:solidFill>
+                      <a:prstDash val="solid"/>
+                      <a:round/>
+                      <a:headEnd type="none" w="med" len="med"/>
+                      <a:tailEnd type="none" w="med" len="med"/>
+                    </a:lnR>
+                    <a:lnT w="6350" cap="flat" cmpd="sng" algn="ctr">
+                      <a:solidFill>
+                        <a:srgbClr val="D5E2EC"/>
+                      </a:solidFill>
+                      <a:prstDash val="solid"/>
+                      <a:round/>
+                      <a:headEnd type="none" w="med" len="med"/>
+                      <a:tailEnd type="none" w="med" len="med"/>
+                    </a:lnT>
+                    <a:lnB w="6350" cap="flat" cmpd="sng" algn="ctr">
+                      <a:solidFill>
+                        <a:srgbClr val="D5E2EC"/>
+                      </a:solidFill>
+                      <a:prstDash val="solid"/>
+                      <a:round/>
+                      <a:headEnd type="none" w="med" len="med"/>
+                      <a:tailEnd type="none" w="med" len="med"/>
+                    </a:lnB>
+                    <a:solidFill>
+                      <a:srgbClr val="EAF2F8"/>
+                    </a:solidFill>
+                  </a:tcPr>
+                </a:tc>
+              </a:tr>
+              <a:tr h="0">
+                <a:tc>
+                  <a:txBody>
+                    <a:bodyPr/>
+                    <a:lstStyle/>
+                    <a:p>
+                      <a:pPr indent="0" marL="0">
+                        <a:buNone/>
+                      </a:pPr>
+                      <a:r>
+                        <a:rPr lang="en-US" sz="1000" dirty="0">
+                          <a:solidFill>
+                            <a:srgbClr val="1A2733"/>
+                          </a:solidFill>
+                          <a:latin typeface="Calibri" pitchFamily="34" charset="0"/>
+                          <a:ea typeface="Calibri" pitchFamily="34" charset="-122"/>
+                          <a:cs typeface="Calibri" pitchFamily="34" charset="-120"/>
+                        </a:rPr>
+                        <a:t>Command &amp; safety model (VCU seam, arm/SAFE/E-STOP gating, run lifecycle, honest refusals)</a:t>
+                      </a:r>
+                      <a:endParaRPr lang="en-US" sz="1000" dirty="0">
+                        <a:latin typeface="Calibri" charset="0"/>
+                        <a:ea typeface="Calibri" charset="0"/>
+                        <a:cs typeface="Calibri" charset="0"/>
+                      </a:endParaRPr>
+                    </a:p>
+                  </a:txBody>
+                  <a:tcPr marL="36576" marR="36576" marT="36576" marB="36576" anchor="ctr">
+                    <a:lnL w="6350" cap="flat" cmpd="sng" algn="ctr">
+                      <a:solidFill>
+                        <a:srgbClr val="D5E2EC"/>
+                      </a:solidFill>
+                      <a:prstDash val="solid"/>
+                      <a:round/>
+                      <a:headEnd type="none" w="med" len="med"/>
+                      <a:tailEnd type="none" w="med" len="med"/>
+                    </a:lnL>
+                    <a:lnR w="6350" cap="flat" cmpd="sng" algn="ctr">
+                      <a:solidFill>
+                        <a:srgbClr val="D5E2EC"/>
+                      </a:solidFill>
+                      <a:prstDash val="solid"/>
+                      <a:round/>
+                      <a:headEnd type="none" w="med" len="med"/>
+                      <a:tailEnd type="none" w="med" len="med"/>
+                    </a:lnR>
+                    <a:lnT w="6350" cap="flat" cmpd="sng" algn="ctr">
+                      <a:solidFill>
+                        <a:srgbClr val="D5E2EC"/>
+                      </a:solidFill>
+                      <a:prstDash val="solid"/>
+                      <a:round/>
+                      <a:headEnd type="none" w="med" len="med"/>
+                      <a:tailEnd type="none" w="med" len="med"/>
+                    </a:lnT>
+                    <a:lnB w="6350" cap="flat" cmpd="sng" algn="ctr">
+                      <a:solidFill>
+                        <a:srgbClr val="D5E2EC"/>
+                      </a:solidFill>
+                      <a:prstDash val="solid"/>
+                      <a:round/>
+                      <a:headEnd type="none" w="med" len="med"/>
+                      <a:tailEnd type="none" w="med" len="med"/>
+                    </a:lnB>
+                    <a:solidFill>
+                      <a:srgbClr val="FFFFFF"/>
+                    </a:solidFill>
+                  </a:tcPr>
+                </a:tc>
+                <a:tc>
+                  <a:txBody>
+                    <a:bodyPr/>
+                    <a:lstStyle/>
+                    <a:p>
+                      <a:pPr algn="ctr" indent="0" marL="0">
+                        <a:buNone/>
+                      </a:pPr>
+                      <a:r>
+                        <a:rPr lang="en-US" sz="1000" dirty="0">
+                          <a:solidFill>
+                            <a:srgbClr val="1A2733"/>
+                          </a:solidFill>
+                          <a:latin typeface="Calibri" pitchFamily="34" charset="0"/>
+                          <a:ea typeface="Calibri" pitchFamily="34" charset="-122"/>
+                          <a:cs typeface="Calibri" pitchFamily="34" charset="-120"/>
+                        </a:rPr>
+                        <a:t>6.0</a:t>
+                      </a:r>
+                      <a:endParaRPr lang="en-US" sz="1000" dirty="0">
+                        <a:latin typeface="Calibri" charset="0"/>
+                        <a:ea typeface="Calibri" charset="0"/>
+                        <a:cs typeface="Calibri" charset="0"/>
+                      </a:endParaRPr>
+                    </a:p>
+                  </a:txBody>
+                  <a:tcPr marL="36576" marR="36576" marT="36576" marB="36576" anchor="ctr">
+                    <a:lnL w="6350" cap="flat" cmpd="sng" algn="ctr">
+                      <a:solidFill>
+                        <a:srgbClr val="D5E2EC"/>
+                      </a:solidFill>
+                      <a:prstDash val="solid"/>
+                      <a:round/>
+                      <a:headEnd type="none" w="med" len="med"/>
+                      <a:tailEnd type="none" w="med" len="med"/>
+                    </a:lnL>
+                    <a:lnR w="6350" cap="flat" cmpd="sng" algn="ctr">
+                      <a:solidFill>
+                        <a:srgbClr val="D5E2EC"/>
+                      </a:solidFill>
+                      <a:prstDash val="solid"/>
+                      <a:round/>
+                      <a:headEnd type="none" w="med" len="med"/>
+                      <a:tailEnd type="none" w="med" len="med"/>
+                    </a:lnR>
+                    <a:lnT w="6350" cap="flat" cmpd="sng" algn="ctr">
+                      <a:solidFill>
+                        <a:srgbClr val="D5E2EC"/>
+                      </a:solidFill>
+                      <a:prstDash val="solid"/>
+                      <a:round/>
+                      <a:headEnd type="none" w="med" len="med"/>
+                      <a:tailEnd type="none" w="med" len="med"/>
+                    </a:lnT>
+                    <a:lnB w="6350" cap="flat" cmpd="sng" algn="ctr">
+                      <a:solidFill>
+                        <a:srgbClr val="D5E2EC"/>
+                      </a:solidFill>
+                      <a:prstDash val="solid"/>
+                      <a:round/>
+                      <a:headEnd type="none" w="med" len="med"/>
+                      <a:tailEnd type="none" w="med" len="med"/>
+                    </a:lnB>
+                    <a:solidFill>
+                      <a:srgbClr val="FFFFFF"/>
+                    </a:solidFill>
+                  </a:tcPr>
+                </a:tc>
+                <a:tc>
+                  <a:txBody>
+                    <a:bodyPr/>
+                    <a:lstStyle/>
+                    <a:p>
+                      <a:pPr algn="ctr" indent="0" marL="0">
+                        <a:buNone/>
+                      </a:pPr>
+                      <a:r>
+                        <a:rPr lang="en-US" sz="1000" dirty="0">
+                          <a:solidFill>
+                            <a:srgbClr val="1A2733"/>
+                          </a:solidFill>
+                          <a:latin typeface="Calibri" pitchFamily="34" charset="0"/>
+                          <a:ea typeface="Calibri" pitchFamily="34" charset="-122"/>
+                          <a:cs typeface="Calibri" pitchFamily="34" charset="-120"/>
+                        </a:rPr>
+                        <a:t>12.0</a:t>
+                      </a:r>
+                      <a:endParaRPr lang="en-US" sz="1000" dirty="0">
+                        <a:latin typeface="Calibri" charset="0"/>
+                        <a:ea typeface="Calibri" charset="0"/>
+                        <a:cs typeface="Calibri" charset="0"/>
+                      </a:endParaRPr>
+                    </a:p>
+                  </a:txBody>
+                  <a:tcPr marL="36576" marR="36576" marT="36576" marB="36576" anchor="ctr">
+                    <a:lnL w="6350" cap="flat" cmpd="sng" algn="ctr">
+                      <a:solidFill>
+                        <a:srgbClr val="D5E2EC"/>
+                      </a:solidFill>
+                      <a:prstDash val="solid"/>
+                      <a:round/>
+                      <a:headEnd type="none" w="med" len="med"/>
+                      <a:tailEnd type="none" w="med" len="med"/>
+                    </a:lnL>
+                    <a:lnR w="6350" cap="flat" cmpd="sng" algn="ctr">
+                      <a:solidFill>
+                        <a:srgbClr val="D5E2EC"/>
+                      </a:solidFill>
+                      <a:prstDash val="solid"/>
+                      <a:round/>
+                      <a:headEnd type="none" w="med" len="med"/>
+                      <a:tailEnd type="none" w="med" len="med"/>
+                    </a:lnR>
+                    <a:lnT w="6350" cap="flat" cmpd="sng" algn="ctr">
+                      <a:solidFill>
+                        <a:srgbClr val="D5E2EC"/>
+                      </a:solidFill>
+                      <a:prstDash val="solid"/>
+                      <a:round/>
+                      <a:headEnd type="none" w="med" len="med"/>
+                      <a:tailEnd type="none" w="med" len="med"/>
+                    </a:lnT>
+                    <a:lnB w="6350" cap="flat" cmpd="sng" algn="ctr">
+                      <a:solidFill>
+                        <a:srgbClr val="D5E2EC"/>
+                      </a:solidFill>
+                      <a:prstDash val="solid"/>
+                      <a:round/>
+                      <a:headEnd type="none" w="med" len="med"/>
+                      <a:tailEnd type="none" w="med" len="med"/>
+                    </a:lnB>
+                    <a:solidFill>
+                      <a:srgbClr val="FFFFFF"/>
+                    </a:solidFill>
+                  </a:tcPr>
+                </a:tc>
+                <a:tc>
+                  <a:txBody>
+                    <a:bodyPr/>
+                    <a:lstStyle/>
+                    <a:p>
+                      <a:pPr algn="ctr" indent="0" marL="0">
+                        <a:buNone/>
+                      </a:pPr>
+                      <a:r>
+                        <a:rPr lang="en-US" sz="1000" dirty="0">
+                          <a:solidFill>
+                            <a:srgbClr val="1A2733"/>
+                          </a:solidFill>
+                          <a:latin typeface="Calibri" pitchFamily="34" charset="0"/>
+                          <a:ea typeface="Calibri" pitchFamily="34" charset="-122"/>
+                          <a:cs typeface="Calibri" pitchFamily="34" charset="-120"/>
+                        </a:rPr>
+                        <a:t>24.0</a:t>
+                      </a:r>
+                      <a:endParaRPr lang="en-US" sz="1000" dirty="0">
+                        <a:latin typeface="Calibri" charset="0"/>
+                        <a:ea typeface="Calibri" charset="0"/>
+                        <a:cs typeface="Calibri" charset="0"/>
+                      </a:endParaRPr>
+                    </a:p>
+                  </a:txBody>
+                  <a:tcPr marL="36576" marR="36576" marT="36576" marB="36576" anchor="ctr">
+                    <a:lnL w="6350" cap="flat" cmpd="sng" algn="ctr">
+                      <a:solidFill>
+                        <a:srgbClr val="D5E2EC"/>
+                      </a:solidFill>
+                      <a:prstDash val="solid"/>
+                      <a:round/>
+                      <a:headEnd type="none" w="med" len="med"/>
+                      <a:tailEnd type="none" w="med" len="med"/>
+                    </a:lnL>
+                    <a:lnR w="6350" cap="flat" cmpd="sng" algn="ctr">
+                      <a:solidFill>
+                        <a:srgbClr val="D5E2EC"/>
+                      </a:solidFill>
+                      <a:prstDash val="solid"/>
+                      <a:round/>
+                      <a:headEnd type="none" w="med" len="med"/>
+                      <a:tailEnd type="none" w="med" len="med"/>
+                    </a:lnR>
+                    <a:lnT w="6350" cap="flat" cmpd="sng" algn="ctr">
+                      <a:solidFill>
+                        <a:srgbClr val="D5E2EC"/>
+                      </a:solidFill>
+                      <a:prstDash val="solid"/>
+                      <a:round/>
+                      <a:headEnd type="none" w="med" len="med"/>
+                      <a:tailEnd type="none" w="med" len="med"/>
+                    </a:lnT>
+                    <a:lnB w="6350" cap="flat" cmpd="sng" algn="ctr">
+                      <a:solidFill>
+                        <a:srgbClr val="D5E2EC"/>
+                      </a:solidFill>
+                      <a:prstDash val="solid"/>
+                      <a:round/>
+                      <a:headEnd type="none" w="med" len="med"/>
+                      <a:tailEnd type="none" w="med" len="med"/>
+                    </a:lnB>
+                    <a:solidFill>
+                      <a:srgbClr val="FFFFFF"/>
+                    </a:solidFill>
+                  </a:tcPr>
+                </a:tc>
+                <a:tc>
+                  <a:txBody>
+                    <a:bodyPr/>
+                    <a:lstStyle/>
+                    <a:p>
+                      <a:pPr algn="ctr" indent="0" marL="0">
+                        <a:buNone/>
+                      </a:pPr>
+                      <a:r>
+                        <a:rPr lang="en-US" sz="1000" dirty="0">
+                          <a:solidFill>
+                            <a:srgbClr val="1A2733"/>
+                          </a:solidFill>
+                          <a:latin typeface="Calibri" pitchFamily="34" charset="0"/>
+                          <a:ea typeface="Calibri" pitchFamily="34" charset="-122"/>
+                          <a:cs typeface="Calibri" pitchFamily="34" charset="-120"/>
+                        </a:rPr>
+                        <a:t>13.0</a:t>
+                      </a:r>
+                      <a:endParaRPr lang="en-US" sz="1000" dirty="0">
+                        <a:latin typeface="Calibri" charset="0"/>
+                        <a:ea typeface="Calibri" charset="0"/>
+                        <a:cs typeface="Calibri" charset="0"/>
+                      </a:endParaRPr>
+                    </a:p>
+                  </a:txBody>
+                  <a:tcPr marL="36576" marR="36576" marT="36576" marB="36576" anchor="ctr">
+                    <a:lnL w="6350" cap="flat" cmpd="sng" algn="ctr">
+                      <a:solidFill>
+                        <a:srgbClr val="D5E2EC"/>
+                      </a:solidFill>
+                      <a:prstDash val="solid"/>
+                      <a:round/>
+                      <a:headEnd type="none" w="med" len="med"/>
+                      <a:tailEnd type="none" w="med" len="med"/>
+                    </a:lnL>
+                    <a:lnR w="6350" cap="flat" cmpd="sng" algn="ctr">
+                      <a:solidFill>
+                        <a:srgbClr val="D5E2EC"/>
+                      </a:solidFill>
+                      <a:prstDash val="solid"/>
+                      <a:round/>
+                      <a:headEnd type="none" w="med" len="med"/>
+                      <a:tailEnd type="none" w="med" len="med"/>
+                    </a:lnR>
+                    <a:lnT w="6350" cap="flat" cmpd="sng" algn="ctr">
+                      <a:solidFill>
+                        <a:srgbClr val="D5E2EC"/>
+                      </a:solidFill>
+                      <a:prstDash val="solid"/>
+                      <a:round/>
+                      <a:headEnd type="none" w="med" len="med"/>
+                      <a:tailEnd type="none" w="med" len="med"/>
+                    </a:lnT>
+                    <a:lnB w="6350" cap="flat" cmpd="sng" algn="ctr">
+                      <a:solidFill>
+                        <a:srgbClr val="D5E2EC"/>
+                      </a:solidFill>
+                      <a:prstDash val="solid"/>
+                      <a:round/>
+                      <a:headEnd type="none" w="med" len="med"/>
+                      <a:tailEnd type="none" w="med" len="med"/>
+                    </a:lnB>
+                    <a:solidFill>
+                      <a:srgbClr val="FFFFFF"/>
+                    </a:solidFill>
+                  </a:tcPr>
+                </a:tc>
+                <a:tc>
+                  <a:txBody>
+                    <a:bodyPr/>
+                    <a:lstStyle/>
+                    <a:p>
+                      <a:pPr algn="ctr" indent="0" marL="0">
+                        <a:buNone/>
+                      </a:pPr>
+                      <a:r>
+                        <a:rPr lang="en-US" sz="1000" dirty="0">
+                          <a:solidFill>
+                            <a:srgbClr val="1A2733"/>
+                          </a:solidFill>
+                          <a:latin typeface="Calibri" pitchFamily="34" charset="0"/>
+                          <a:ea typeface="Calibri" pitchFamily="34" charset="-122"/>
+                          <a:cs typeface="Calibri" pitchFamily="34" charset="-120"/>
+                        </a:rPr>
+                        <a:t>3.0</a:t>
+                      </a:r>
+                      <a:endParaRPr lang="en-US" sz="1000" dirty="0">
+                        <a:latin typeface="Calibri" charset="0"/>
+                        <a:ea typeface="Calibri" charset="0"/>
+                        <a:cs typeface="Calibri" charset="0"/>
+                      </a:endParaRPr>
+                    </a:p>
+                  </a:txBody>
+                  <a:tcPr marL="36576" marR="36576" marT="36576" marB="36576" anchor="ctr">
+                    <a:lnL w="6350" cap="flat" cmpd="sng" algn="ctr">
+                      <a:solidFill>
+                        <a:srgbClr val="D5E2EC"/>
+                      </a:solidFill>
+                      <a:prstDash val="solid"/>
+                      <a:round/>
+                      <a:headEnd type="none" w="med" len="med"/>
+                      <a:tailEnd type="none" w="med" len="med"/>
+                    </a:lnL>
+                    <a:lnR w="6350" cap="flat" cmpd="sng" algn="ctr">
+                      <a:solidFill>
+                        <a:srgbClr val="D5E2EC"/>
+                      </a:solidFill>
+                      <a:prstDash val="solid"/>
+                      <a:round/>
+                      <a:headEnd type="none" w="med" len="med"/>
+                      <a:tailEnd type="none" w="med" len="med"/>
+                    </a:lnR>
+                    <a:lnT w="6350" cap="flat" cmpd="sng" algn="ctr">
+                      <a:solidFill>
+                        <a:srgbClr val="D5E2EC"/>
+                      </a:solidFill>
+                      <a:prstDash val="solid"/>
+                      <a:round/>
+                      <a:headEnd type="none" w="med" len="med"/>
+                      <a:tailEnd type="none" w="med" len="med"/>
+                    </a:lnT>
+                    <a:lnB w="6350" cap="flat" cmpd="sng" algn="ctr">
+                      <a:solidFill>
+                        <a:srgbClr val="D5E2EC"/>
+                      </a:solidFill>
+                      <a:prstDash val="solid"/>
+                      <a:round/>
+                      <a:headEnd type="none" w="med" len="med"/>
+                      <a:tailEnd type="none" w="med" len="med"/>
+                    </a:lnB>
+                    <a:solidFill>
+                      <a:srgbClr val="FFFFFF"/>
+                    </a:solidFill>
+                  </a:tcPr>
+                </a:tc>
+              </a:tr>
+              <a:tr h="0">
+                <a:tc>
+                  <a:txBody>
+                    <a:bodyPr/>
+                    <a:lstStyle/>
+                    <a:p>
+                      <a:pPr indent="0" marL="0">
+                        <a:buNone/>
+                      </a:pPr>
+                      <a:r>
+                        <a:rPr lang="en-US" sz="1000" dirty="0">
+                          <a:solidFill>
+                            <a:srgbClr val="1A2733"/>
+                          </a:solidFill>
+                          <a:latin typeface="Calibri" pitchFamily="34" charset="0"/>
+                          <a:ea typeface="Calibri" pitchFamily="34" charset="-122"/>
+                          <a:cs typeface="Calibri" pitchFamily="34" charset="-120"/>
+                        </a:rPr>
+                        <a:t>Shore-station UI (chart + controls windows, draggable/resizable cards, survey editor, readouts)</a:t>
+                      </a:r>
+                      <a:endParaRPr lang="en-US" sz="1000" dirty="0">
+                        <a:latin typeface="Calibri" charset="0"/>
+                        <a:ea typeface="Calibri" charset="0"/>
+                        <a:cs typeface="Calibri" charset="0"/>
+                      </a:endParaRPr>
+                    </a:p>
+                  </a:txBody>
+                  <a:tcPr marL="36576" marR="36576" marT="36576" marB="36576" anchor="ctr">
+                    <a:lnL w="6350" cap="flat" cmpd="sng" algn="ctr">
+                      <a:solidFill>
+                        <a:srgbClr val="D5E2EC"/>
+                      </a:solidFill>
+                      <a:prstDash val="solid"/>
+                      <a:round/>
+                      <a:headEnd type="none" w="med" len="med"/>
+                      <a:tailEnd type="none" w="med" len="med"/>
+                    </a:lnL>
+                    <a:lnR w="6350" cap="flat" cmpd="sng" algn="ctr">
+                      <a:solidFill>
+                        <a:srgbClr val="D5E2EC"/>
+                      </a:solidFill>
+                      <a:prstDash val="solid"/>
+                      <a:round/>
+                      <a:headEnd type="none" w="med" len="med"/>
+                      <a:tailEnd type="none" w="med" len="med"/>
+                    </a:lnR>
+                    <a:lnT w="6350" cap="flat" cmpd="sng" algn="ctr">
+                      <a:solidFill>
+                        <a:srgbClr val="D5E2EC"/>
+                      </a:solidFill>
+                      <a:prstDash val="solid"/>
+                      <a:round/>
+                      <a:headEnd type="none" w="med" len="med"/>
+                      <a:tailEnd type="none" w="med" len="med"/>
+                    </a:lnT>
+                    <a:lnB w="6350" cap="flat" cmpd="sng" algn="ctr">
+                      <a:solidFill>
+                        <a:srgbClr val="D5E2EC"/>
+                      </a:solidFill>
+                      <a:prstDash val="solid"/>
+                      <a:round/>
+                      <a:headEnd type="none" w="med" len="med"/>
+                      <a:tailEnd type="none" w="med" len="med"/>
+                    </a:lnB>
+                    <a:solidFill>
+                      <a:srgbClr val="EAF2F8"/>
+                    </a:solidFill>
+                  </a:tcPr>
+                </a:tc>
+                <a:tc>
+                  <a:txBody>
+                    <a:bodyPr/>
+                    <a:lstStyle/>
+                    <a:p>
+                      <a:pPr algn="ctr" indent="0" marL="0">
+                        <a:buNone/>
+                      </a:pPr>
+                      <a:r>
+                        <a:rPr lang="en-US" sz="1000" dirty="0">
+                          <a:solidFill>
+                            <a:srgbClr val="1A2733"/>
+                          </a:solidFill>
+                          <a:latin typeface="Calibri" pitchFamily="34" charset="0"/>
+                          <a:ea typeface="Calibri" pitchFamily="34" charset="-122"/>
+                          <a:cs typeface="Calibri" pitchFamily="34" charset="-120"/>
+                        </a:rPr>
+                        <a:t>20.0</a:t>
+                      </a:r>
+                      <a:endParaRPr lang="en-US" sz="1000" dirty="0">
+                        <a:latin typeface="Calibri" charset="0"/>
+                        <a:ea typeface="Calibri" charset="0"/>
+                        <a:cs typeface="Calibri" charset="0"/>
+                      </a:endParaRPr>
+                    </a:p>
+                  </a:txBody>
+                  <a:tcPr marL="36576" marR="36576" marT="36576" marB="36576" anchor="ctr">
+                    <a:lnL w="6350" cap="flat" cmpd="sng" algn="ctr">
+                      <a:solidFill>
+                        <a:srgbClr val="D5E2EC"/>
+                      </a:solidFill>
+                      <a:prstDash val="solid"/>
+                      <a:round/>
+                      <a:headEnd type="none" w="med" len="med"/>
+                      <a:tailEnd type="none" w="med" len="med"/>
+                    </a:lnL>
+                    <a:lnR w="6350" cap="flat" cmpd="sng" algn="ctr">
+                      <a:solidFill>
+                        <a:srgbClr val="D5E2EC"/>
+                      </a:solidFill>
+                      <a:prstDash val="solid"/>
+                      <a:round/>
+                      <a:headEnd type="none" w="med" len="med"/>
+                      <a:tailEnd type="none" w="med" len="med"/>
+                    </a:lnR>
+                    <a:lnT w="6350" cap="flat" cmpd="sng" algn="ctr">
+                      <a:solidFill>
+                        <a:srgbClr val="D5E2EC"/>
+                      </a:solidFill>
+                      <a:prstDash val="solid"/>
+                      <a:round/>
+                      <a:headEnd type="none" w="med" len="med"/>
+                      <a:tailEnd type="none" w="med" len="med"/>
+                    </a:lnT>
+                    <a:lnB w="6350" cap="flat" cmpd="sng" algn="ctr">
+                      <a:solidFill>
+                        <a:srgbClr val="D5E2EC"/>
+                      </a:solidFill>
+                      <a:prstDash val="solid"/>
+                      <a:round/>
+                      <a:headEnd type="none" w="med" len="med"/>
+                      <a:tailEnd type="none" w="med" len="med"/>
+                    </a:lnB>
+                    <a:solidFill>
+                      <a:srgbClr val="EAF2F8"/>
+                    </a:solidFill>
+                  </a:tcPr>
+                </a:tc>
+                <a:tc>
+                  <a:txBody>
+                    <a:bodyPr/>
+                    <a:lstStyle/>
+                    <a:p>
+                      <a:pPr algn="ctr" indent="0" marL="0">
+                        <a:buNone/>
+                      </a:pPr>
+                      <a:r>
+                        <a:rPr lang="en-US" sz="1000" dirty="0">
+                          <a:solidFill>
+                            <a:srgbClr val="1A2733"/>
+                          </a:solidFill>
+                          <a:latin typeface="Calibri" pitchFamily="34" charset="0"/>
+                          <a:ea typeface="Calibri" pitchFamily="34" charset="-122"/>
+                          <a:cs typeface="Calibri" pitchFamily="34" charset="-120"/>
+                        </a:rPr>
+                        <a:t>40.0</a:t>
+                      </a:r>
+                      <a:endParaRPr lang="en-US" sz="1000" dirty="0">
+                        <a:latin typeface="Calibri" charset="0"/>
+                        <a:ea typeface="Calibri" charset="0"/>
+                        <a:cs typeface="Calibri" charset="0"/>
+                      </a:endParaRPr>
+                    </a:p>
+                  </a:txBody>
+                  <a:tcPr marL="36576" marR="36576" marT="36576" marB="36576" anchor="ctr">
+                    <a:lnL w="6350" cap="flat" cmpd="sng" algn="ctr">
+                      <a:solidFill>
+                        <a:srgbClr val="D5E2EC"/>
+                      </a:solidFill>
+                      <a:prstDash val="solid"/>
+                      <a:round/>
+                      <a:headEnd type="none" w="med" len="med"/>
+                      <a:tailEnd type="none" w="med" len="med"/>
+                    </a:lnL>
+                    <a:lnR w="6350" cap="flat" cmpd="sng" algn="ctr">
+                      <a:solidFill>
+                        <a:srgbClr val="D5E2EC"/>
+                      </a:solidFill>
+                      <a:prstDash val="solid"/>
+                      <a:round/>
+                      <a:headEnd type="none" w="med" len="med"/>
+                      <a:tailEnd type="none" w="med" len="med"/>
+                    </a:lnR>
+                    <a:lnT w="6350" cap="flat" cmpd="sng" algn="ctr">
+                      <a:solidFill>
+                        <a:srgbClr val="D5E2EC"/>
+                      </a:solidFill>
+                      <a:prstDash val="solid"/>
+                      <a:round/>
+                      <a:headEnd type="none" w="med" len="med"/>
+                      <a:tailEnd type="none" w="med" len="med"/>
+                    </a:lnT>
+                    <a:lnB w="6350" cap="flat" cmpd="sng" algn="ctr">
+                      <a:solidFill>
+                        <a:srgbClr val="D5E2EC"/>
+                      </a:solidFill>
+                      <a:prstDash val="solid"/>
+                      <a:round/>
+                      <a:headEnd type="none" w="med" len="med"/>
+                      <a:tailEnd type="none" w="med" len="med"/>
+                    </a:lnB>
+                    <a:solidFill>
+                      <a:srgbClr val="EAF2F8"/>
+                    </a:solidFill>
+                  </a:tcPr>
+                </a:tc>
+                <a:tc>
+                  <a:txBody>
+                    <a:bodyPr/>
+                    <a:lstStyle/>
+                    <a:p>
+                      <a:pPr algn="ctr" indent="0" marL="0">
+                        <a:buNone/>
+                      </a:pPr>
+                      <a:r>
+                        <a:rPr lang="en-US" sz="1000" dirty="0">
+                          <a:solidFill>
+                            <a:srgbClr val="1A2733"/>
+                          </a:solidFill>
+                          <a:latin typeface="Calibri" pitchFamily="34" charset="0"/>
+                          <a:ea typeface="Calibri" pitchFamily="34" charset="-122"/>
+                          <a:cs typeface="Calibri" pitchFamily="34" charset="-120"/>
+                        </a:rPr>
+                        <a:t>70.0</a:t>
+                      </a:r>
+                      <a:endParaRPr lang="en-US" sz="1000" dirty="0">
+                        <a:latin typeface="Calibri" charset="0"/>
+                        <a:ea typeface="Calibri" charset="0"/>
+                        <a:cs typeface="Calibri" charset="0"/>
+                      </a:endParaRPr>
+                    </a:p>
+                  </a:txBody>
+                  <a:tcPr marL="36576" marR="36576" marT="36576" marB="36576" anchor="ctr">
+                    <a:lnL w="6350" cap="flat" cmpd="sng" algn="ctr">
+                      <a:solidFill>
+                        <a:srgbClr val="D5E2EC"/>
+                      </a:solidFill>
+                      <a:prstDash val="solid"/>
+                      <a:round/>
+                      <a:headEnd type="none" w="med" len="med"/>
+                      <a:tailEnd type="none" w="med" len="med"/>
+                    </a:lnL>
+                    <a:lnR w="6350" cap="flat" cmpd="sng" algn="ctr">
+                      <a:solidFill>
+                        <a:srgbClr val="D5E2EC"/>
+                      </a:solidFill>
+                      <a:prstDash val="solid"/>
+                      <a:round/>
+                      <a:headEnd type="none" w="med" len="med"/>
+                      <a:tailEnd type="none" w="med" len="med"/>
+                    </a:lnR>
+                    <a:lnT w="6350" cap="flat" cmpd="sng" algn="ctr">
+                      <a:solidFill>
+                        <a:srgbClr val="D5E2EC"/>
+                      </a:solidFill>
+                      <a:prstDash val="solid"/>
+                      <a:round/>
+                      <a:headEnd type="none" w="med" len="med"/>
+                      <a:tailEnd type="none" w="med" len="med"/>
+                    </a:lnT>
+                    <a:lnB w="6350" cap="flat" cmpd="sng" algn="ctr">
+                      <a:solidFill>
+                        <a:srgbClr val="D5E2EC"/>
+                      </a:solidFill>
+                      <a:prstDash val="solid"/>
+                      <a:round/>
+                      <a:headEnd type="none" w="med" len="med"/>
+                      <a:tailEnd type="none" w="med" len="med"/>
+                    </a:lnB>
+                    <a:solidFill>
+                      <a:srgbClr val="EAF2F8"/>
+                    </a:solidFill>
+                  </a:tcPr>
+                </a:tc>
+                <a:tc>
+                  <a:txBody>
+                    <a:bodyPr/>
+                    <a:lstStyle/>
+                    <a:p>
+                      <a:pPr algn="ctr" indent="0" marL="0">
+                        <a:buNone/>
+                      </a:pPr>
+                      <a:r>
+                        <a:rPr lang="en-US" sz="1000" dirty="0">
+                          <a:solidFill>
+                            <a:srgbClr val="1A2733"/>
+                          </a:solidFill>
+                          <a:latin typeface="Calibri" pitchFamily="34" charset="0"/>
+                          <a:ea typeface="Calibri" pitchFamily="34" charset="-122"/>
+                          <a:cs typeface="Calibri" pitchFamily="34" charset="-120"/>
+                        </a:rPr>
+                        <a:t>41.7</a:t>
+                      </a:r>
+                      <a:endParaRPr lang="en-US" sz="1000" dirty="0">
+                        <a:latin typeface="Calibri" charset="0"/>
+                        <a:ea typeface="Calibri" charset="0"/>
+                        <a:cs typeface="Calibri" charset="0"/>
+                      </a:endParaRPr>
+                    </a:p>
+                  </a:txBody>
+                  <a:tcPr marL="36576" marR="36576" marT="36576" marB="36576" anchor="ctr">
+                    <a:lnL w="6350" cap="flat" cmpd="sng" algn="ctr">
+                      <a:solidFill>
+                        <a:srgbClr val="D5E2EC"/>
+                      </a:solidFill>
+                      <a:prstDash val="solid"/>
+                      <a:round/>
+                      <a:headEnd type="none" w="med" len="med"/>
+                      <a:tailEnd type="none" w="med" len="med"/>
+                    </a:lnL>
+                    <a:lnR w="6350" cap="flat" cmpd="sng" algn="ctr">
+                      <a:solidFill>
+                        <a:srgbClr val="D5E2EC"/>
+                      </a:solidFill>
+                      <a:prstDash val="solid"/>
+                      <a:round/>
+                      <a:headEnd type="none" w="med" len="med"/>
+                      <a:tailEnd type="none" w="med" len="med"/>
+                    </a:lnR>
+                    <a:lnT w="6350" cap="flat" cmpd="sng" algn="ctr">
+                      <a:solidFill>
+                        <a:srgbClr val="D5E2EC"/>
+                      </a:solidFill>
+                      <a:prstDash val="solid"/>
+                      <a:round/>
+                      <a:headEnd type="none" w="med" len="med"/>
+                      <a:tailEnd type="none" w="med" len="med"/>
+                    </a:lnT>
+                    <a:lnB w="6350" cap="flat" cmpd="sng" algn="ctr">
+                      <a:solidFill>
+                        <a:srgbClr val="D5E2EC"/>
+                      </a:solidFill>
+                      <a:prstDash val="solid"/>
+                      <a:round/>
+                      <a:headEnd type="none" w="med" len="med"/>
+                      <a:tailEnd type="none" w="med" len="med"/>
+                    </a:lnB>
+                    <a:solidFill>
+                      <a:srgbClr val="EAF2F8"/>
+                    </a:solidFill>
+                  </a:tcPr>
+                </a:tc>
+                <a:tc>
+                  <a:txBody>
+                    <a:bodyPr/>
+                    <a:lstStyle/>
+                    <a:p>
+                      <a:pPr algn="ctr" indent="0" marL="0">
+                        <a:buNone/>
+                      </a:pPr>
+                      <a:r>
+                        <a:rPr lang="en-US" sz="1000" dirty="0">
+                          <a:solidFill>
+                            <a:srgbClr val="1A2733"/>
+                          </a:solidFill>
+                          <a:latin typeface="Calibri" pitchFamily="34" charset="0"/>
+                          <a:ea typeface="Calibri" pitchFamily="34" charset="-122"/>
+                          <a:cs typeface="Calibri" pitchFamily="34" charset="-120"/>
+                        </a:rPr>
+                        <a:t>8.3</a:t>
+                      </a:r>
+                      <a:endParaRPr lang="en-US" sz="1000" dirty="0">
+                        <a:latin typeface="Calibri" charset="0"/>
+                        <a:ea typeface="Calibri" charset="0"/>
+                        <a:cs typeface="Calibri" charset="0"/>
+                      </a:endParaRPr>
+                    </a:p>
+                  </a:txBody>
+                  <a:tcPr marL="36576" marR="36576" marT="36576" marB="36576" anchor="ctr">
+                    <a:lnL w="6350" cap="flat" cmpd="sng" algn="ctr">
+                      <a:solidFill>
+                        <a:srgbClr val="D5E2EC"/>
+                      </a:solidFill>
+                      <a:prstDash val="solid"/>
+                      <a:round/>
+                      <a:headEnd type="none" w="med" len="med"/>
+                      <a:tailEnd type="none" w="med" len="med"/>
+                    </a:lnL>
+                    <a:lnR w="6350" cap="flat" cmpd="sng" algn="ctr">
+                      <a:solidFill>
+                        <a:srgbClr val="D5E2EC"/>
+                      </a:solidFill>
+                      <a:prstDash val="solid"/>
+                      <a:round/>
+                      <a:headEnd type="none" w="med" len="med"/>
+                      <a:tailEnd type="none" w="med" len="med"/>
+                    </a:lnR>
+                    <a:lnT w="6350" cap="flat" cmpd="sng" algn="ctr">
+                      <a:solidFill>
+                        <a:srgbClr val="D5E2EC"/>
+                      </a:solidFill>
+                      <a:prstDash val="solid"/>
+                      <a:round/>
+                      <a:headEnd type="none" w="med" len="med"/>
+                      <a:tailEnd type="none" w="med" len="med"/>
+                    </a:lnT>
+                    <a:lnB w="6350" cap="flat" cmpd="sng" algn="ctr">
+                      <a:solidFill>
+                        <a:srgbClr val="D5E2EC"/>
+                      </a:solidFill>
+                      <a:prstDash val="solid"/>
+                      <a:round/>
+                      <a:headEnd type="none" w="med" len="med"/>
+                      <a:tailEnd type="none" w="med" len="med"/>
+                    </a:lnB>
+                    <a:solidFill>
+                      <a:srgbClr val="EAF2F8"/>
+                    </a:solidFill>
+                  </a:tcPr>
+                </a:tc>
+              </a:tr>
+              <a:tr h="0">
+                <a:tc>
+                  <a:txBody>
+                    <a:bodyPr/>
+                    <a:lstStyle/>
+                    <a:p>
+                      <a:pPr indent="0" marL="0">
+                        <a:buNone/>
+                      </a:pPr>
+                      <a:r>
+                        <a:rPr lang="en-US" sz="1000" dirty="0">
+                          <a:solidFill>
+                            <a:srgbClr val="1A2733"/>
+                          </a:solidFill>
+                          <a:latin typeface="Calibri" pitchFamily="34" charset="0"/>
+                          <a:ea typeface="Calibri" pitchFamily="34" charset="-122"/>
+                          <a:cs typeface="Calibri" pitchFamily="34" charset="-120"/>
+                        </a:rPr>
+                        <a:t>AIS subsystem (websocket service, registry, range filtering, error surfacing, patched table)</a:t>
+                      </a:r>
+                      <a:endParaRPr lang="en-US" sz="1000" dirty="0">
+                        <a:latin typeface="Calibri" charset="0"/>
+                        <a:ea typeface="Calibri" charset="0"/>
+                        <a:cs typeface="Calibri" charset="0"/>
+                      </a:endParaRPr>
+                    </a:p>
+                  </a:txBody>
+                  <a:tcPr marL="36576" marR="36576" marT="36576" marB="36576" anchor="ctr">
+                    <a:lnL w="6350" cap="flat" cmpd="sng" algn="ctr">
+                      <a:solidFill>
+                        <a:srgbClr val="D5E2EC"/>
+                      </a:solidFill>
+                      <a:prstDash val="solid"/>
+                      <a:round/>
+                      <a:headEnd type="none" w="med" len="med"/>
+                      <a:tailEnd type="none" w="med" len="med"/>
+                    </a:lnL>
+                    <a:lnR w="6350" cap="flat" cmpd="sng" algn="ctr">
+                      <a:solidFill>
+                        <a:srgbClr val="D5E2EC"/>
+                      </a:solidFill>
+                      <a:prstDash val="solid"/>
+                      <a:round/>
+                      <a:headEnd type="none" w="med" len="med"/>
+                      <a:tailEnd type="none" w="med" len="med"/>
+                    </a:lnR>
+                    <a:lnT w="6350" cap="flat" cmpd="sng" algn="ctr">
+                      <a:solidFill>
+                        <a:srgbClr val="D5E2EC"/>
+                      </a:solidFill>
+                      <a:prstDash val="solid"/>
+                      <a:round/>
+                      <a:headEnd type="none" w="med" len="med"/>
+                      <a:tailEnd type="none" w="med" len="med"/>
+                    </a:lnT>
+                    <a:lnB w="6350" cap="flat" cmpd="sng" algn="ctr">
+                      <a:solidFill>
+                        <a:srgbClr val="D5E2EC"/>
+                      </a:solidFill>
+                      <a:prstDash val="solid"/>
+                      <a:round/>
+                      <a:headEnd type="none" w="med" len="med"/>
+                      <a:tailEnd type="none" w="med" len="med"/>
+                    </a:lnB>
+                    <a:solidFill>
+                      <a:srgbClr val="FFFFFF"/>
+                    </a:solidFill>
+                  </a:tcPr>
+                </a:tc>
+                <a:tc>
+                  <a:txBody>
+                    <a:bodyPr/>
+                    <a:lstStyle/>
+                    <a:p>
+                      <a:pPr algn="ctr" indent="0" marL="0">
+                        <a:buNone/>
+                      </a:pPr>
+                      <a:r>
+                        <a:rPr lang="en-US" sz="1000" dirty="0">
+                          <a:solidFill>
+                            <a:srgbClr val="1A2733"/>
+                          </a:solidFill>
+                          <a:latin typeface="Calibri" pitchFamily="34" charset="0"/>
+                          <a:ea typeface="Calibri" pitchFamily="34" charset="-122"/>
+                          <a:cs typeface="Calibri" pitchFamily="34" charset="-120"/>
+                        </a:rPr>
+                        <a:t>6.0</a:t>
+                      </a:r>
+                      <a:endParaRPr lang="en-US" sz="1000" dirty="0">
+                        <a:latin typeface="Calibri" charset="0"/>
+                        <a:ea typeface="Calibri" charset="0"/>
+                        <a:cs typeface="Calibri" charset="0"/>
+                      </a:endParaRPr>
+                    </a:p>
+                  </a:txBody>
+                  <a:tcPr marL="36576" marR="36576" marT="36576" marB="36576" anchor="ctr">
+                    <a:lnL w="6350" cap="flat" cmpd="sng" algn="ctr">
+                      <a:solidFill>
+                        <a:srgbClr val="D5E2EC"/>
+                      </a:solidFill>
+                      <a:prstDash val="solid"/>
+                      <a:round/>
+                      <a:headEnd type="none" w="med" len="med"/>
+                      <a:tailEnd type="none" w="med" len="med"/>
+                    </a:lnL>
+                    <a:lnR w="6350" cap="flat" cmpd="sng" algn="ctr">
+                      <a:solidFill>
+                        <a:srgbClr val="D5E2EC"/>
+                      </a:solidFill>
+                      <a:prstDash val="solid"/>
+                      <a:round/>
+                      <a:headEnd type="none" w="med" len="med"/>
+                      <a:tailEnd type="none" w="med" len="med"/>
+                    </a:lnR>
+                    <a:lnT w="6350" cap="flat" cmpd="sng" algn="ctr">
+                      <a:solidFill>
+                        <a:srgbClr val="D5E2EC"/>
+                      </a:solidFill>
+                      <a:prstDash val="solid"/>
+                      <a:round/>
+                      <a:headEnd type="none" w="med" len="med"/>
+                      <a:tailEnd type="none" w="med" len="med"/>
+                    </a:lnT>
+                    <a:lnB w="6350" cap="flat" cmpd="sng" algn="ctr">
+                      <a:solidFill>
+                        <a:srgbClr val="D5E2EC"/>
+                      </a:solidFill>
+                      <a:prstDash val="solid"/>
+                      <a:round/>
+                      <a:headEnd type="none" w="med" len="med"/>
+                      <a:tailEnd type="none" w="med" len="med"/>
+                    </a:lnB>
+                    <a:solidFill>
+                      <a:srgbClr val="FFFFFF"/>
+                    </a:solidFill>
+                  </a:tcPr>
+                </a:tc>
+                <a:tc>
+                  <a:txBody>
+                    <a:bodyPr/>
+                    <a:lstStyle/>
+                    <a:p>
+                      <a:pPr algn="ctr" indent="0" marL="0">
+                        <a:buNone/>
+                      </a:pPr>
+                      <a:r>
+                        <a:rPr lang="en-US" sz="1000" dirty="0">
+                          <a:solidFill>
+                            <a:srgbClr val="1A2733"/>
+                          </a:solidFill>
+                          <a:latin typeface="Calibri" pitchFamily="34" charset="0"/>
+                          <a:ea typeface="Calibri" pitchFamily="34" charset="-122"/>
+                          <a:cs typeface="Calibri" pitchFamily="34" charset="-120"/>
+                        </a:rPr>
+                        <a:t>12.0</a:t>
+                      </a:r>
+                      <a:endParaRPr lang="en-US" sz="1000" dirty="0">
+                        <a:latin typeface="Calibri" charset="0"/>
+                        <a:ea typeface="Calibri" charset="0"/>
+                        <a:cs typeface="Calibri" charset="0"/>
+                      </a:endParaRPr>
+                    </a:p>
+                  </a:txBody>
+                  <a:tcPr marL="36576" marR="36576" marT="36576" marB="36576" anchor="ctr">
+                    <a:lnL w="6350" cap="flat" cmpd="sng" algn="ctr">
+                      <a:solidFill>
+                        <a:srgbClr val="D5E2EC"/>
+                      </a:solidFill>
+                      <a:prstDash val="solid"/>
+                      <a:round/>
+                      <a:headEnd type="none" w="med" len="med"/>
+                      <a:tailEnd type="none" w="med" len="med"/>
+                    </a:lnL>
+                    <a:lnR w="6350" cap="flat" cmpd="sng" algn="ctr">
+                      <a:solidFill>
+                        <a:srgbClr val="D5E2EC"/>
+                      </a:solidFill>
+                      <a:prstDash val="solid"/>
+                      <a:round/>
+                      <a:headEnd type="none" w="med" len="med"/>
+                      <a:tailEnd type="none" w="med" len="med"/>
+                    </a:lnR>
+                    <a:lnT w="6350" cap="flat" cmpd="sng" algn="ctr">
+                      <a:solidFill>
+                        <a:srgbClr val="D5E2EC"/>
+                      </a:solidFill>
+                      <a:prstDash val="solid"/>
+                      <a:round/>
+                      <a:headEnd type="none" w="med" len="med"/>
+                      <a:tailEnd type="none" w="med" len="med"/>
+                    </a:lnT>
+                    <a:lnB w="6350" cap="flat" cmpd="sng" algn="ctr">
+                      <a:solidFill>
+                        <a:srgbClr val="D5E2EC"/>
+                      </a:solidFill>
+                      <a:prstDash val="solid"/>
+                      <a:round/>
+                      <a:headEnd type="none" w="med" len="med"/>
+                      <a:tailEnd type="none" w="med" len="med"/>
+                    </a:lnB>
+                    <a:solidFill>
+                      <a:srgbClr val="FFFFFF"/>
+                    </a:solidFill>
+                  </a:tcPr>
+                </a:tc>
+                <a:tc>
+                  <a:txBody>
+                    <a:bodyPr/>
+                    <a:lstStyle/>
+                    <a:p>
+                      <a:pPr algn="ctr" indent="0" marL="0">
+                        <a:buNone/>
+                      </a:pPr>
+                      <a:r>
+                        <a:rPr lang="en-US" sz="1000" dirty="0">
+                          <a:solidFill>
+                            <a:srgbClr val="1A2733"/>
+                          </a:solidFill>
+                          <a:latin typeface="Calibri" pitchFamily="34" charset="0"/>
+                          <a:ea typeface="Calibri" pitchFamily="34" charset="-122"/>
+                          <a:cs typeface="Calibri" pitchFamily="34" charset="-120"/>
+                        </a:rPr>
+                        <a:t>24.0</a:t>
+                      </a:r>
+                      <a:endParaRPr lang="en-US" sz="1000" dirty="0">
+                        <a:latin typeface="Calibri" charset="0"/>
+                        <a:ea typeface="Calibri" charset="0"/>
+                        <a:cs typeface="Calibri" charset="0"/>
+                      </a:endParaRPr>
+                    </a:p>
+                  </a:txBody>
+                  <a:tcPr marL="36576" marR="36576" marT="36576" marB="36576" anchor="ctr">
+                    <a:lnL w="6350" cap="flat" cmpd="sng" algn="ctr">
+                      <a:solidFill>
+                        <a:srgbClr val="D5E2EC"/>
+                      </a:solidFill>
+                      <a:prstDash val="solid"/>
+                      <a:round/>
+                      <a:headEnd type="none" w="med" len="med"/>
+                      <a:tailEnd type="none" w="med" len="med"/>
+                    </a:lnL>
+                    <a:lnR w="6350" cap="flat" cmpd="sng" algn="ctr">
+                      <a:solidFill>
+                        <a:srgbClr val="D5E2EC"/>
+                      </a:solidFill>
+                      <a:prstDash val="solid"/>
+                      <a:round/>
+                      <a:headEnd type="none" w="med" len="med"/>
+                      <a:tailEnd type="none" w="med" len="med"/>
+                    </a:lnR>
+                    <a:lnT w="6350" cap="flat" cmpd="sng" algn="ctr">
+                      <a:solidFill>
+                        <a:srgbClr val="D5E2EC"/>
+                      </a:solidFill>
+                      <a:prstDash val="solid"/>
+                      <a:round/>
+                      <a:headEnd type="none" w="med" len="med"/>
+                      <a:tailEnd type="none" w="med" len="med"/>
+                    </a:lnT>
+                    <a:lnB w="6350" cap="flat" cmpd="sng" algn="ctr">
+                      <a:solidFill>
+                        <a:srgbClr val="D5E2EC"/>
+                      </a:solidFill>
+                      <a:prstDash val="solid"/>
+                      <a:round/>
+                      <a:headEnd type="none" w="med" len="med"/>
+                      <a:tailEnd type="none" w="med" len="med"/>
+                    </a:lnB>
+                    <a:solidFill>
+                      <a:srgbClr val="FFFFFF"/>
+                    </a:solidFill>
+                  </a:tcPr>
+                </a:tc>
+                <a:tc>
+                  <a:txBody>
+                    <a:bodyPr/>
+                    <a:lstStyle/>
+                    <a:p>
+                      <a:pPr algn="ctr" indent="0" marL="0">
+                        <a:buNone/>
+                      </a:pPr>
+                      <a:r>
+                        <a:rPr lang="en-US" sz="1000" dirty="0">
+                          <a:solidFill>
+                            <a:srgbClr val="1A2733"/>
+                          </a:solidFill>
+                          <a:latin typeface="Calibri" pitchFamily="34" charset="0"/>
+                          <a:ea typeface="Calibri" pitchFamily="34" charset="-122"/>
+                          <a:cs typeface="Calibri" pitchFamily="34" charset="-120"/>
+                        </a:rPr>
+                        <a:t>13.0</a:t>
+                      </a:r>
+                      <a:endParaRPr lang="en-US" sz="1000" dirty="0">
+                        <a:latin typeface="Calibri" charset="0"/>
+                        <a:ea typeface="Calibri" charset="0"/>
+                        <a:cs typeface="Calibri" charset="0"/>
+                      </a:endParaRPr>
+                    </a:p>
+                  </a:txBody>
+                  <a:tcPr marL="36576" marR="36576" marT="36576" marB="36576" anchor="ctr">
+                    <a:lnL w="6350" cap="flat" cmpd="sng" algn="ctr">
+                      <a:solidFill>
+                        <a:srgbClr val="D5E2EC"/>
+                      </a:solidFill>
+                      <a:prstDash val="solid"/>
+                      <a:round/>
+                      <a:headEnd type="none" w="med" len="med"/>
+                      <a:tailEnd type="none" w="med" len="med"/>
+                    </a:lnL>
+                    <a:lnR w="6350" cap="flat" cmpd="sng" algn="ctr">
+                      <a:solidFill>
+                        <a:srgbClr val="D5E2EC"/>
+                      </a:solidFill>
+                      <a:prstDash val="solid"/>
+                      <a:round/>
+                      <a:headEnd type="none" w="med" len="med"/>
+                      <a:tailEnd type="none" w="med" len="med"/>
+                    </a:lnR>
+                    <a:lnT w="6350" cap="flat" cmpd="sng" algn="ctr">
+                      <a:solidFill>
+                        <a:srgbClr val="D5E2EC"/>
+                      </a:solidFill>
+                      <a:prstDash val="solid"/>
+                      <a:round/>
+                      <a:headEnd type="none" w="med" len="med"/>
+                      <a:tailEnd type="none" w="med" len="med"/>
+                    </a:lnT>
+                    <a:lnB w="6350" cap="flat" cmpd="sng" algn="ctr">
+                      <a:solidFill>
+                        <a:srgbClr val="D5E2EC"/>
+                      </a:solidFill>
+                      <a:prstDash val="solid"/>
+                      <a:round/>
+                      <a:headEnd type="none" w="med" len="med"/>
+                      <a:tailEnd type="none" w="med" len="med"/>
+                    </a:lnB>
+                    <a:solidFill>
+                      <a:srgbClr val="FFFFFF"/>
+                    </a:solidFill>
+                  </a:tcPr>
+                </a:tc>
+                <a:tc>
+                  <a:txBody>
+                    <a:bodyPr/>
+                    <a:lstStyle/>
+                    <a:p>
+                      <a:pPr algn="ctr" indent="0" marL="0">
+                        <a:buNone/>
+                      </a:pPr>
+                      <a:r>
+                        <a:rPr lang="en-US" sz="1000" dirty="0">
+                          <a:solidFill>
+                            <a:srgbClr val="1A2733"/>
+                          </a:solidFill>
+                          <a:latin typeface="Calibri" pitchFamily="34" charset="0"/>
+                          <a:ea typeface="Calibri" pitchFamily="34" charset="-122"/>
+                          <a:cs typeface="Calibri" pitchFamily="34" charset="-120"/>
+                        </a:rPr>
+                        <a:t>3.0</a:t>
+                      </a:r>
+                      <a:endParaRPr lang="en-US" sz="1000" dirty="0">
+                        <a:latin typeface="Calibri" charset="0"/>
+                        <a:ea typeface="Calibri" charset="0"/>
+                        <a:cs typeface="Calibri" charset="0"/>
+                      </a:endParaRPr>
+                    </a:p>
+                  </a:txBody>
+                  <a:tcPr marL="36576" marR="36576" marT="36576" marB="36576" anchor="ctr">
+                    <a:lnL w="6350" cap="flat" cmpd="sng" algn="ctr">
+                      <a:solidFill>
+                        <a:srgbClr val="D5E2EC"/>
+                      </a:solidFill>
+                      <a:prstDash val="solid"/>
+                      <a:round/>
+                      <a:headEnd type="none" w="med" len="med"/>
+                      <a:tailEnd type="none" w="med" len="med"/>
+                    </a:lnL>
+                    <a:lnR w="6350" cap="flat" cmpd="sng" algn="ctr">
+                      <a:solidFill>
+                        <a:srgbClr val="D5E2EC"/>
+                      </a:solidFill>
+                      <a:prstDash val="solid"/>
+                      <a:round/>
+                      <a:headEnd type="none" w="med" len="med"/>
+                      <a:tailEnd type="none" w="med" len="med"/>
+                    </a:lnR>
+                    <a:lnT w="6350" cap="flat" cmpd="sng" algn="ctr">
+                      <a:solidFill>
+                        <a:srgbClr val="D5E2EC"/>
+                      </a:solidFill>
+                      <a:prstDash val="solid"/>
+                      <a:round/>
+                      <a:headEnd type="none" w="med" len="med"/>
+                      <a:tailEnd type="none" w="med" len="med"/>
+                    </a:lnT>
+                    <a:lnB w="6350" cap="flat" cmpd="sng" algn="ctr">
+                      <a:solidFill>
+                        <a:srgbClr val="D5E2EC"/>
+                      </a:solidFill>
+                      <a:prstDash val="solid"/>
+                      <a:round/>
+                      <a:headEnd type="none" w="med" len="med"/>
+                      <a:tailEnd type="none" w="med" len="med"/>
+                    </a:lnB>
+                    <a:solidFill>
+                      <a:srgbClr val="FFFFFF"/>
+                    </a:solidFill>
+                  </a:tcPr>
+                </a:tc>
+              </a:tr>
+              <a:tr h="0">
+                <a:tc>
+                  <a:txBody>
+                    <a:bodyPr/>
+                    <a:lstStyle/>
+                    <a:p>
+                      <a:pPr indent="0" marL="0">
+                        <a:buNone/>
+                      </a:pPr>
+                      <a:r>
+                        <a:rPr lang="en-US" sz="1000" dirty="0">
+                          <a:solidFill>
+                            <a:srgbClr val="1A2733"/>
+                          </a:solidFill>
+                          <a:latin typeface="Calibri" pitchFamily="34" charset="0"/>
+                          <a:ea typeface="Calibri" pitchFamily="34" charset="-122"/>
+                          <a:cs typeface="Calibri" pitchFamily="34" charset="-120"/>
+                        </a:rPr>
+                        <a:t>Ancillary services (tides &amp; water-level trust, GPS sim, ROC / moving HOME, recorder + playback)</a:t>
+                      </a:r>
+                      <a:endParaRPr lang="en-US" sz="1000" dirty="0">
+                        <a:latin typeface="Calibri" charset="0"/>
+                        <a:ea typeface="Calibri" charset="0"/>
+                        <a:cs typeface="Calibri" charset="0"/>
+                      </a:endParaRPr>
+                    </a:p>
+                  </a:txBody>
+                  <a:tcPr marL="36576" marR="36576" marT="36576" marB="36576" anchor="ctr">
+                    <a:lnL w="6350" cap="flat" cmpd="sng" algn="ctr">
+                      <a:solidFill>
+                        <a:srgbClr val="D5E2EC"/>
+                      </a:solidFill>
+                      <a:prstDash val="solid"/>
+                      <a:round/>
+                      <a:headEnd type="none" w="med" len="med"/>
+                      <a:tailEnd type="none" w="med" len="med"/>
+                    </a:lnL>
+                    <a:lnR w="6350" cap="flat" cmpd="sng" algn="ctr">
+                      <a:solidFill>
+                        <a:srgbClr val="D5E2EC"/>
+                      </a:solidFill>
+                      <a:prstDash val="solid"/>
+                      <a:round/>
+                      <a:headEnd type="none" w="med" len="med"/>
+                      <a:tailEnd type="none" w="med" len="med"/>
+                    </a:lnR>
+                    <a:lnT w="6350" cap="flat" cmpd="sng" algn="ctr">
+                      <a:solidFill>
+                        <a:srgbClr val="D5E2EC"/>
+                      </a:solidFill>
+                      <a:prstDash val="solid"/>
+                      <a:round/>
+                      <a:headEnd type="none" w="med" len="med"/>
+                      <a:tailEnd type="none" w="med" len="med"/>
+                    </a:lnT>
+                    <a:lnB w="6350" cap="flat" cmpd="sng" algn="ctr">
+                      <a:solidFill>
+                        <a:srgbClr val="D5E2EC"/>
+                      </a:solidFill>
+                      <a:prstDash val="solid"/>
+                      <a:round/>
+                      <a:headEnd type="none" w="med" len="med"/>
+                      <a:tailEnd type="none" w="med" len="med"/>
+                    </a:lnB>
+                    <a:solidFill>
+                      <a:srgbClr val="EAF2F8"/>
+                    </a:solidFill>
+                  </a:tcPr>
+                </a:tc>
+                <a:tc>
+                  <a:txBody>
+                    <a:bodyPr/>
+                    <a:lstStyle/>
+                    <a:p>
+                      <a:pPr algn="ctr" indent="0" marL="0">
+                        <a:buNone/>
+                      </a:pPr>
+                      <a:r>
+                        <a:rPr lang="en-US" sz="1000" dirty="0">
+                          <a:solidFill>
+                            <a:srgbClr val="1A2733"/>
+                          </a:solidFill>
+                          <a:latin typeface="Calibri" pitchFamily="34" charset="0"/>
+                          <a:ea typeface="Calibri" pitchFamily="34" charset="-122"/>
+                          <a:cs typeface="Calibri" pitchFamily="34" charset="-120"/>
+                        </a:rPr>
+                        <a:t>6.0</a:t>
+                      </a:r>
+                      <a:endParaRPr lang="en-US" sz="1000" dirty="0">
+                        <a:latin typeface="Calibri" charset="0"/>
+                        <a:ea typeface="Calibri" charset="0"/>
+                        <a:cs typeface="Calibri" charset="0"/>
+                      </a:endParaRPr>
+                    </a:p>
+                  </a:txBody>
+                  <a:tcPr marL="36576" marR="36576" marT="36576" marB="36576" anchor="ctr">
+                    <a:lnL w="6350" cap="flat" cmpd="sng" algn="ctr">
+                      <a:solidFill>
+                        <a:srgbClr val="D5E2EC"/>
+                      </a:solidFill>
+                      <a:prstDash val="solid"/>
+                      <a:round/>
+                      <a:headEnd type="none" w="med" len="med"/>
+                      <a:tailEnd type="none" w="med" len="med"/>
+                    </a:lnL>
+                    <a:lnR w="6350" cap="flat" cmpd="sng" algn="ctr">
+                      <a:solidFill>
+                        <a:srgbClr val="D5E2EC"/>
+                      </a:solidFill>
+                      <a:prstDash val="solid"/>
+                      <a:round/>
+                      <a:headEnd type="none" w="med" len="med"/>
+                      <a:tailEnd type="none" w="med" len="med"/>
+                    </a:lnR>
+                    <a:lnT w="6350" cap="flat" cmpd="sng" algn="ctr">
+                      <a:solidFill>
+                        <a:srgbClr val="D5E2EC"/>
+                      </a:solidFill>
+                      <a:prstDash val="solid"/>
+                      <a:round/>
+                      <a:headEnd type="none" w="med" len="med"/>
+                      <a:tailEnd type="none" w="med" len="med"/>
+                    </a:lnT>
+                    <a:lnB w="6350" cap="flat" cmpd="sng" algn="ctr">
+                      <a:solidFill>
+                        <a:srgbClr val="D5E2EC"/>
+                      </a:solidFill>
+                      <a:prstDash val="solid"/>
+                      <a:round/>
+                      <a:headEnd type="none" w="med" len="med"/>
+                      <a:tailEnd type="none" w="med" len="med"/>
+                    </a:lnB>
+                    <a:solidFill>
+                      <a:srgbClr val="EAF2F8"/>
+                    </a:solidFill>
+                  </a:tcPr>
+                </a:tc>
+                <a:tc>
+                  <a:txBody>
+                    <a:bodyPr/>
+                    <a:lstStyle/>
+                    <a:p>
+                      <a:pPr algn="ctr" indent="0" marL="0">
+                        <a:buNone/>
+                      </a:pPr>
+                      <a:r>
+                        <a:rPr lang="en-US" sz="1000" dirty="0">
+                          <a:solidFill>
+                            <a:srgbClr val="1A2733"/>
+                          </a:solidFill>
+                          <a:latin typeface="Calibri" pitchFamily="34" charset="0"/>
+                          <a:ea typeface="Calibri" pitchFamily="34" charset="-122"/>
+                          <a:cs typeface="Calibri" pitchFamily="34" charset="-120"/>
+                        </a:rPr>
+                        <a:t>12.0</a:t>
+                      </a:r>
+                      <a:endParaRPr lang="en-US" sz="1000" dirty="0">
+                        <a:latin typeface="Calibri" charset="0"/>
+                        <a:ea typeface="Calibri" charset="0"/>
+                        <a:cs typeface="Calibri" charset="0"/>
+                      </a:endParaRPr>
+                    </a:p>
+                  </a:txBody>
+                  <a:tcPr marL="36576" marR="36576" marT="36576" marB="36576" anchor="ctr">
+                    <a:lnL w="6350" cap="flat" cmpd="sng" algn="ctr">
+                      <a:solidFill>
+                        <a:srgbClr val="D5E2EC"/>
+                      </a:solidFill>
+                      <a:prstDash val="solid"/>
+                      <a:round/>
+                      <a:headEnd type="none" w="med" len="med"/>
+                      <a:tailEnd type="none" w="med" len="med"/>
+                    </a:lnL>
+                    <a:lnR w="6350" cap="flat" cmpd="sng" algn="ctr">
+                      <a:solidFill>
+                        <a:srgbClr val="D5E2EC"/>
+                      </a:solidFill>
+                      <a:prstDash val="solid"/>
+                      <a:round/>
+                      <a:headEnd type="none" w="med" len="med"/>
+                      <a:tailEnd type="none" w="med" len="med"/>
+                    </a:lnR>
+                    <a:lnT w="6350" cap="flat" cmpd="sng" algn="ctr">
+                      <a:solidFill>
+                        <a:srgbClr val="D5E2EC"/>
+                      </a:solidFill>
+                      <a:prstDash val="solid"/>
+                      <a:round/>
+                      <a:headEnd type="none" w="med" len="med"/>
+                      <a:tailEnd type="none" w="med" len="med"/>
+                    </a:lnT>
+                    <a:lnB w="6350" cap="flat" cmpd="sng" algn="ctr">
+                      <a:solidFill>
+                        <a:srgbClr val="D5E2EC"/>
+                      </a:solidFill>
+                      <a:prstDash val="solid"/>
+                      <a:round/>
+                      <a:headEnd type="none" w="med" len="med"/>
+                      <a:tailEnd type="none" w="med" len="med"/>
+                    </a:lnB>
+                    <a:solidFill>
+                      <a:srgbClr val="EAF2F8"/>
+                    </a:solidFill>
+                  </a:tcPr>
+                </a:tc>
+                <a:tc>
+                  <a:txBody>
+                    <a:bodyPr/>
+                    <a:lstStyle/>
+                    <a:p>
+                      <a:pPr algn="ctr" indent="0" marL="0">
+                        <a:buNone/>
+                      </a:pPr>
+                      <a:r>
+                        <a:rPr lang="en-US" sz="1000" dirty="0">
+                          <a:solidFill>
+                            <a:srgbClr val="1A2733"/>
+                          </a:solidFill>
+                          <a:latin typeface="Calibri" pitchFamily="34" charset="0"/>
+                          <a:ea typeface="Calibri" pitchFamily="34" charset="-122"/>
+                          <a:cs typeface="Calibri" pitchFamily="34" charset="-120"/>
+                        </a:rPr>
+                        <a:t>22.0</a:t>
+                      </a:r>
+                      <a:endParaRPr lang="en-US" sz="1000" dirty="0">
+                        <a:latin typeface="Calibri" charset="0"/>
+                        <a:ea typeface="Calibri" charset="0"/>
+                        <a:cs typeface="Calibri" charset="0"/>
+                      </a:endParaRPr>
+                    </a:p>
+                  </a:txBody>
+                  <a:tcPr marL="36576" marR="36576" marT="36576" marB="36576" anchor="ctr">
+                    <a:lnL w="6350" cap="flat" cmpd="sng" algn="ctr">
+                      <a:solidFill>
+                        <a:srgbClr val="D5E2EC"/>
+                      </a:solidFill>
+                      <a:prstDash val="solid"/>
+                      <a:round/>
+                      <a:headEnd type="none" w="med" len="med"/>
+                      <a:tailEnd type="none" w="med" len="med"/>
+                    </a:lnL>
+                    <a:lnR w="6350" cap="flat" cmpd="sng" algn="ctr">
+                      <a:solidFill>
+                        <a:srgbClr val="D5E2EC"/>
+                      </a:solidFill>
+                      <a:prstDash val="solid"/>
+                      <a:round/>
+                      <a:headEnd type="none" w="med" len="med"/>
+                      <a:tailEnd type="none" w="med" len="med"/>
+                    </a:lnR>
+                    <a:lnT w="6350" cap="flat" cmpd="sng" algn="ctr">
+                      <a:solidFill>
+                        <a:srgbClr val="D5E2EC"/>
+                      </a:solidFill>
+                      <a:prstDash val="solid"/>
+                      <a:round/>
+                      <a:headEnd type="none" w="med" len="med"/>
+                      <a:tailEnd type="none" w="med" len="med"/>
+                    </a:lnT>
+                    <a:lnB w="6350" cap="flat" cmpd="sng" algn="ctr">
+                      <a:solidFill>
+                        <a:srgbClr val="D5E2EC"/>
+                      </a:solidFill>
+                      <a:prstDash val="solid"/>
+                      <a:round/>
+                      <a:headEnd type="none" w="med" len="med"/>
+                      <a:tailEnd type="none" w="med" len="med"/>
+                    </a:lnB>
+                    <a:solidFill>
+                      <a:srgbClr val="EAF2F8"/>
+                    </a:solidFill>
+                  </a:tcPr>
+                </a:tc>
+                <a:tc>
+                  <a:txBody>
+                    <a:bodyPr/>
+                    <a:lstStyle/>
+                    <a:p>
+                      <a:pPr algn="ctr" indent="0" marL="0">
+                        <a:buNone/>
+                      </a:pPr>
+                      <a:r>
+                        <a:rPr lang="en-US" sz="1000" dirty="0">
+                          <a:solidFill>
+                            <a:srgbClr val="1A2733"/>
+                          </a:solidFill>
+                          <a:latin typeface="Calibri" pitchFamily="34" charset="0"/>
+                          <a:ea typeface="Calibri" pitchFamily="34" charset="-122"/>
+                          <a:cs typeface="Calibri" pitchFamily="34" charset="-120"/>
+                        </a:rPr>
+                        <a:t>12.7</a:t>
+                      </a:r>
+                      <a:endParaRPr lang="en-US" sz="1000" dirty="0">
+                        <a:latin typeface="Calibri" charset="0"/>
+                        <a:ea typeface="Calibri" charset="0"/>
+                        <a:cs typeface="Calibri" charset="0"/>
+                      </a:endParaRPr>
+                    </a:p>
+                  </a:txBody>
+                  <a:tcPr marL="36576" marR="36576" marT="36576" marB="36576" anchor="ctr">
+                    <a:lnL w="6350" cap="flat" cmpd="sng" algn="ctr">
+                      <a:solidFill>
+                        <a:srgbClr val="D5E2EC"/>
+                      </a:solidFill>
+                      <a:prstDash val="solid"/>
+                      <a:round/>
+                      <a:headEnd type="none" w="med" len="med"/>
+                      <a:tailEnd type="none" w="med" len="med"/>
+                    </a:lnL>
+                    <a:lnR w="6350" cap="flat" cmpd="sng" algn="ctr">
+                      <a:solidFill>
+                        <a:srgbClr val="D5E2EC"/>
+                      </a:solidFill>
+                      <a:prstDash val="solid"/>
+                      <a:round/>
+                      <a:headEnd type="none" w="med" len="med"/>
+                      <a:tailEnd type="none" w="med" len="med"/>
+                    </a:lnR>
+                    <a:lnT w="6350" cap="flat" cmpd="sng" algn="ctr">
+                      <a:solidFill>
+                        <a:srgbClr val="D5E2EC"/>
+                      </a:solidFill>
+                      <a:prstDash val="solid"/>
+                      <a:round/>
+                      <a:headEnd type="none" w="med" len="med"/>
+                      <a:tailEnd type="none" w="med" len="med"/>
+                    </a:lnT>
+                    <a:lnB w="6350" cap="flat" cmpd="sng" algn="ctr">
+                      <a:solidFill>
+                        <a:srgbClr val="D5E2EC"/>
+                      </a:solidFill>
+                      <a:prstDash val="solid"/>
+                      <a:round/>
+                      <a:headEnd type="none" w="med" len="med"/>
+                      <a:tailEnd type="none" w="med" len="med"/>
+                    </a:lnB>
+                    <a:solidFill>
+                      <a:srgbClr val="EAF2F8"/>
+                    </a:solidFill>
+                  </a:tcPr>
+                </a:tc>
+                <a:tc>
+                  <a:txBody>
+                    <a:bodyPr/>
+                    <a:lstStyle/>
+                    <a:p>
+                      <a:pPr algn="ctr" indent="0" marL="0">
+                        <a:buNone/>
+                      </a:pPr>
+                      <a:r>
+                        <a:rPr lang="en-US" sz="1000" dirty="0">
+                          <a:solidFill>
+                            <a:srgbClr val="1A2733"/>
+                          </a:solidFill>
+                          <a:latin typeface="Calibri" pitchFamily="34" charset="0"/>
+                          <a:ea typeface="Calibri" pitchFamily="34" charset="-122"/>
+                          <a:cs typeface="Calibri" pitchFamily="34" charset="-120"/>
+                        </a:rPr>
+                        <a:t>2.7</a:t>
+                      </a:r>
+                      <a:endParaRPr lang="en-US" sz="1000" dirty="0">
+                        <a:latin typeface="Calibri" charset="0"/>
+                        <a:ea typeface="Calibri" charset="0"/>
+                        <a:cs typeface="Calibri" charset="0"/>
+                      </a:endParaRPr>
+                    </a:p>
+                  </a:txBody>
+                  <a:tcPr marL="36576" marR="36576" marT="36576" marB="36576" anchor="ctr">
+                    <a:lnL w="6350" cap="flat" cmpd="sng" algn="ctr">
+                      <a:solidFill>
+                        <a:srgbClr val="D5E2EC"/>
+                      </a:solidFill>
+                      <a:prstDash val="solid"/>
+                      <a:round/>
+                      <a:headEnd type="none" w="med" len="med"/>
+                      <a:tailEnd type="none" w="med" len="med"/>
+                    </a:lnL>
+                    <a:lnR w="6350" cap="flat" cmpd="sng" algn="ctr">
+                      <a:solidFill>
+                        <a:srgbClr val="D5E2EC"/>
+                      </a:solidFill>
+                      <a:prstDash val="solid"/>
+                      <a:round/>
+                      <a:headEnd type="none" w="med" len="med"/>
+                      <a:tailEnd type="none" w="med" len="med"/>
+                    </a:lnR>
+                    <a:lnT w="6350" cap="flat" cmpd="sng" algn="ctr">
+                      <a:solidFill>
+                        <a:srgbClr val="D5E2EC"/>
+                      </a:solidFill>
+                      <a:prstDash val="solid"/>
+                      <a:round/>
+                      <a:headEnd type="none" w="med" len="med"/>
+                      <a:tailEnd type="none" w="med" len="med"/>
+                    </a:lnT>
+                    <a:lnB w="6350" cap="flat" cmpd="sng" algn="ctr">
+                      <a:solidFill>
+                        <a:srgbClr val="D5E2EC"/>
+                      </a:solidFill>
+                      <a:prstDash val="solid"/>
+                      <a:round/>
+                      <a:headEnd type="none" w="med" len="med"/>
+                      <a:tailEnd type="none" w="med" len="med"/>
+                    </a:lnB>
+                    <a:solidFill>
+                      <a:srgbClr val="EAF2F8"/>
+                    </a:solidFill>
+                  </a:tcPr>
+                </a:tc>
+              </a:tr>
+              <a:tr h="0">
+                <a:tc>
+                  <a:txBody>
+                    <a:bodyPr/>
+                    <a:lstStyle/>
+                    <a:p>
+                      <a:pPr indent="0" marL="0">
+                        <a:buNone/>
+                      </a:pPr>
+                      <a:r>
+                        <a:rPr lang="en-US" sz="1000" dirty="0">
+                          <a:solidFill>
+                            <a:srgbClr val="1A2733"/>
+                          </a:solidFill>
+                          <a:latin typeface="Calibri" pitchFamily="34" charset="0"/>
+                          <a:ea typeface="Calibri" pitchFamily="34" charset="-122"/>
+                          <a:cs typeface="Calibri" pitchFamily="34" charset="-120"/>
+                        </a:rPr>
+                        <a:t>Test infrastructure (30 suites / 415 assertions, mutation verification, real-console harnesses, hook)</a:t>
+                      </a:r>
+                      <a:endParaRPr lang="en-US" sz="1000" dirty="0">
+                        <a:latin typeface="Calibri" charset="0"/>
+                        <a:ea typeface="Calibri" charset="0"/>
+                        <a:cs typeface="Calibri" charset="0"/>
+                      </a:endParaRPr>
+                    </a:p>
+                  </a:txBody>
+                  <a:tcPr marL="36576" marR="36576" marT="36576" marB="36576" anchor="ctr">
+                    <a:lnL w="6350" cap="flat" cmpd="sng" algn="ctr">
+                      <a:solidFill>
+                        <a:srgbClr val="D5E2EC"/>
+                      </a:solidFill>
+                      <a:prstDash val="solid"/>
+                      <a:round/>
+                      <a:headEnd type="none" w="med" len="med"/>
+                      <a:tailEnd type="none" w="med" len="med"/>
+                    </a:lnL>
+                    <a:lnR w="6350" cap="flat" cmpd="sng" algn="ctr">
+                      <a:solidFill>
+                        <a:srgbClr val="D5E2EC"/>
+                      </a:solidFill>
+                      <a:prstDash val="solid"/>
+                      <a:round/>
+                      <a:headEnd type="none" w="med" len="med"/>
+                      <a:tailEnd type="none" w="med" len="med"/>
+                    </a:lnR>
+                    <a:lnT w="6350" cap="flat" cmpd="sng" algn="ctr">
+                      <a:solidFill>
+                        <a:srgbClr val="D5E2EC"/>
+                      </a:solidFill>
+                      <a:prstDash val="solid"/>
+                      <a:round/>
+                      <a:headEnd type="none" w="med" len="med"/>
+                      <a:tailEnd type="none" w="med" len="med"/>
+                    </a:lnT>
+                    <a:lnB w="6350" cap="flat" cmpd="sng" algn="ctr">
+                      <a:solidFill>
+                        <a:srgbClr val="D5E2EC"/>
+                      </a:solidFill>
+                      <a:prstDash val="solid"/>
+                      <a:round/>
+                      <a:headEnd type="none" w="med" len="med"/>
+                      <a:tailEnd type="none" w="med" len="med"/>
+                    </a:lnB>
+                    <a:solidFill>
+                      <a:srgbClr val="FFFFFF"/>
+                    </a:solidFill>
+                  </a:tcPr>
+                </a:tc>
+                <a:tc>
+                  <a:txBody>
+                    <a:bodyPr/>
+                    <a:lstStyle/>
+                    <a:p>
+                      <a:pPr algn="ctr" indent="0" marL="0">
+                        <a:buNone/>
+                      </a:pPr>
+                      <a:r>
+                        <a:rPr lang="en-US" sz="1000" dirty="0">
+                          <a:solidFill>
+                            <a:srgbClr val="1A2733"/>
+                          </a:solidFill>
+                          <a:latin typeface="Calibri" pitchFamily="34" charset="0"/>
+                          <a:ea typeface="Calibri" pitchFamily="34" charset="-122"/>
+                          <a:cs typeface="Calibri" pitchFamily="34" charset="-120"/>
+                        </a:rPr>
+                        <a:t>15.0</a:t>
+                      </a:r>
+                      <a:endParaRPr lang="en-US" sz="1000" dirty="0">
+                        <a:latin typeface="Calibri" charset="0"/>
+                        <a:ea typeface="Calibri" charset="0"/>
+                        <a:cs typeface="Calibri" charset="0"/>
+                      </a:endParaRPr>
+                    </a:p>
+                  </a:txBody>
+                  <a:tcPr marL="36576" marR="36576" marT="36576" marB="36576" anchor="ctr">
+                    <a:lnL w="6350" cap="flat" cmpd="sng" algn="ctr">
+                      <a:solidFill>
+                        <a:srgbClr val="D5E2EC"/>
+                      </a:solidFill>
+                      <a:prstDash val="solid"/>
+                      <a:round/>
+                      <a:headEnd type="none" w="med" len="med"/>
+                      <a:tailEnd type="none" w="med" len="med"/>
+                    </a:lnL>
+                    <a:lnR w="6350" cap="flat" cmpd="sng" algn="ctr">
+                      <a:solidFill>
+                        <a:srgbClr val="D5E2EC"/>
+                      </a:solidFill>
+                      <a:prstDash val="solid"/>
+                      <a:round/>
+                      <a:headEnd type="none" w="med" len="med"/>
+                      <a:tailEnd type="none" w="med" len="med"/>
+                    </a:lnR>
+                    <a:lnT w="6350" cap="flat" cmpd="sng" algn="ctr">
+                      <a:solidFill>
+                        <a:srgbClr val="D5E2EC"/>
+                      </a:solidFill>
+                      <a:prstDash val="solid"/>
+                      <a:round/>
+                      <a:headEnd type="none" w="med" len="med"/>
+                      <a:tailEnd type="none" w="med" len="med"/>
+                    </a:lnT>
+                    <a:lnB w="6350" cap="flat" cmpd="sng" algn="ctr">
+                      <a:solidFill>
+                        <a:srgbClr val="D5E2EC"/>
+                      </a:solidFill>
+                      <a:prstDash val="solid"/>
+                      <a:round/>
+                      <a:headEnd type="none" w="med" len="med"/>
+                      <a:tailEnd type="none" w="med" len="med"/>
+                    </a:lnB>
+                    <a:solidFill>
+                      <a:srgbClr val="FFFFFF"/>
+                    </a:solidFill>
+                  </a:tcPr>
+                </a:tc>
+                <a:tc>
+                  <a:txBody>
+                    <a:bodyPr/>
+                    <a:lstStyle/>
+                    <a:p>
+                      <a:pPr algn="ctr" indent="0" marL="0">
+                        <a:buNone/>
+                      </a:pPr>
+                      <a:r>
+                        <a:rPr lang="en-US" sz="1000" dirty="0">
+                          <a:solidFill>
+                            <a:srgbClr val="1A2733"/>
+                          </a:solidFill>
+                          <a:latin typeface="Calibri" pitchFamily="34" charset="0"/>
+                          <a:ea typeface="Calibri" pitchFamily="34" charset="-122"/>
+                          <a:cs typeface="Calibri" pitchFamily="34" charset="-120"/>
+                        </a:rPr>
+                        <a:t>30.0</a:t>
+                      </a:r>
+                      <a:endParaRPr lang="en-US" sz="1000" dirty="0">
+                        <a:latin typeface="Calibri" charset="0"/>
+                        <a:ea typeface="Calibri" charset="0"/>
+                        <a:cs typeface="Calibri" charset="0"/>
+                      </a:endParaRPr>
+                    </a:p>
+                  </a:txBody>
+                  <a:tcPr marL="36576" marR="36576" marT="36576" marB="36576" anchor="ctr">
+                    <a:lnL w="6350" cap="flat" cmpd="sng" algn="ctr">
+                      <a:solidFill>
+                        <a:srgbClr val="D5E2EC"/>
+                      </a:solidFill>
+                      <a:prstDash val="solid"/>
+                      <a:round/>
+                      <a:headEnd type="none" w="med" len="med"/>
+                      <a:tailEnd type="none" w="med" len="med"/>
+                    </a:lnL>
+                    <a:lnR w="6350" cap="flat" cmpd="sng" algn="ctr">
+                      <a:solidFill>
+                        <a:srgbClr val="D5E2EC"/>
+                      </a:solidFill>
+                      <a:prstDash val="solid"/>
+                      <a:round/>
+                      <a:headEnd type="none" w="med" len="med"/>
+                      <a:tailEnd type="none" w="med" len="med"/>
+                    </a:lnR>
+                    <a:lnT w="6350" cap="flat" cmpd="sng" algn="ctr">
+                      <a:solidFill>
+                        <a:srgbClr val="D5E2EC"/>
+                      </a:solidFill>
+                      <a:prstDash val="solid"/>
+                      <a:round/>
+                      <a:headEnd type="none" w="med" len="med"/>
+                      <a:tailEnd type="none" w="med" len="med"/>
+                    </a:lnT>
+                    <a:lnB w="6350" cap="flat" cmpd="sng" algn="ctr">
+                      <a:solidFill>
+                        <a:srgbClr val="D5E2EC"/>
+                      </a:solidFill>
+                      <a:prstDash val="solid"/>
+                      <a:round/>
+                      <a:headEnd type="none" w="med" len="med"/>
+                      <a:tailEnd type="none" w="med" len="med"/>
+                    </a:lnB>
+                    <a:solidFill>
+                      <a:srgbClr val="FFFFFF"/>
+                    </a:solidFill>
+                  </a:tcPr>
+                </a:tc>
+                <a:tc>
+                  <a:txBody>
+                    <a:bodyPr/>
+                    <a:lstStyle/>
+                    <a:p>
+                      <a:pPr algn="ctr" indent="0" marL="0">
+                        <a:buNone/>
+                      </a:pPr>
+                      <a:r>
+                        <a:rPr lang="en-US" sz="1000" dirty="0">
+                          <a:solidFill>
+                            <a:srgbClr val="1A2733"/>
+                          </a:solidFill>
+                          <a:latin typeface="Calibri" pitchFamily="34" charset="0"/>
+                          <a:ea typeface="Calibri" pitchFamily="34" charset="-122"/>
+                          <a:cs typeface="Calibri" pitchFamily="34" charset="-120"/>
+                        </a:rPr>
+                        <a:t>60.0</a:t>
+                      </a:r>
+                      <a:endParaRPr lang="en-US" sz="1000" dirty="0">
+                        <a:latin typeface="Calibri" charset="0"/>
+                        <a:ea typeface="Calibri" charset="0"/>
+                        <a:cs typeface="Calibri" charset="0"/>
+                      </a:endParaRPr>
+                    </a:p>
+                  </a:txBody>
+                  <a:tcPr marL="36576" marR="36576" marT="36576" marB="36576" anchor="ctr">
+                    <a:lnL w="6350" cap="flat" cmpd="sng" algn="ctr">
+                      <a:solidFill>
+                        <a:srgbClr val="D5E2EC"/>
+                      </a:solidFill>
+                      <a:prstDash val="solid"/>
+                      <a:round/>
+                      <a:headEnd type="none" w="med" len="med"/>
+                      <a:tailEnd type="none" w="med" len="med"/>
+                    </a:lnL>
+                    <a:lnR w="6350" cap="flat" cmpd="sng" algn="ctr">
+                      <a:solidFill>
+                        <a:srgbClr val="D5E2EC"/>
+                      </a:solidFill>
+                      <a:prstDash val="solid"/>
+                      <a:round/>
+                      <a:headEnd type="none" w="med" len="med"/>
+                      <a:tailEnd type="none" w="med" len="med"/>
+                    </a:lnR>
+                    <a:lnT w="6350" cap="flat" cmpd="sng" algn="ctr">
+                      <a:solidFill>
+                        <a:srgbClr val="D5E2EC"/>
+                      </a:solidFill>
+                      <a:prstDash val="solid"/>
+                      <a:round/>
+                      <a:headEnd type="none" w="med" len="med"/>
+                      <a:tailEnd type="none" w="med" len="med"/>
+                    </a:lnT>
+                    <a:lnB w="6350" cap="flat" cmpd="sng" algn="ctr">
+                      <a:solidFill>
+                        <a:srgbClr val="D5E2EC"/>
+                      </a:solidFill>
+                      <a:prstDash val="solid"/>
+                      <a:round/>
+                      <a:headEnd type="none" w="med" len="med"/>
+                      <a:tailEnd type="none" w="med" len="med"/>
+                    </a:lnB>
+                    <a:solidFill>
+                      <a:srgbClr val="FFFFFF"/>
+                    </a:solidFill>
+                  </a:tcPr>
+                </a:tc>
+                <a:tc>
+                  <a:txBody>
+                    <a:bodyPr/>
+                    <a:lstStyle/>
+                    <a:p>
+                      <a:pPr algn="ctr" indent="0" marL="0">
+                        <a:buNone/>
+                      </a:pPr>
+                      <a:r>
+                        <a:rPr lang="en-US" sz="1000" dirty="0">
+                          <a:solidFill>
+                            <a:srgbClr val="1A2733"/>
+                          </a:solidFill>
+                          <a:latin typeface="Calibri" pitchFamily="34" charset="0"/>
+                          <a:ea typeface="Calibri" pitchFamily="34" charset="-122"/>
+                          <a:cs typeface="Calibri" pitchFamily="34" charset="-120"/>
+                        </a:rPr>
+                        <a:t>32.5</a:t>
+                      </a:r>
+                      <a:endParaRPr lang="en-US" sz="1000" dirty="0">
+                        <a:latin typeface="Calibri" charset="0"/>
+                        <a:ea typeface="Calibri" charset="0"/>
+                        <a:cs typeface="Calibri" charset="0"/>
+                      </a:endParaRPr>
+                    </a:p>
+                  </a:txBody>
+                  <a:tcPr marL="36576" marR="36576" marT="36576" marB="36576" anchor="ctr">
+                    <a:lnL w="6350" cap="flat" cmpd="sng" algn="ctr">
+                      <a:solidFill>
+                        <a:srgbClr val="D5E2EC"/>
+                      </a:solidFill>
+                      <a:prstDash val="solid"/>
+                      <a:round/>
+                      <a:headEnd type="none" w="med" len="med"/>
+                      <a:tailEnd type="none" w="med" len="med"/>
+                    </a:lnL>
+                    <a:lnR w="6350" cap="flat" cmpd="sng" algn="ctr">
+                      <a:solidFill>
+                        <a:srgbClr val="D5E2EC"/>
+                      </a:solidFill>
+                      <a:prstDash val="solid"/>
+                      <a:round/>
+                      <a:headEnd type="none" w="med" len="med"/>
+                      <a:tailEnd type="none" w="med" len="med"/>
+                    </a:lnR>
+                    <a:lnT w="6350" cap="flat" cmpd="sng" algn="ctr">
+                      <a:solidFill>
+                        <a:srgbClr val="D5E2EC"/>
+                      </a:solidFill>
+                      <a:prstDash val="solid"/>
+                      <a:round/>
+                      <a:headEnd type="none" w="med" len="med"/>
+                      <a:tailEnd type="none" w="med" len="med"/>
+                    </a:lnT>
+                    <a:lnB w="6350" cap="flat" cmpd="sng" algn="ctr">
+                      <a:solidFill>
+                        <a:srgbClr val="D5E2EC"/>
+                      </a:solidFill>
+                      <a:prstDash val="solid"/>
+                      <a:round/>
+                      <a:headEnd type="none" w="med" len="med"/>
+                      <a:tailEnd type="none" w="med" len="med"/>
+                    </a:lnB>
+                    <a:solidFill>
+                      <a:srgbClr val="FFFFFF"/>
+                    </a:solidFill>
+                  </a:tcPr>
+                </a:tc>
+                <a:tc>
+                  <a:txBody>
+                    <a:bodyPr/>
+                    <a:lstStyle/>
+                    <a:p>
+                      <a:pPr algn="ctr" indent="0" marL="0">
+                        <a:buNone/>
+                      </a:pPr>
+                      <a:r>
+                        <a:rPr lang="en-US" sz="1000" dirty="0">
+                          <a:solidFill>
+                            <a:srgbClr val="1A2733"/>
+                          </a:solidFill>
+                          <a:latin typeface="Calibri" pitchFamily="34" charset="0"/>
+                          <a:ea typeface="Calibri" pitchFamily="34" charset="-122"/>
+                          <a:cs typeface="Calibri" pitchFamily="34" charset="-120"/>
+                        </a:rPr>
+                        <a:t>7.5</a:t>
+                      </a:r>
+                      <a:endParaRPr lang="en-US" sz="1000" dirty="0">
+                        <a:latin typeface="Calibri" charset="0"/>
+                        <a:ea typeface="Calibri" charset="0"/>
+                        <a:cs typeface="Calibri" charset="0"/>
+                      </a:endParaRPr>
+                    </a:p>
+                  </a:txBody>
+                  <a:tcPr marL="36576" marR="36576" marT="36576" marB="36576" anchor="ctr">
+                    <a:lnL w="6350" cap="flat" cmpd="sng" algn="ctr">
+                      <a:solidFill>
+                        <a:srgbClr val="D5E2EC"/>
+                      </a:solidFill>
+                      <a:prstDash val="solid"/>
+                      <a:round/>
+                      <a:headEnd type="none" w="med" len="med"/>
+                      <a:tailEnd type="none" w="med" len="med"/>
+                    </a:lnL>
+                    <a:lnR w="6350" cap="flat" cmpd="sng" algn="ctr">
+                      <a:solidFill>
+                        <a:srgbClr val="D5E2EC"/>
+                      </a:solidFill>
+                      <a:prstDash val="solid"/>
+                      <a:round/>
+                      <a:headEnd type="none" w="med" len="med"/>
+                      <a:tailEnd type="none" w="med" len="med"/>
+                    </a:lnR>
+                    <a:lnT w="6350" cap="flat" cmpd="sng" algn="ctr">
+                      <a:solidFill>
+                        <a:srgbClr val="D5E2EC"/>
+                      </a:solidFill>
+                      <a:prstDash val="solid"/>
+                      <a:round/>
+                      <a:headEnd type="none" w="med" len="med"/>
+                      <a:tailEnd type="none" w="med" len="med"/>
+                    </a:lnT>
+                    <a:lnB w="6350" cap="flat" cmpd="sng" algn="ctr">
+                      <a:solidFill>
+                        <a:srgbClr val="D5E2EC"/>
+                      </a:solidFill>
+                      <a:prstDash val="solid"/>
+                      <a:round/>
+                      <a:headEnd type="none" w="med" len="med"/>
+                      <a:tailEnd type="none" w="med" len="med"/>
+                    </a:lnB>
+                    <a:solidFill>
+                      <a:srgbClr val="FFFFFF"/>
+                    </a:solidFill>
+                  </a:tcPr>
+                </a:tc>
+              </a:tr>
+              <a:tr h="0">
+                <a:tc>
+                  <a:txBody>
+                    <a:bodyPr/>
+                    <a:lstStyle/>
+                    <a:p>
+                      <a:pPr indent="0" marL="0">
+                        <a:buNone/>
+                      </a:pPr>
+                      <a:r>
+                        <a:rPr lang="en-US" sz="1000" dirty="0">
+                          <a:solidFill>
+                            <a:srgbClr val="1A2733"/>
+                          </a:solidFill>
+                          <a:latin typeface="Calibri" pitchFamily="34" charset="0"/>
+                          <a:ea typeface="Calibri" pitchFamily="34" charset="-122"/>
+                          <a:cs typeface="Calibri" pitchFamily="34" charset="-120"/>
+                        </a:rPr>
+                        <a:t>Documentation pipeline (docx generator, four manuals, three READMEs)</a:t>
+                      </a:r>
+                      <a:endParaRPr lang="en-US" sz="1000" dirty="0">
+                        <a:latin typeface="Calibri" charset="0"/>
+                        <a:ea typeface="Calibri" charset="0"/>
+                        <a:cs typeface="Calibri" charset="0"/>
+                      </a:endParaRPr>
+                    </a:p>
+                  </a:txBody>
+                  <a:tcPr marL="36576" marR="36576" marT="36576" marB="36576" anchor="ctr">
+                    <a:lnL w="6350" cap="flat" cmpd="sng" algn="ctr">
+                      <a:solidFill>
+                        <a:srgbClr val="D5E2EC"/>
+                      </a:solidFill>
+                      <a:prstDash val="solid"/>
+                      <a:round/>
+                      <a:headEnd type="none" w="med" len="med"/>
+                      <a:tailEnd type="none" w="med" len="med"/>
+                    </a:lnL>
+                    <a:lnR w="6350" cap="flat" cmpd="sng" algn="ctr">
+                      <a:solidFill>
+                        <a:srgbClr val="D5E2EC"/>
+                      </a:solidFill>
+                      <a:prstDash val="solid"/>
+                      <a:round/>
+                      <a:headEnd type="none" w="med" len="med"/>
+                      <a:tailEnd type="none" w="med" len="med"/>
+                    </a:lnR>
+                    <a:lnT w="6350" cap="flat" cmpd="sng" algn="ctr">
+                      <a:solidFill>
+                        <a:srgbClr val="D5E2EC"/>
+                      </a:solidFill>
+                      <a:prstDash val="solid"/>
+                      <a:round/>
+                      <a:headEnd type="none" w="med" len="med"/>
+                      <a:tailEnd type="none" w="med" len="med"/>
+                    </a:lnT>
+                    <a:lnB w="6350" cap="flat" cmpd="sng" algn="ctr">
+                      <a:solidFill>
+                        <a:srgbClr val="D5E2EC"/>
+                      </a:solidFill>
+                      <a:prstDash val="solid"/>
+                      <a:round/>
+                      <a:headEnd type="none" w="med" len="med"/>
+                      <a:tailEnd type="none" w="med" len="med"/>
+                    </a:lnB>
+                    <a:solidFill>
+                      <a:srgbClr val="EAF2F8"/>
+                    </a:solidFill>
+                  </a:tcPr>
+                </a:tc>
+                <a:tc>
+                  <a:txBody>
+                    <a:bodyPr/>
+                    <a:lstStyle/>
+                    <a:p>
+                      <a:pPr algn="ctr" indent="0" marL="0">
+                        <a:buNone/>
+                      </a:pPr>
+                      <a:r>
+                        <a:rPr lang="en-US" sz="1000" dirty="0">
+                          <a:solidFill>
+                            <a:srgbClr val="1A2733"/>
+                          </a:solidFill>
+                          <a:latin typeface="Calibri" pitchFamily="34" charset="0"/>
+                          <a:ea typeface="Calibri" pitchFamily="34" charset="-122"/>
+                          <a:cs typeface="Calibri" pitchFamily="34" charset="-120"/>
+                        </a:rPr>
+                        <a:t>8.0</a:t>
+                      </a:r>
+                      <a:endParaRPr lang="en-US" sz="1000" dirty="0">
+                        <a:latin typeface="Calibri" charset="0"/>
+                        <a:ea typeface="Calibri" charset="0"/>
+                        <a:cs typeface="Calibri" charset="0"/>
+                      </a:endParaRPr>
+                    </a:p>
+                  </a:txBody>
+                  <a:tcPr marL="36576" marR="36576" marT="36576" marB="36576" anchor="ctr">
+                    <a:lnL w="6350" cap="flat" cmpd="sng" algn="ctr">
+                      <a:solidFill>
+                        <a:srgbClr val="D5E2EC"/>
+                      </a:solidFill>
+                      <a:prstDash val="solid"/>
+                      <a:round/>
+                      <a:headEnd type="none" w="med" len="med"/>
+                      <a:tailEnd type="none" w="med" len="med"/>
+                    </a:lnL>
+                    <a:lnR w="6350" cap="flat" cmpd="sng" algn="ctr">
+                      <a:solidFill>
+                        <a:srgbClr val="D5E2EC"/>
+                      </a:solidFill>
+                      <a:prstDash val="solid"/>
+                      <a:round/>
+                      <a:headEnd type="none" w="med" len="med"/>
+                      <a:tailEnd type="none" w="med" len="med"/>
+                    </a:lnR>
+                    <a:lnT w="6350" cap="flat" cmpd="sng" algn="ctr">
+                      <a:solidFill>
+                        <a:srgbClr val="D5E2EC"/>
+                      </a:solidFill>
+                      <a:prstDash val="solid"/>
+                      <a:round/>
+                      <a:headEnd type="none" w="med" len="med"/>
+                      <a:tailEnd type="none" w="med" len="med"/>
+                    </a:lnT>
+                    <a:lnB w="6350" cap="flat" cmpd="sng" algn="ctr">
+                      <a:solidFill>
+                        <a:srgbClr val="D5E2EC"/>
+                      </a:solidFill>
+                      <a:prstDash val="solid"/>
+                      <a:round/>
+                      <a:headEnd type="none" w="med" len="med"/>
+                      <a:tailEnd type="none" w="med" len="med"/>
+                    </a:lnB>
+                    <a:solidFill>
+                      <a:srgbClr val="EAF2F8"/>
+                    </a:solidFill>
+                  </a:tcPr>
+                </a:tc>
+                <a:tc>
+                  <a:txBody>
+                    <a:bodyPr/>
+                    <a:lstStyle/>
+                    <a:p>
+                      <a:pPr algn="ctr" indent="0" marL="0">
+                        <a:buNone/>
+                      </a:pPr>
+                      <a:r>
+                        <a:rPr lang="en-US" sz="1000" dirty="0">
+                          <a:solidFill>
+                            <a:srgbClr val="1A2733"/>
+                          </a:solidFill>
+                          <a:latin typeface="Calibri" pitchFamily="34" charset="0"/>
+                          <a:ea typeface="Calibri" pitchFamily="34" charset="-122"/>
+                          <a:cs typeface="Calibri" pitchFamily="34" charset="-120"/>
+                        </a:rPr>
+                        <a:t>15.0</a:t>
+                      </a:r>
+                      <a:endParaRPr lang="en-US" sz="1000" dirty="0">
+                        <a:latin typeface="Calibri" charset="0"/>
+                        <a:ea typeface="Calibri" charset="0"/>
+                        <a:cs typeface="Calibri" charset="0"/>
+                      </a:endParaRPr>
+                    </a:p>
+                  </a:txBody>
+                  <a:tcPr marL="36576" marR="36576" marT="36576" marB="36576" anchor="ctr">
+                    <a:lnL w="6350" cap="flat" cmpd="sng" algn="ctr">
+                      <a:solidFill>
+                        <a:srgbClr val="D5E2EC"/>
+                      </a:solidFill>
+                      <a:prstDash val="solid"/>
+                      <a:round/>
+                      <a:headEnd type="none" w="med" len="med"/>
+                      <a:tailEnd type="none" w="med" len="med"/>
+                    </a:lnL>
+                    <a:lnR w="6350" cap="flat" cmpd="sng" algn="ctr">
+                      <a:solidFill>
+                        <a:srgbClr val="D5E2EC"/>
+                      </a:solidFill>
+                      <a:prstDash val="solid"/>
+                      <a:round/>
+                      <a:headEnd type="none" w="med" len="med"/>
+                      <a:tailEnd type="none" w="med" len="med"/>
+                    </a:lnR>
+                    <a:lnT w="6350" cap="flat" cmpd="sng" algn="ctr">
+                      <a:solidFill>
+                        <a:srgbClr val="D5E2EC"/>
+                      </a:solidFill>
+                      <a:prstDash val="solid"/>
+                      <a:round/>
+                      <a:headEnd type="none" w="med" len="med"/>
+                      <a:tailEnd type="none" w="med" len="med"/>
+                    </a:lnT>
+                    <a:lnB w="6350" cap="flat" cmpd="sng" algn="ctr">
+                      <a:solidFill>
+                        <a:srgbClr val="D5E2EC"/>
+                      </a:solidFill>
+                      <a:prstDash val="solid"/>
+                      <a:round/>
+                      <a:headEnd type="none" w="med" len="med"/>
+                      <a:tailEnd type="none" w="med" len="med"/>
+                    </a:lnB>
+                    <a:solidFill>
+                      <a:srgbClr val="EAF2F8"/>
+                    </a:solidFill>
+                  </a:tcPr>
+                </a:tc>
+                <a:tc>
+                  <a:txBody>
+                    <a:bodyPr/>
+                    <a:lstStyle/>
+                    <a:p>
+                      <a:pPr algn="ctr" indent="0" marL="0">
+                        <a:buNone/>
+                      </a:pPr>
+                      <a:r>
+                        <a:rPr lang="en-US" sz="1000" dirty="0">
+                          <a:solidFill>
+                            <a:srgbClr val="1A2733"/>
+                          </a:solidFill>
+                          <a:latin typeface="Calibri" pitchFamily="34" charset="0"/>
+                          <a:ea typeface="Calibri" pitchFamily="34" charset="-122"/>
+                          <a:cs typeface="Calibri" pitchFamily="34" charset="-120"/>
+                        </a:rPr>
+                        <a:t>28.0</a:t>
+                      </a:r>
+                      <a:endParaRPr lang="en-US" sz="1000" dirty="0">
+                        <a:latin typeface="Calibri" charset="0"/>
+                        <a:ea typeface="Calibri" charset="0"/>
+                        <a:cs typeface="Calibri" charset="0"/>
+                      </a:endParaRPr>
+                    </a:p>
+                  </a:txBody>
+                  <a:tcPr marL="36576" marR="36576" marT="36576" marB="36576" anchor="ctr">
+                    <a:lnL w="6350" cap="flat" cmpd="sng" algn="ctr">
+                      <a:solidFill>
+                        <a:srgbClr val="D5E2EC"/>
+                      </a:solidFill>
+                      <a:prstDash val="solid"/>
+                      <a:round/>
+                      <a:headEnd type="none" w="med" len="med"/>
+                      <a:tailEnd type="none" w="med" len="med"/>
+                    </a:lnL>
+                    <a:lnR w="6350" cap="flat" cmpd="sng" algn="ctr">
+                      <a:solidFill>
+                        <a:srgbClr val="D5E2EC"/>
+                      </a:solidFill>
+                      <a:prstDash val="solid"/>
+                      <a:round/>
+                      <a:headEnd type="none" w="med" len="med"/>
+                      <a:tailEnd type="none" w="med" len="med"/>
+                    </a:lnR>
+                    <a:lnT w="6350" cap="flat" cmpd="sng" algn="ctr">
+                      <a:solidFill>
+                        <a:srgbClr val="D5E2EC"/>
+                      </a:solidFill>
+                      <a:prstDash val="solid"/>
+                      <a:round/>
+                      <a:headEnd type="none" w="med" len="med"/>
+                      <a:tailEnd type="none" w="med" len="med"/>
+                    </a:lnT>
+                    <a:lnB w="6350" cap="flat" cmpd="sng" algn="ctr">
+                      <a:solidFill>
+                        <a:srgbClr val="D5E2EC"/>
+                      </a:solidFill>
+                      <a:prstDash val="solid"/>
+                      <a:round/>
+                      <a:headEnd type="none" w="med" len="med"/>
+                      <a:tailEnd type="none" w="med" len="med"/>
+                    </a:lnB>
+                    <a:solidFill>
+                      <a:srgbClr val="EAF2F8"/>
+                    </a:solidFill>
+                  </a:tcPr>
+                </a:tc>
+                <a:tc>
+                  <a:txBody>
+                    <a:bodyPr/>
+                    <a:lstStyle/>
+                    <a:p>
+                      <a:pPr algn="ctr" indent="0" marL="0">
+                        <a:buNone/>
+                      </a:pPr>
+                      <a:r>
+                        <a:rPr lang="en-US" sz="1000" dirty="0">
+                          <a:solidFill>
+                            <a:srgbClr val="1A2733"/>
+                          </a:solidFill>
+                          <a:latin typeface="Calibri" pitchFamily="34" charset="0"/>
+                          <a:ea typeface="Calibri" pitchFamily="34" charset="-122"/>
+                          <a:cs typeface="Calibri" pitchFamily="34" charset="-120"/>
+                        </a:rPr>
+                        <a:t>16.0</a:t>
+                      </a:r>
+                      <a:endParaRPr lang="en-US" sz="1000" dirty="0">
+                        <a:latin typeface="Calibri" charset="0"/>
+                        <a:ea typeface="Calibri" charset="0"/>
+                        <a:cs typeface="Calibri" charset="0"/>
+                      </a:endParaRPr>
+                    </a:p>
+                  </a:txBody>
+                  <a:tcPr marL="36576" marR="36576" marT="36576" marB="36576" anchor="ctr">
+                    <a:lnL w="6350" cap="flat" cmpd="sng" algn="ctr">
+                      <a:solidFill>
+                        <a:srgbClr val="D5E2EC"/>
+                      </a:solidFill>
+                      <a:prstDash val="solid"/>
+                      <a:round/>
+                      <a:headEnd type="none" w="med" len="med"/>
+                      <a:tailEnd type="none" w="med" len="med"/>
+                    </a:lnL>
+                    <a:lnR w="6350" cap="flat" cmpd="sng" algn="ctr">
+                      <a:solidFill>
+                        <a:srgbClr val="D5E2EC"/>
+                      </a:solidFill>
+                      <a:prstDash val="solid"/>
+                      <a:round/>
+                      <a:headEnd type="none" w="med" len="med"/>
+                      <a:tailEnd type="none" w="med" len="med"/>
+                    </a:lnR>
+                    <a:lnT w="6350" cap="flat" cmpd="sng" algn="ctr">
+                      <a:solidFill>
+                        <a:srgbClr val="D5E2EC"/>
+                      </a:solidFill>
+                      <a:prstDash val="solid"/>
+                      <a:round/>
+                      <a:headEnd type="none" w="med" len="med"/>
+                      <a:tailEnd type="none" w="med" len="med"/>
+                    </a:lnT>
+                    <a:lnB w="6350" cap="flat" cmpd="sng" algn="ctr">
+                      <a:solidFill>
+                        <a:srgbClr val="D5E2EC"/>
+                      </a:solidFill>
+                      <a:prstDash val="solid"/>
+                      <a:round/>
+                      <a:headEnd type="none" w="med" len="med"/>
+                      <a:tailEnd type="none" w="med" len="med"/>
+                    </a:lnB>
+                    <a:solidFill>
+                      <a:srgbClr val="EAF2F8"/>
+                    </a:solidFill>
+                  </a:tcPr>
+                </a:tc>
+                <a:tc>
+                  <a:txBody>
+                    <a:bodyPr/>
+                    <a:lstStyle/>
+                    <a:p>
+                      <a:pPr algn="ctr" indent="0" marL="0">
+                        <a:buNone/>
+                      </a:pPr>
+                      <a:r>
+                        <a:rPr lang="en-US" sz="1000" dirty="0">
+                          <a:solidFill>
+                            <a:srgbClr val="1A2733"/>
+                          </a:solidFill>
+                          <a:latin typeface="Calibri" pitchFamily="34" charset="0"/>
+                          <a:ea typeface="Calibri" pitchFamily="34" charset="-122"/>
+                          <a:cs typeface="Calibri" pitchFamily="34" charset="-120"/>
+                        </a:rPr>
+                        <a:t>3.3</a:t>
+                      </a:r>
+                      <a:endParaRPr lang="en-US" sz="1000" dirty="0">
+                        <a:latin typeface="Calibri" charset="0"/>
+                        <a:ea typeface="Calibri" charset="0"/>
+                        <a:cs typeface="Calibri" charset="0"/>
+                      </a:endParaRPr>
+                    </a:p>
+                  </a:txBody>
+                  <a:tcPr marL="36576" marR="36576" marT="36576" marB="36576" anchor="ctr">
+                    <a:lnL w="6350" cap="flat" cmpd="sng" algn="ctr">
+                      <a:solidFill>
+                        <a:srgbClr val="D5E2EC"/>
+                      </a:solidFill>
+                      <a:prstDash val="solid"/>
+                      <a:round/>
+                      <a:headEnd type="none" w="med" len="med"/>
+                      <a:tailEnd type="none" w="med" len="med"/>
+                    </a:lnL>
+                    <a:lnR w="6350" cap="flat" cmpd="sng" algn="ctr">
+                      <a:solidFill>
+                        <a:srgbClr val="D5E2EC"/>
+                      </a:solidFill>
+                      <a:prstDash val="solid"/>
+                      <a:round/>
+                      <a:headEnd type="none" w="med" len="med"/>
+                      <a:tailEnd type="none" w="med" len="med"/>
+                    </a:lnR>
+                    <a:lnT w="6350" cap="flat" cmpd="sng" algn="ctr">
+                      <a:solidFill>
+                        <a:srgbClr val="D5E2EC"/>
+                      </a:solidFill>
+                      <a:prstDash val="solid"/>
+                      <a:round/>
+                      <a:headEnd type="none" w="med" len="med"/>
+                      <a:tailEnd type="none" w="med" len="med"/>
+                    </a:lnT>
+                    <a:lnB w="6350" cap="flat" cmpd="sng" algn="ctr">
+                      <a:solidFill>
+                        <a:srgbClr val="D5E2EC"/>
+                      </a:solidFill>
+                      <a:prstDash val="solid"/>
+                      <a:round/>
+                      <a:headEnd type="none" w="med" len="med"/>
+                      <a:tailEnd type="none" w="med" len="med"/>
+                    </a:lnB>
+                    <a:solidFill>
+                      <a:srgbClr val="EAF2F8"/>
+                    </a:solidFill>
+                  </a:tcPr>
+                </a:tc>
+              </a:tr>
+              <a:tr h="0">
+                <a:tc>
+                  <a:txBody>
+                    <a:bodyPr/>
+                    <a:lstStyle/>
+                    <a:p>
+                      <a:pPr indent="0" marL="0">
+                        <a:buNone/>
+                      </a:pPr>
+                      <a:r>
+                        <a:rPr lang="en-US" sz="1000" dirty="0">
+                          <a:solidFill>
+                            <a:srgbClr val="1A2733"/>
+                          </a:solidFill>
+                          <a:latin typeface="Calibri" pitchFamily="34" charset="0"/>
+                          <a:ea typeface="Calibri" pitchFamily="34" charset="-122"/>
+                          <a:cs typeface="Calibri" pitchFamily="34" charset="-120"/>
+                        </a:rPr>
+                        <a:t>Hardening &amp; defect discovery (route audits, dropped-connection family, live cross-checks)</a:t>
+                      </a:r>
+                      <a:endParaRPr lang="en-US" sz="1000" dirty="0">
+                        <a:latin typeface="Calibri" charset="0"/>
+                        <a:ea typeface="Calibri" charset="0"/>
+                        <a:cs typeface="Calibri" charset="0"/>
+                      </a:endParaRPr>
+                    </a:p>
+                  </a:txBody>
+                  <a:tcPr marL="36576" marR="36576" marT="36576" marB="36576" anchor="ctr">
+                    <a:lnL w="6350" cap="flat" cmpd="sng" algn="ctr">
+                      <a:solidFill>
+                        <a:srgbClr val="D5E2EC"/>
+                      </a:solidFill>
+                      <a:prstDash val="solid"/>
+                      <a:round/>
+                      <a:headEnd type="none" w="med" len="med"/>
+                      <a:tailEnd type="none" w="med" len="med"/>
+                    </a:lnL>
+                    <a:lnR w="6350" cap="flat" cmpd="sng" algn="ctr">
+                      <a:solidFill>
+                        <a:srgbClr val="D5E2EC"/>
+                      </a:solidFill>
+                      <a:prstDash val="solid"/>
+                      <a:round/>
+                      <a:headEnd type="none" w="med" len="med"/>
+                      <a:tailEnd type="none" w="med" len="med"/>
+                    </a:lnR>
+                    <a:lnT w="6350" cap="flat" cmpd="sng" algn="ctr">
+                      <a:solidFill>
+                        <a:srgbClr val="D5E2EC"/>
+                      </a:solidFill>
+                      <a:prstDash val="solid"/>
+                      <a:round/>
+                      <a:headEnd type="none" w="med" len="med"/>
+                      <a:tailEnd type="none" w="med" len="med"/>
+                    </a:lnT>
+                    <a:lnB w="6350" cap="flat" cmpd="sng" algn="ctr">
+                      <a:solidFill>
+                        <a:srgbClr val="D5E2EC"/>
+                      </a:solidFill>
+                      <a:prstDash val="solid"/>
+                      <a:round/>
+                      <a:headEnd type="none" w="med" len="med"/>
+                      <a:tailEnd type="none" w="med" len="med"/>
+                    </a:lnB>
+                    <a:solidFill>
+                      <a:srgbClr val="FFFFFF"/>
+                    </a:solidFill>
+                  </a:tcPr>
+                </a:tc>
+                <a:tc>
+                  <a:txBody>
+                    <a:bodyPr/>
+                    <a:lstStyle/>
+                    <a:p>
+                      <a:pPr algn="ctr" indent="0" marL="0">
+                        <a:buNone/>
+                      </a:pPr>
+                      <a:r>
+                        <a:rPr lang="en-US" sz="1000" dirty="0">
+                          <a:solidFill>
+                            <a:srgbClr val="1A2733"/>
+                          </a:solidFill>
+                          <a:latin typeface="Calibri" pitchFamily="34" charset="0"/>
+                          <a:ea typeface="Calibri" pitchFamily="34" charset="-122"/>
+                          <a:cs typeface="Calibri" pitchFamily="34" charset="-120"/>
+                        </a:rPr>
+                        <a:t>6.0</a:t>
+                      </a:r>
+                      <a:endParaRPr lang="en-US" sz="1000" dirty="0">
+                        <a:latin typeface="Calibri" charset="0"/>
+                        <a:ea typeface="Calibri" charset="0"/>
+                        <a:cs typeface="Calibri" charset="0"/>
+                      </a:endParaRPr>
+                    </a:p>
+                  </a:txBody>
+                  <a:tcPr marL="36576" marR="36576" marT="36576" marB="36576" anchor="ctr">
+                    <a:lnL w="6350" cap="flat" cmpd="sng" algn="ctr">
+                      <a:solidFill>
+                        <a:srgbClr val="D5E2EC"/>
+                      </a:solidFill>
+                      <a:prstDash val="solid"/>
+                      <a:round/>
+                      <a:headEnd type="none" w="med" len="med"/>
+                      <a:tailEnd type="none" w="med" len="med"/>
+                    </a:lnL>
+                    <a:lnR w="6350" cap="flat" cmpd="sng" algn="ctr">
+                      <a:solidFill>
+                        <a:srgbClr val="D5E2EC"/>
+                      </a:solidFill>
+                      <a:prstDash val="solid"/>
+                      <a:round/>
+                      <a:headEnd type="none" w="med" len="med"/>
+                      <a:tailEnd type="none" w="med" len="med"/>
+                    </a:lnR>
+                    <a:lnT w="6350" cap="flat" cmpd="sng" algn="ctr">
+                      <a:solidFill>
+                        <a:srgbClr val="D5E2EC"/>
+                      </a:solidFill>
+                      <a:prstDash val="solid"/>
+                      <a:round/>
+                      <a:headEnd type="none" w="med" len="med"/>
+                      <a:tailEnd type="none" w="med" len="med"/>
+                    </a:lnT>
+                    <a:lnB w="6350" cap="flat" cmpd="sng" algn="ctr">
+                      <a:solidFill>
+                        <a:srgbClr val="D5E2EC"/>
+                      </a:solidFill>
+                      <a:prstDash val="solid"/>
+                      <a:round/>
+                      <a:headEnd type="none" w="med" len="med"/>
+                      <a:tailEnd type="none" w="med" len="med"/>
+                    </a:lnB>
+                    <a:solidFill>
+                      <a:srgbClr val="FFFFFF"/>
+                    </a:solidFill>
+                  </a:tcPr>
+                </a:tc>
+                <a:tc>
+                  <a:txBody>
+                    <a:bodyPr/>
+                    <a:lstStyle/>
+                    <a:p>
+                      <a:pPr algn="ctr" indent="0" marL="0">
+                        <a:buNone/>
+                      </a:pPr>
+                      <a:r>
+                        <a:rPr lang="en-US" sz="1000" dirty="0">
+                          <a:solidFill>
+                            <a:srgbClr val="1A2733"/>
+                          </a:solidFill>
+                          <a:latin typeface="Calibri" pitchFamily="34" charset="0"/>
+                          <a:ea typeface="Calibri" pitchFamily="34" charset="-122"/>
+                          <a:cs typeface="Calibri" pitchFamily="34" charset="-120"/>
+                        </a:rPr>
+                        <a:t>14.0</a:t>
+                      </a:r>
+                      <a:endParaRPr lang="en-US" sz="1000" dirty="0">
+                        <a:latin typeface="Calibri" charset="0"/>
+                        <a:ea typeface="Calibri" charset="0"/>
+                        <a:cs typeface="Calibri" charset="0"/>
+                      </a:endParaRPr>
+                    </a:p>
+                  </a:txBody>
+                  <a:tcPr marL="36576" marR="36576" marT="36576" marB="36576" anchor="ctr">
+                    <a:lnL w="6350" cap="flat" cmpd="sng" algn="ctr">
+                      <a:solidFill>
+                        <a:srgbClr val="D5E2EC"/>
+                      </a:solidFill>
+                      <a:prstDash val="solid"/>
+                      <a:round/>
+                      <a:headEnd type="none" w="med" len="med"/>
+                      <a:tailEnd type="none" w="med" len="med"/>
+                    </a:lnL>
+                    <a:lnR w="6350" cap="flat" cmpd="sng" algn="ctr">
+                      <a:solidFill>
+                        <a:srgbClr val="D5E2EC"/>
+                      </a:solidFill>
+                      <a:prstDash val="solid"/>
+                      <a:round/>
+                      <a:headEnd type="none" w="med" len="med"/>
+                      <a:tailEnd type="none" w="med" len="med"/>
+                    </a:lnR>
+                    <a:lnT w="6350" cap="flat" cmpd="sng" algn="ctr">
+                      <a:solidFill>
+                        <a:srgbClr val="D5E2EC"/>
+                      </a:solidFill>
+                      <a:prstDash val="solid"/>
+                      <a:round/>
+                      <a:headEnd type="none" w="med" len="med"/>
+                      <a:tailEnd type="none" w="med" len="med"/>
+                    </a:lnT>
+                    <a:lnB w="6350" cap="flat" cmpd="sng" algn="ctr">
+                      <a:solidFill>
+                        <a:srgbClr val="D5E2EC"/>
+                      </a:solidFill>
+                      <a:prstDash val="solid"/>
+                      <a:round/>
+                      <a:headEnd type="none" w="med" len="med"/>
+                      <a:tailEnd type="none" w="med" len="med"/>
+                    </a:lnB>
+                    <a:solidFill>
+                      <a:srgbClr val="FFFFFF"/>
+                    </a:solidFill>
+                  </a:tcPr>
+                </a:tc>
+                <a:tc>
+                  <a:txBody>
+                    <a:bodyPr/>
+                    <a:lstStyle/>
+                    <a:p>
+                      <a:pPr algn="ctr" indent="0" marL="0">
+                        <a:buNone/>
+                      </a:pPr>
+                      <a:r>
+                        <a:rPr lang="en-US" sz="1000" dirty="0">
+                          <a:solidFill>
+                            <a:srgbClr val="1A2733"/>
+                          </a:solidFill>
+                          <a:latin typeface="Calibri" pitchFamily="34" charset="0"/>
+                          <a:ea typeface="Calibri" pitchFamily="34" charset="-122"/>
+                          <a:cs typeface="Calibri" pitchFamily="34" charset="-120"/>
+                        </a:rPr>
+                        <a:t>28.0</a:t>
+                      </a:r>
+                      <a:endParaRPr lang="en-US" sz="1000" dirty="0">
+                        <a:latin typeface="Calibri" charset="0"/>
+                        <a:ea typeface="Calibri" charset="0"/>
+                        <a:cs typeface="Calibri" charset="0"/>
+                      </a:endParaRPr>
+                    </a:p>
+                  </a:txBody>
+                  <a:tcPr marL="36576" marR="36576" marT="36576" marB="36576" anchor="ctr">
+                    <a:lnL w="6350" cap="flat" cmpd="sng" algn="ctr">
+                      <a:solidFill>
+                        <a:srgbClr val="D5E2EC"/>
+                      </a:solidFill>
+                      <a:prstDash val="solid"/>
+                      <a:round/>
+                      <a:headEnd type="none" w="med" len="med"/>
+                      <a:tailEnd type="none" w="med" len="med"/>
+                    </a:lnL>
+                    <a:lnR w="6350" cap="flat" cmpd="sng" algn="ctr">
+                      <a:solidFill>
+                        <a:srgbClr val="D5E2EC"/>
+                      </a:solidFill>
+                      <a:prstDash val="solid"/>
+                      <a:round/>
+                      <a:headEnd type="none" w="med" len="med"/>
+                      <a:tailEnd type="none" w="med" len="med"/>
+                    </a:lnR>
+                    <a:lnT w="6350" cap="flat" cmpd="sng" algn="ctr">
+                      <a:solidFill>
+                        <a:srgbClr val="D5E2EC"/>
+                      </a:solidFill>
+                      <a:prstDash val="solid"/>
+                      <a:round/>
+                      <a:headEnd type="none" w="med" len="med"/>
+                      <a:tailEnd type="none" w="med" len="med"/>
+                    </a:lnT>
+                    <a:lnB w="6350" cap="flat" cmpd="sng" algn="ctr">
+                      <a:solidFill>
+                        <a:srgbClr val="D5E2EC"/>
+                      </a:solidFill>
+                      <a:prstDash val="solid"/>
+                      <a:round/>
+                      <a:headEnd type="none" w="med" len="med"/>
+                      <a:tailEnd type="none" w="med" len="med"/>
+                    </a:lnB>
+                    <a:solidFill>
+                      <a:srgbClr val="FFFFFF"/>
+                    </a:solidFill>
+                  </a:tcPr>
+                </a:tc>
+                <a:tc>
+                  <a:txBody>
+                    <a:bodyPr/>
+                    <a:lstStyle/>
+                    <a:p>
+                      <a:pPr algn="ctr" indent="0" marL="0">
+                        <a:buNone/>
+                      </a:pPr>
+                      <a:r>
+                        <a:rPr lang="en-US" sz="1000" dirty="0">
+                          <a:solidFill>
+                            <a:srgbClr val="1A2733"/>
+                          </a:solidFill>
+                          <a:latin typeface="Calibri" pitchFamily="34" charset="0"/>
+                          <a:ea typeface="Calibri" pitchFamily="34" charset="-122"/>
+                          <a:cs typeface="Calibri" pitchFamily="34" charset="-120"/>
+                        </a:rPr>
+                        <a:t>15.0</a:t>
+                      </a:r>
+                      <a:endParaRPr lang="en-US" sz="1000" dirty="0">
+                        <a:latin typeface="Calibri" charset="0"/>
+                        <a:ea typeface="Calibri" charset="0"/>
+                        <a:cs typeface="Calibri" charset="0"/>
+                      </a:endParaRPr>
+                    </a:p>
+                  </a:txBody>
+                  <a:tcPr marL="36576" marR="36576" marT="36576" marB="36576" anchor="ctr">
+                    <a:lnL w="6350" cap="flat" cmpd="sng" algn="ctr">
+                      <a:solidFill>
+                        <a:srgbClr val="D5E2EC"/>
+                      </a:solidFill>
+                      <a:prstDash val="solid"/>
+                      <a:round/>
+                      <a:headEnd type="none" w="med" len="med"/>
+                      <a:tailEnd type="none" w="med" len="med"/>
+                    </a:lnL>
+                    <a:lnR w="6350" cap="flat" cmpd="sng" algn="ctr">
+                      <a:solidFill>
+                        <a:srgbClr val="D5E2EC"/>
+                      </a:solidFill>
+                      <a:prstDash val="solid"/>
+                      <a:round/>
+                      <a:headEnd type="none" w="med" len="med"/>
+                      <a:tailEnd type="none" w="med" len="med"/>
+                    </a:lnR>
+                    <a:lnT w="6350" cap="flat" cmpd="sng" algn="ctr">
+                      <a:solidFill>
+                        <a:srgbClr val="D5E2EC"/>
+                      </a:solidFill>
+                      <a:prstDash val="solid"/>
+                      <a:round/>
+                      <a:headEnd type="none" w="med" len="med"/>
+                      <a:tailEnd type="none" w="med" len="med"/>
+                    </a:lnT>
+                    <a:lnB w="6350" cap="flat" cmpd="sng" algn="ctr">
+                      <a:solidFill>
+                        <a:srgbClr val="D5E2EC"/>
+                      </a:solidFill>
+                      <a:prstDash val="solid"/>
+                      <a:round/>
+                      <a:headEnd type="none" w="med" len="med"/>
+                      <a:tailEnd type="none" w="med" len="med"/>
+                    </a:lnB>
+                    <a:solidFill>
+                      <a:srgbClr val="FFFFFF"/>
+                    </a:solidFill>
+                  </a:tcPr>
+                </a:tc>
+                <a:tc>
+                  <a:txBody>
+                    <a:bodyPr/>
+                    <a:lstStyle/>
+                    <a:p>
+                      <a:pPr algn="ctr" indent="0" marL="0">
+                        <a:buNone/>
+                      </a:pPr>
+                      <a:r>
+                        <a:rPr lang="en-US" sz="1000" dirty="0">
+                          <a:solidFill>
+                            <a:srgbClr val="1A2733"/>
+                          </a:solidFill>
+                          <a:latin typeface="Calibri" pitchFamily="34" charset="0"/>
+                          <a:ea typeface="Calibri" pitchFamily="34" charset="-122"/>
+                          <a:cs typeface="Calibri" pitchFamily="34" charset="-120"/>
+                        </a:rPr>
+                        <a:t>3.7</a:t>
+                      </a:r>
+                      <a:endParaRPr lang="en-US" sz="1000" dirty="0">
+                        <a:latin typeface="Calibri" charset="0"/>
+                        <a:ea typeface="Calibri" charset="0"/>
+                        <a:cs typeface="Calibri" charset="0"/>
+                      </a:endParaRPr>
+                    </a:p>
+                  </a:txBody>
+                  <a:tcPr marL="36576" marR="36576" marT="36576" marB="36576" anchor="ctr">
+                    <a:lnL w="6350" cap="flat" cmpd="sng" algn="ctr">
+                      <a:solidFill>
+                        <a:srgbClr val="D5E2EC"/>
+                      </a:solidFill>
+                      <a:prstDash val="solid"/>
+                      <a:round/>
+                      <a:headEnd type="none" w="med" len="med"/>
+                      <a:tailEnd type="none" w="med" len="med"/>
+                    </a:lnL>
+                    <a:lnR w="6350" cap="flat" cmpd="sng" algn="ctr">
+                      <a:solidFill>
+                        <a:srgbClr val="D5E2EC"/>
+                      </a:solidFill>
+                      <a:prstDash val="solid"/>
+                      <a:round/>
+                      <a:headEnd type="none" w="med" len="med"/>
+                      <a:tailEnd type="none" w="med" len="med"/>
+                    </a:lnR>
+                    <a:lnT w="6350" cap="flat" cmpd="sng" algn="ctr">
+                      <a:solidFill>
+                        <a:srgbClr val="D5E2EC"/>
+                      </a:solidFill>
+                      <a:prstDash val="solid"/>
+                      <a:round/>
+                      <a:headEnd type="none" w="med" len="med"/>
+                      <a:tailEnd type="none" w="med" len="med"/>
+                    </a:lnT>
+                    <a:lnB w="6350" cap="flat" cmpd="sng" algn="ctr">
+                      <a:solidFill>
+                        <a:srgbClr val="D5E2EC"/>
+                      </a:solidFill>
+                      <a:prstDash val="solid"/>
+                      <a:round/>
+                      <a:headEnd type="none" w="med" len="med"/>
+                      <a:tailEnd type="none" w="med" len="med"/>
+                    </a:lnB>
+                    <a:solidFill>
+                      <a:srgbClr val="FFFFFF"/>
+                    </a:solidFill>
+                  </a:tcPr>
+                </a:tc>
+              </a:tr>
+              <a:tr h="0">
+                <a:tc>
+                  <a:txBody>
+                    <a:bodyPr/>
+                    <a:lstStyle/>
+                    <a:p>
+                      <a:pPr indent="0" marL="0">
+                        <a:buNone/>
+                      </a:pPr>
+                      <a:r>
+                        <a:rPr lang="en-US" sz="1050" b="1" dirty="0">
+                          <a:solidFill>
+                            <a:srgbClr val="0A2239"/>
+                          </a:solidFill>
+                          <a:latin typeface="Calibri" pitchFamily="34" charset="0"/>
+                          <a:ea typeface="Calibri" pitchFamily="34" charset="-122"/>
+                          <a:cs typeface="Calibri" pitchFamily="34" charset="-120"/>
+                        </a:rPr>
+                        <a:t>Total</a:t>
+                      </a:r>
+                      <a:endParaRPr lang="en-US" sz="1050" dirty="0">
+                        <a:latin typeface="Calibri" charset="0"/>
+                        <a:ea typeface="Calibri" charset="0"/>
+                        <a:cs typeface="Calibri" charset="0"/>
+                      </a:endParaRPr>
+                    </a:p>
+                  </a:txBody>
+                  <a:tcPr marL="36576" marR="36576" marT="36576" marB="36576" anchor="ctr">
+                    <a:lnL w="6350" cap="flat" cmpd="sng" algn="ctr">
+                      <a:solidFill>
+                        <a:srgbClr val="D5E2EC"/>
+                      </a:solidFill>
+                      <a:prstDash val="solid"/>
+                      <a:round/>
+                      <a:headEnd type="none" w="med" len="med"/>
+                      <a:tailEnd type="none" w="med" len="med"/>
+                    </a:lnL>
+                    <a:lnR w="6350" cap="flat" cmpd="sng" algn="ctr">
+                      <a:solidFill>
+                        <a:srgbClr val="D5E2EC"/>
+                      </a:solidFill>
+                      <a:prstDash val="solid"/>
+                      <a:round/>
+                      <a:headEnd type="none" w="med" len="med"/>
+                      <a:tailEnd type="none" w="med" len="med"/>
+                    </a:lnR>
+                    <a:lnT w="6350" cap="flat" cmpd="sng" algn="ctr">
+                      <a:solidFill>
+                        <a:srgbClr val="D5E2EC"/>
+                      </a:solidFill>
+                      <a:prstDash val="solid"/>
+                      <a:round/>
+                      <a:headEnd type="none" w="med" len="med"/>
+                      <a:tailEnd type="none" w="med" len="med"/>
+                    </a:lnT>
+                    <a:lnB w="6350" cap="flat" cmpd="sng" algn="ctr">
+                      <a:solidFill>
+                        <a:srgbClr val="D5E2EC"/>
+                      </a:solidFill>
+                      <a:prstDash val="solid"/>
+                      <a:round/>
+                      <a:headEnd type="none" w="med" len="med"/>
+                      <a:tailEnd type="none" w="med" len="med"/>
+                    </a:lnB>
+                    <a:solidFill>
+                      <a:srgbClr val="F5F0E6"/>
+                    </a:solidFill>
+                  </a:tcPr>
+                </a:tc>
+                <a:tc>
+                  <a:txBody>
+                    <a:bodyPr/>
+                    <a:lstStyle/>
+                    <a:p>
+                      <a:pPr indent="0" marL="0">
+                        <a:buNone/>
+                      </a:pPr>
+                      <a:endParaRPr lang="en-US" sz="1200" dirty="0"/>
+                    </a:p>
+                  </a:txBody>
+                  <a:tcPr marL="36576" marR="36576" marT="36576" marB="36576" anchor="ctr">
+                    <a:lnL w="6350" cap="flat" cmpd="sng" algn="ctr">
+                      <a:solidFill>
+                        <a:srgbClr val="D5E2EC"/>
+                      </a:solidFill>
+                      <a:prstDash val="solid"/>
+                      <a:round/>
+                      <a:headEnd type="none" w="med" len="med"/>
+                      <a:tailEnd type="none" w="med" len="med"/>
+                    </a:lnL>
+                    <a:lnR w="6350" cap="flat" cmpd="sng" algn="ctr">
+                      <a:solidFill>
+                        <a:srgbClr val="D5E2EC"/>
+                      </a:solidFill>
+                      <a:prstDash val="solid"/>
+                      <a:round/>
+                      <a:headEnd type="none" w="med" len="med"/>
+                      <a:tailEnd type="none" w="med" len="med"/>
+                    </a:lnR>
+                    <a:lnT w="6350" cap="flat" cmpd="sng" algn="ctr">
+                      <a:solidFill>
+                        <a:srgbClr val="D5E2EC"/>
+                      </a:solidFill>
+                      <a:prstDash val="solid"/>
+                      <a:round/>
+                      <a:headEnd type="none" w="med" len="med"/>
+                      <a:tailEnd type="none" w="med" len="med"/>
+                    </a:lnT>
+                    <a:lnB w="6350" cap="flat" cmpd="sng" algn="ctr">
+                      <a:solidFill>
+                        <a:srgbClr val="D5E2EC"/>
+                      </a:solidFill>
+                      <a:prstDash val="solid"/>
+                      <a:round/>
+                      <a:headEnd type="none" w="med" len="med"/>
+                      <a:tailEnd type="none" w="med" len="med"/>
+                    </a:lnB>
+                    <a:solidFill>
+                      <a:srgbClr val="F5F0E6"/>
+                    </a:solidFill>
+                  </a:tcPr>
+                </a:tc>
+                <a:tc>
+                  <a:txBody>
+                    <a:bodyPr/>
+                    <a:lstStyle/>
+                    <a:p>
+                      <a:pPr indent="0" marL="0">
+                        <a:buNone/>
+                      </a:pPr>
+                      <a:endParaRPr lang="en-US" sz="1200" dirty="0"/>
+                    </a:p>
+                  </a:txBody>
+                  <a:tcPr marL="36576" marR="36576" marT="36576" marB="36576" anchor="ctr">
+                    <a:lnL w="6350" cap="flat" cmpd="sng" algn="ctr">
+                      <a:solidFill>
+                        <a:srgbClr val="D5E2EC"/>
+                      </a:solidFill>
+                      <a:prstDash val="solid"/>
+                      <a:round/>
+                      <a:headEnd type="none" w="med" len="med"/>
+                      <a:tailEnd type="none" w="med" len="med"/>
+                    </a:lnL>
+                    <a:lnR w="6350" cap="flat" cmpd="sng" algn="ctr">
+                      <a:solidFill>
+                        <a:srgbClr val="D5E2EC"/>
+                      </a:solidFill>
+                      <a:prstDash val="solid"/>
+                      <a:round/>
+                      <a:headEnd type="none" w="med" len="med"/>
+                      <a:tailEnd type="none" w="med" len="med"/>
+                    </a:lnR>
+                    <a:lnT w="6350" cap="flat" cmpd="sng" algn="ctr">
+                      <a:solidFill>
+                        <a:srgbClr val="D5E2EC"/>
+                      </a:solidFill>
+                      <a:prstDash val="solid"/>
+                      <a:round/>
+                      <a:headEnd type="none" w="med" len="med"/>
+                      <a:tailEnd type="none" w="med" len="med"/>
+                    </a:lnT>
+                    <a:lnB w="6350" cap="flat" cmpd="sng" algn="ctr">
+                      <a:solidFill>
+                        <a:srgbClr val="D5E2EC"/>
+                      </a:solidFill>
+                      <a:prstDash val="solid"/>
+                      <a:round/>
+                      <a:headEnd type="none" w="med" len="med"/>
+                      <a:tailEnd type="none" w="med" len="med"/>
+                    </a:lnB>
+                    <a:solidFill>
+                      <a:srgbClr val="F5F0E6"/>
+                    </a:solidFill>
+                  </a:tcPr>
+                </a:tc>
+                <a:tc>
+                  <a:txBody>
+                    <a:bodyPr/>
+                    <a:lstStyle/>
+                    <a:p>
+                      <a:pPr indent="0" marL="0">
+                        <a:buNone/>
+                      </a:pPr>
+                      <a:endParaRPr lang="en-US" sz="1200" dirty="0"/>
+                    </a:p>
+                  </a:txBody>
+                  <a:tcPr marL="36576" marR="36576" marT="36576" marB="36576" anchor="ctr">
+                    <a:lnL w="6350" cap="flat" cmpd="sng" algn="ctr">
+                      <a:solidFill>
+                        <a:srgbClr val="D5E2EC"/>
+                      </a:solidFill>
+                      <a:prstDash val="solid"/>
+                      <a:round/>
+                      <a:headEnd type="none" w="med" len="med"/>
+                      <a:tailEnd type="none" w="med" len="med"/>
+                    </a:lnL>
+                    <a:lnR w="6350" cap="flat" cmpd="sng" algn="ctr">
+                      <a:solidFill>
+                        <a:srgbClr val="D5E2EC"/>
+                      </a:solidFill>
+                      <a:prstDash val="solid"/>
+                      <a:round/>
+                      <a:headEnd type="none" w="med" len="med"/>
+                      <a:tailEnd type="none" w="med" len="med"/>
+                    </a:lnR>
+                    <a:lnT w="6350" cap="flat" cmpd="sng" algn="ctr">
+                      <a:solidFill>
+                        <a:srgbClr val="D5E2EC"/>
+                      </a:solidFill>
+                      <a:prstDash val="solid"/>
+                      <a:round/>
+                      <a:headEnd type="none" w="med" len="med"/>
+                      <a:tailEnd type="none" w="med" len="med"/>
+                    </a:lnT>
+                    <a:lnB w="6350" cap="flat" cmpd="sng" algn="ctr">
+                      <a:solidFill>
+                        <a:srgbClr val="D5E2EC"/>
+                      </a:solidFill>
+                      <a:prstDash val="solid"/>
+                      <a:round/>
+                      <a:headEnd type="none" w="med" len="med"/>
+                      <a:tailEnd type="none" w="med" len="med"/>
+                    </a:lnB>
+                    <a:solidFill>
+                      <a:srgbClr val="F5F0E6"/>
+                    </a:solidFill>
+                  </a:tcPr>
+                </a:tc>
+                <a:tc>
+                  <a:txBody>
+                    <a:bodyPr/>
+                    <a:lstStyle/>
+                    <a:p>
+                      <a:pPr algn="ctr" indent="0" marL="0">
+                        <a:buNone/>
+                      </a:pPr>
+                      <a:r>
+                        <a:rPr lang="en-US" sz="1050" b="1" dirty="0">
+                          <a:solidFill>
+                            <a:srgbClr val="0A2239"/>
+                          </a:solidFill>
+                          <a:latin typeface="Calibri" pitchFamily="34" charset="0"/>
+                          <a:ea typeface="Calibri" pitchFamily="34" charset="-122"/>
+                          <a:cs typeface="Calibri" pitchFamily="34" charset="-120"/>
+                        </a:rPr>
+                        <a:t>199.8</a:t>
+                      </a:r>
+                      <a:endParaRPr lang="en-US" sz="1050" dirty="0">
+                        <a:latin typeface="Calibri" charset="0"/>
+                        <a:ea typeface="Calibri" charset="0"/>
+                        <a:cs typeface="Calibri" charset="0"/>
+                      </a:endParaRPr>
+                    </a:p>
+                  </a:txBody>
+                  <a:tcPr marL="36576" marR="36576" marT="36576" marB="36576" anchor="ctr">
+                    <a:lnL w="6350" cap="flat" cmpd="sng" algn="ctr">
+                      <a:solidFill>
+                        <a:srgbClr val="D5E2EC"/>
+                      </a:solidFill>
+                      <a:prstDash val="solid"/>
+                      <a:round/>
+                      <a:headEnd type="none" w="med" len="med"/>
+                      <a:tailEnd type="none" w="med" len="med"/>
+                    </a:lnL>
+                    <a:lnR w="6350" cap="flat" cmpd="sng" algn="ctr">
+                      <a:solidFill>
+                        <a:srgbClr val="D5E2EC"/>
+                      </a:solidFill>
+                      <a:prstDash val="solid"/>
+                      <a:round/>
+                      <a:headEnd type="none" w="med" len="med"/>
+                      <a:tailEnd type="none" w="med" len="med"/>
+                    </a:lnR>
+                    <a:lnT w="6350" cap="flat" cmpd="sng" algn="ctr">
+                      <a:solidFill>
+                        <a:srgbClr val="D5E2EC"/>
+                      </a:solidFill>
+                      <a:prstDash val="solid"/>
+                      <a:round/>
+                      <a:headEnd type="none" w="med" len="med"/>
+                      <a:tailEnd type="none" w="med" len="med"/>
+                    </a:lnT>
+                    <a:lnB w="6350" cap="flat" cmpd="sng" algn="ctr">
+                      <a:solidFill>
+                        <a:srgbClr val="D5E2EC"/>
+                      </a:solidFill>
+                      <a:prstDash val="solid"/>
+                      <a:round/>
+                      <a:headEnd type="none" w="med" len="med"/>
+                      <a:tailEnd type="none" w="med" len="med"/>
+                    </a:lnB>
+                    <a:solidFill>
+                      <a:srgbClr val="F5F0E6"/>
+                    </a:solidFill>
+                  </a:tcPr>
+                </a:tc>
+                <a:tc>
+                  <a:txBody>
+                    <a:bodyPr/>
+                    <a:lstStyle/>
+                    <a:p>
+                      <a:pPr algn="ctr" indent="0" marL="0">
+                        <a:buNone/>
+                      </a:pPr>
+                      <a:r>
+                        <a:rPr lang="en-US" sz="1050" b="1" dirty="0">
+                          <a:solidFill>
+                            <a:srgbClr val="0A2239"/>
+                          </a:solidFill>
+                          <a:latin typeface="Calibri" pitchFamily="34" charset="0"/>
+                          <a:ea typeface="Calibri" pitchFamily="34" charset="-122"/>
+                          <a:cs typeface="Calibri" pitchFamily="34" charset="-120"/>
+                        </a:rPr>
+                        <a:t>15.2</a:t>
+                      </a:r>
+                      <a:endParaRPr lang="en-US" sz="1050" dirty="0">
+                        <a:latin typeface="Calibri" charset="0"/>
+                        <a:ea typeface="Calibri" charset="0"/>
+                        <a:cs typeface="Calibri" charset="0"/>
+                      </a:endParaRPr>
+                    </a:p>
+                  </a:txBody>
+                  <a:tcPr marL="36576" marR="36576" marT="36576" marB="36576" anchor="ctr">
+                    <a:lnL w="6350" cap="flat" cmpd="sng" algn="ctr">
+                      <a:solidFill>
+                        <a:srgbClr val="D5E2EC"/>
+                      </a:solidFill>
+                      <a:prstDash val="solid"/>
+                      <a:round/>
+                      <a:headEnd type="none" w="med" len="med"/>
+                      <a:tailEnd type="none" w="med" len="med"/>
+                    </a:lnL>
+                    <a:lnR w="6350" cap="flat" cmpd="sng" algn="ctr">
+                      <a:solidFill>
+                        <a:srgbClr val="D5E2EC"/>
+                      </a:solidFill>
+                      <a:prstDash val="solid"/>
+                      <a:round/>
+                      <a:headEnd type="none" w="med" len="med"/>
+                      <a:tailEnd type="none" w="med" len="med"/>
+                    </a:lnR>
+                    <a:lnT w="6350" cap="flat" cmpd="sng" algn="ctr">
+                      <a:solidFill>
+                        <a:srgbClr val="D5E2EC"/>
+                      </a:solidFill>
+                      <a:prstDash val="solid"/>
+                      <a:round/>
+                      <a:headEnd type="none" w="med" len="med"/>
+                      <a:tailEnd type="none" w="med" len="med"/>
+                    </a:lnT>
+                    <a:lnB w="6350" cap="flat" cmpd="sng" algn="ctr">
+                      <a:solidFill>
+                        <a:srgbClr val="D5E2EC"/>
+                      </a:solidFill>
+                      <a:prstDash val="solid"/>
+                      <a:round/>
+                      <a:headEnd type="none" w="med" len="med"/>
+                      <a:tailEnd type="none" w="med" len="med"/>
+                    </a:lnB>
+                    <a:solidFill>
+                      <a:srgbClr val="F5F0E6"/>
+                    </a:solidFill>
+                  </a:tcPr>
+                </a:tc>
+              </a:tr>
+            </a:tbl>
+          </a:graphicData>
+        </a:graphic>
+      </p:graphicFrame>
+      <p:sp>
+        <p:nvSpPr>
+          <p:cNvPr id="5" name="Text 2"/>
+          <p:cNvSpPr/>
+          <p:nvPr/>
+        </p:nvSpPr>
+        <p:spPr>
+          <a:xfrm>
+            <a:off x="9006840" y="1417320"/>
+            <a:ext cx="2651760" cy="5120640"/>
           </a:xfrm>
           <a:prstGeom prst="rect">
             <a:avLst/>
@@ -3024,10 +7963,13 @@
           <a:ln/>
         </p:spPr>
         <p:txBody>
-          <a:bodyPr wrap="square" lIns="0" tIns="0" rIns="0" bIns="0" rtlCol="0" anchor="ctr"/>
+          <a:bodyPr wrap="square" lIns="0" tIns="0" rIns="0" bIns="0" rtlCol="0" anchor="t"/>
           <a:lstStyle/>
           <a:p>
             <a:pPr indent="0" marL="0">
+              <a:spcAft>
+                <a:spcPts val="400"/>
+              </a:spcAft>
               <a:buNone/>
             </a:pPr>
             <a:r>
@@ -3039,34 +7981,15 @@
                 <a:ea typeface="Calibri" pitchFamily="34" charset="-122"/>
                 <a:cs typeface="Calibri" pitchFamily="34" charset="-120"/>
               </a:rPr>
-              <a:t>One value, two masters</a:t>
-            </a:r>
-            <a:endParaRPr lang="en-US" sz="1300" dirty="0"/>
-          </a:p>
-        </p:txBody>
-      </p:sp>
-      <p:sp>
-        <p:nvSpPr>
-          <p:cNvPr id="8" name="Text 5"/>
-          <p:cNvSpPr/>
-          <p:nvPr/>
-        </p:nvSpPr>
-        <p:spPr>
-          <a:xfrm>
-            <a:off x="749808" y="2331720"/>
-            <a:ext cx="3200400" cy="1234440"/>
-          </a:xfrm>
-          <a:prstGeom prst="rect">
-            <a:avLst/>
-          </a:prstGeom>
-          <a:noFill/>
-          <a:ln/>
-        </p:spPr>
-        <p:txBody>
-          <a:bodyPr wrap="square" lIns="0" tIns="0" rIns="0" bIns="0" rtlCol="0" anchor="t"/>
-          <a:lstStyle/>
+              <a:t>Three-point (PERT) estimate, per the series' method</a:t>
+            </a:r>
+            <a:endParaRPr lang="en-US" sz="1050" dirty="0"/>
+          </a:p>
           <a:p>
             <a:pPr indent="0" marL="0">
+              <a:spcAft>
+                <a:spcPts val="1000"/>
+              </a:spcAft>
               <a:buNone/>
             </a:pPr>
             <a:r>
@@ -3078,105 +8001,15 @@
                 <a:ea typeface="Calibri" pitchFamily="34" charset="-122"/>
                 <a:cs typeface="Calibri" pitchFamily="34" charset="-120"/>
               </a:rPr>
-              <a:t>A field serving display and logic, or persistent and transient state — nearly every bug in the polish pass reduced to this.</a:t>
+              <a:t>tₑ = (a + 4m + b)/6, σ = (b − a)/6; components independent, total σ by root-sum-square. ≈200 h, 90% interval ≈175–225 h — about five working weeks for a competent professional.</a:t>
             </a:r>
             <a:endParaRPr lang="en-US" sz="1050" dirty="0"/>
           </a:p>
-        </p:txBody>
-      </p:sp>
-      <p:sp>
-        <p:nvSpPr>
-          <p:cNvPr id="9" name="Shape 6"/>
-          <p:cNvSpPr/>
-          <p:nvPr/>
-        </p:nvSpPr>
-        <p:spPr>
-          <a:xfrm>
-            <a:off x="4389120" y="1463040"/>
-            <a:ext cx="3611880" cy="2194560"/>
-          </a:xfrm>
-          <a:prstGeom prst="roundRect">
-            <a:avLst>
-              <a:gd name="adj" fmla="val 3333"/>
-            </a:avLst>
-          </a:prstGeom>
-          <a:solidFill>
-            <a:srgbClr val="EAF2F8"/>
-          </a:solidFill>
-          <a:ln w="9525">
-            <a:solidFill>
-              <a:srgbClr val="D5E2EC"/>
-            </a:solidFill>
-            <a:prstDash val="solid"/>
-          </a:ln>
-        </p:spPr>
-      </p:sp>
-      <p:sp>
-        <p:nvSpPr>
-          <p:cNvPr id="10" name="Shape 7"/>
-          <p:cNvSpPr/>
-          <p:nvPr/>
-        </p:nvSpPr>
-        <p:spPr>
-          <a:xfrm>
-            <a:off x="4572000" y="1645920"/>
-            <a:ext cx="438912" cy="438912"/>
-          </a:xfrm>
-          <a:prstGeom prst="ellipse">
-            <a:avLst/>
-          </a:prstGeom>
-          <a:solidFill>
-            <a:srgbClr val="065A82"/>
-          </a:solidFill>
-          <a:ln/>
-        </p:spPr>
-      </p:sp>
-      <p:pic>
-        <p:nvPicPr>
-          <p:cNvPr id="11" name="Image 1" descr="preencoded.png">    </p:cNvPr>
-          <p:cNvPicPr>
-            <a:picLocks noChangeAspect="1"/>
-          </p:cNvPicPr>
-          <p:nvPr/>
-        </p:nvPicPr>
-        <p:blipFill>
-          <a:blip r:embed="rId2"/>
-          <a:stretch>
-            <a:fillRect/>
-          </a:stretch>
-        </p:blipFill>
-        <p:spPr>
-          <a:xfrm>
-            <a:off x="4686117" y="1760037"/>
-            <a:ext cx="210678" cy="210678"/>
-          </a:xfrm>
-          <a:prstGeom prst="rect">
-            <a:avLst/>
-          </a:prstGeom>
-        </p:spPr>
-      </p:pic>
-      <p:sp>
-        <p:nvSpPr>
-          <p:cNvPr id="12" name="Text 8"/>
-          <p:cNvSpPr/>
-          <p:nvPr/>
-        </p:nvSpPr>
-        <p:spPr>
-          <a:xfrm>
-            <a:off x="5138928" y="1664208"/>
-            <a:ext cx="2743200" cy="594360"/>
-          </a:xfrm>
-          <a:prstGeom prst="rect">
-            <a:avLst/>
-          </a:prstGeom>
-          <a:noFill/>
-          <a:ln/>
-        </p:spPr>
-        <p:txBody>
-          <a:bodyPr wrap="square" lIns="0" tIns="0" rIns="0" bIns="0" rtlCol="0" anchor="ctr"/>
-          <a:lstStyle/>
           <a:p>
             <a:pPr indent="0" marL="0">
+              <a:spcAft>
+                <a:spcPts val="400"/>
+              </a:spcAft>
               <a:buNone/>
             </a:pPr>
             <a:r>
@@ -3188,34 +8021,15 @@
                 <a:ea typeface="Calibri" pitchFamily="34" charset="-122"/>
                 <a:cs typeface="Calibri" pitchFamily="34" charset="-120"/>
               </a:rPr>
-              <a:t>Remember vs derive</a:t>
-            </a:r>
-            <a:endParaRPr lang="en-US" sz="1300" dirty="0"/>
-          </a:p>
-        </p:txBody>
-      </p:sp>
-      <p:sp>
-        <p:nvSpPr>
-          <p:cNvPr id="13" name="Text 9"/>
-          <p:cNvSpPr/>
-          <p:nvPr/>
-        </p:nvSpPr>
-        <p:spPr>
-          <a:xfrm>
-            <a:off x="4590288" y="2331720"/>
-            <a:ext cx="3200400" cy="1234440"/>
-          </a:xfrm>
-          <a:prstGeom prst="rect">
-            <a:avLst/>
-          </a:prstGeom>
-          <a:noFill/>
-          <a:ln/>
-        </p:spPr>
-        <p:txBody>
-          <a:bodyPr wrap="square" lIns="0" tIns="0" rIns="0" bIns="0" rtlCol="0" anchor="t"/>
-          <a:lstStyle/>
+              <a:t>The AI-coupled side, measured</a:t>
+            </a:r>
+            <a:endParaRPr lang="en-US" sz="1050" dirty="0"/>
+          </a:p>
           <a:p>
             <a:pPr indent="0" marL="0">
+              <a:spcAft>
+                <a:spcPts val="1000"/>
+              </a:spcAft>
               <a:buNone/>
             </a:pPr>
             <a:r>
@@ -3227,148 +8041,36 @@
                 <a:ea typeface="Calibri" pitchFamily="34" charset="-122"/>
                 <a:cs typeface="Calibri" pitchFamily="34" charset="-120"/>
               </a:rPr>
-              <a:t>A snapshot drifts from the thing it describes; a value re-derived from the source of truth cannot. Deriving forced out two bugs a snapshot would have hidden.</a:t>
+              <a:t>109 commits, 2026-07-22 → 08-05, clustered into 27 work bursts (≤60 min gaps): ≈22.5 h in-burst, ≈29 h with per-burst overhead. Reported as ≈30 h, rounded up.</a:t>
             </a:r>
             <a:endParaRPr lang="en-US" sz="1050" dirty="0"/>
           </a:p>
-        </p:txBody>
-      </p:sp>
-      <p:sp>
-        <p:nvSpPr>
-          <p:cNvPr id="14" name="Shape 10"/>
-          <p:cNvSpPr/>
-          <p:nvPr/>
-        </p:nvSpPr>
-        <p:spPr>
-          <a:xfrm>
-            <a:off x="8229600" y="1463040"/>
-            <a:ext cx="3611880" cy="2194560"/>
-          </a:xfrm>
-          <a:prstGeom prst="roundRect">
-            <a:avLst>
-              <a:gd name="adj" fmla="val 3333"/>
-            </a:avLst>
-          </a:prstGeom>
-          <a:solidFill>
-            <a:srgbClr val="FFFFFF"/>
-          </a:solidFill>
-          <a:ln w="9525">
-            <a:solidFill>
-              <a:srgbClr val="D5E2EC"/>
-            </a:solidFill>
-            <a:prstDash val="solid"/>
-          </a:ln>
-        </p:spPr>
-      </p:sp>
-      <p:sp>
-        <p:nvSpPr>
-          <p:cNvPr id="15" name="Shape 11"/>
-          <p:cNvSpPr/>
-          <p:nvPr/>
-        </p:nvSpPr>
-        <p:spPr>
-          <a:xfrm>
-            <a:off x="8412480" y="1645920"/>
-            <a:ext cx="438912" cy="438912"/>
-          </a:xfrm>
-          <a:prstGeom prst="ellipse">
-            <a:avLst/>
-          </a:prstGeom>
-          <a:solidFill>
-            <a:srgbClr val="065A82"/>
-          </a:solidFill>
-          <a:ln/>
-        </p:spPr>
-      </p:sp>
-      <p:pic>
-        <p:nvPicPr>
-          <p:cNvPr id="16" name="Image 2" descr="preencoded.png">    </p:cNvPr>
-          <p:cNvPicPr>
-            <a:picLocks noChangeAspect="1"/>
-          </p:cNvPicPr>
-          <p:nvPr/>
-        </p:nvPicPr>
-        <p:blipFill>
-          <a:blip r:embed="rId3"/>
-          <a:stretch>
-            <a:fillRect/>
-          </a:stretch>
-        </p:blipFill>
-        <p:spPr>
-          <a:xfrm>
-            <a:off x="8526597" y="1760037"/>
-            <a:ext cx="210678" cy="210678"/>
-          </a:xfrm>
-          <a:prstGeom prst="rect">
-            <a:avLst/>
-          </a:prstGeom>
-        </p:spPr>
-      </p:pic>
-      <p:sp>
-        <p:nvSpPr>
-          <p:cNvPr id="17" name="Text 12"/>
-          <p:cNvSpPr/>
-          <p:nvPr/>
-        </p:nvSpPr>
-        <p:spPr>
-          <a:xfrm>
-            <a:off x="8979408" y="1664208"/>
-            <a:ext cx="2743200" cy="594360"/>
-          </a:xfrm>
-          <a:prstGeom prst="rect">
-            <a:avLst/>
-          </a:prstGeom>
-          <a:noFill/>
-          <a:ln/>
-        </p:spPr>
-        <p:txBody>
-          <a:bodyPr wrap="square" lIns="0" tIns="0" rIns="0" bIns="0" rtlCol="0" anchor="ctr"/>
-          <a:lstStyle/>
           <a:p>
             <a:pPr indent="0" marL="0">
+              <a:spcAft>
+                <a:spcPts val="400"/>
+              </a:spcAft>
               <a:buNone/>
             </a:pPr>
             <a:r>
               <a:rPr lang="en-US" sz="1300" b="1" dirty="0">
                 <a:solidFill>
-                  <a:srgbClr val="0A2239"/>
+                  <a:srgbClr val="7A5A18"/>
                 </a:solidFill>
                 <a:latin typeface="Calibri" pitchFamily="34" charset="0"/>
                 <a:ea typeface="Calibri" pitchFamily="34" charset="-122"/>
                 <a:cs typeface="Calibri" pitchFamily="34" charset="-120"/>
               </a:rPr>
-              <a:t>The masked branch</a:t>
-            </a:r>
-            <a:endParaRPr lang="en-US" sz="1300" dirty="0"/>
-          </a:p>
-        </p:txBody>
-      </p:sp>
-      <p:sp>
-        <p:nvSpPr>
-          <p:cNvPr id="18" name="Text 13"/>
-          <p:cNvSpPr/>
-          <p:nvPr/>
-        </p:nvSpPr>
-        <p:spPr>
-          <a:xfrm>
-            <a:off x="8430768" y="2331720"/>
-            <a:ext cx="3200400" cy="1234440"/>
-          </a:xfrm>
-          <a:prstGeom prst="rect">
-            <a:avLst/>
-          </a:prstGeom>
-          <a:noFill/>
-          <a:ln/>
-        </p:spPr>
-        <p:txBody>
-          <a:bodyPr wrap="square" lIns="0" tIns="0" rIns="0" bIns="0" rtlCol="0" anchor="t"/>
-          <a:lstStyle/>
+              <a:t>A bias the series had not yet had</a:t>
+            </a:r>
+            <a:endParaRPr lang="en-US" sz="1050" dirty="0"/>
+          </a:p>
           <a:p>
             <a:pPr indent="0" marL="0">
               <a:buNone/>
             </a:pPr>
             <a:r>
-              <a:rPr lang="en-US" sz="1050" dirty="0">
+              <a:rPr lang="en-US" sz="1050" i="1" dirty="0">
                 <a:solidFill>
                   <a:srgbClr val="1A2733"/>
                 </a:solidFill>
@@ -3376,454 +8078,7 @@
                 <a:ea typeface="Calibri" pitchFamily="34" charset="-122"/>
                 <a:cs typeface="Calibri" pitchFamily="34" charset="-120"/>
               </a:rPr>
-              <a:t>Every harness passed --no-log, so the logging branch went untested no matter how many suites ran past it. A masked branch is an untested branch.</a:t>
-            </a:r>
-            <a:endParaRPr lang="en-US" sz="1050" dirty="0"/>
-          </a:p>
-        </p:txBody>
-      </p:sp>
-      <p:sp>
-        <p:nvSpPr>
-          <p:cNvPr id="19" name="Shape 14"/>
-          <p:cNvSpPr/>
-          <p:nvPr/>
-        </p:nvSpPr>
-        <p:spPr>
-          <a:xfrm>
-            <a:off x="548640" y="3840480"/>
-            <a:ext cx="3611880" cy="2194560"/>
-          </a:xfrm>
-          <a:prstGeom prst="roundRect">
-            <a:avLst>
-              <a:gd name="adj" fmla="val 3333"/>
-            </a:avLst>
-          </a:prstGeom>
-          <a:solidFill>
-            <a:srgbClr val="EAF2F8"/>
-          </a:solidFill>
-          <a:ln w="9525">
-            <a:solidFill>
-              <a:srgbClr val="D5E2EC"/>
-            </a:solidFill>
-            <a:prstDash val="solid"/>
-          </a:ln>
-        </p:spPr>
-      </p:sp>
-      <p:sp>
-        <p:nvSpPr>
-          <p:cNvPr id="20" name="Shape 15"/>
-          <p:cNvSpPr/>
-          <p:nvPr/>
-        </p:nvSpPr>
-        <p:spPr>
-          <a:xfrm>
-            <a:off x="731520" y="4023360"/>
-            <a:ext cx="438912" cy="438912"/>
-          </a:xfrm>
-          <a:prstGeom prst="ellipse">
-            <a:avLst/>
-          </a:prstGeom>
-          <a:solidFill>
-            <a:srgbClr val="065A82"/>
-          </a:solidFill>
-          <a:ln/>
-        </p:spPr>
-      </p:sp>
-      <p:pic>
-        <p:nvPicPr>
-          <p:cNvPr id="21" name="Image 3" descr="preencoded.png">    </p:cNvPr>
-          <p:cNvPicPr>
-            <a:picLocks noChangeAspect="1"/>
-          </p:cNvPicPr>
-          <p:nvPr/>
-        </p:nvPicPr>
-        <p:blipFill>
-          <a:blip r:embed="rId4"/>
-          <a:stretch>
-            <a:fillRect/>
-          </a:stretch>
-        </p:blipFill>
-        <p:spPr>
-          <a:xfrm>
-            <a:off x="845637" y="4137477"/>
-            <a:ext cx="210678" cy="210678"/>
-          </a:xfrm>
-          <a:prstGeom prst="rect">
-            <a:avLst/>
-          </a:prstGeom>
-        </p:spPr>
-      </p:pic>
-      <p:sp>
-        <p:nvSpPr>
-          <p:cNvPr id="22" name="Text 16"/>
-          <p:cNvSpPr/>
-          <p:nvPr/>
-        </p:nvSpPr>
-        <p:spPr>
-          <a:xfrm>
-            <a:off x="1298448" y="4041648"/>
-            <a:ext cx="2743200" cy="594360"/>
-          </a:xfrm>
-          <a:prstGeom prst="rect">
-            <a:avLst/>
-          </a:prstGeom>
-          <a:noFill/>
-          <a:ln/>
-        </p:spPr>
-        <p:txBody>
-          <a:bodyPr wrap="square" lIns="0" tIns="0" rIns="0" bIns="0" rtlCol="0" anchor="ctr"/>
-          <a:lstStyle/>
-          <a:p>
-            <a:pPr indent="0" marL="0">
-              <a:buNone/>
-            </a:pPr>
-            <a:r>
-              <a:rPr lang="en-US" sz="1300" b="1" dirty="0">
-                <a:solidFill>
-                  <a:srgbClr val="0A2239"/>
-                </a:solidFill>
-                <a:latin typeface="Calibri" pitchFamily="34" charset="0"/>
-                <a:ea typeface="Calibri" pitchFamily="34" charset="-122"/>
-                <a:cs typeface="Calibri" pitchFamily="34" charset="-120"/>
-              </a:rPr>
-              <a:t>A check that can't tell bug from fix</a:t>
-            </a:r>
-            <a:endParaRPr lang="en-US" sz="1300" dirty="0"/>
-          </a:p>
-        </p:txBody>
-      </p:sp>
-      <p:sp>
-        <p:nvSpPr>
-          <p:cNvPr id="23" name="Text 17"/>
-          <p:cNvSpPr/>
-          <p:nvPr/>
-        </p:nvSpPr>
-        <p:spPr>
-          <a:xfrm>
-            <a:off x="749808" y="4709160"/>
-            <a:ext cx="3200400" cy="1234440"/>
-          </a:xfrm>
-          <a:prstGeom prst="rect">
-            <a:avLst/>
-          </a:prstGeom>
-          <a:noFill/>
-          <a:ln/>
-        </p:spPr>
-        <p:txBody>
-          <a:bodyPr wrap="square" lIns="0" tIns="0" rIns="0" bIns="0" rtlCol="0" anchor="t"/>
-          <a:lstStyle/>
-          <a:p>
-            <a:pPr indent="0" marL="0">
-              <a:buNone/>
-            </a:pPr>
-            <a:r>
-              <a:rPr lang="en-US" sz="1050" dirty="0">
-                <a:solidFill>
-                  <a:srgbClr val="1A2733"/>
-                </a:solidFill>
-                <a:latin typeface="Calibri" pitchFamily="34" charset="0"/>
-                <a:ea typeface="Calibri" pitchFamily="34" charset="-122"/>
-                <a:cs typeface="Calibri" pitchFamily="34" charset="-120"/>
-              </a:rPr>
-              <a:t>A filter test with nothing to filter; a hash compared to itself; asserting a field's name instead of its value. Hit three times in one session.</a:t>
-            </a:r>
-            <a:endParaRPr lang="en-US" sz="1050" dirty="0"/>
-          </a:p>
-        </p:txBody>
-      </p:sp>
-      <p:sp>
-        <p:nvSpPr>
-          <p:cNvPr id="24" name="Shape 18"/>
-          <p:cNvSpPr/>
-          <p:nvPr/>
-        </p:nvSpPr>
-        <p:spPr>
-          <a:xfrm>
-            <a:off x="4389120" y="3840480"/>
-            <a:ext cx="3611880" cy="2194560"/>
-          </a:xfrm>
-          <a:prstGeom prst="roundRect">
-            <a:avLst>
-              <a:gd name="adj" fmla="val 3333"/>
-            </a:avLst>
-          </a:prstGeom>
-          <a:solidFill>
-            <a:srgbClr val="FFFFFF"/>
-          </a:solidFill>
-          <a:ln w="9525">
-            <a:solidFill>
-              <a:srgbClr val="D5E2EC"/>
-            </a:solidFill>
-            <a:prstDash val="solid"/>
-          </a:ln>
-        </p:spPr>
-      </p:sp>
-      <p:sp>
-        <p:nvSpPr>
-          <p:cNvPr id="25" name="Shape 19"/>
-          <p:cNvSpPr/>
-          <p:nvPr/>
-        </p:nvSpPr>
-        <p:spPr>
-          <a:xfrm>
-            <a:off x="4572000" y="4023360"/>
-            <a:ext cx="438912" cy="438912"/>
-          </a:xfrm>
-          <a:prstGeom prst="ellipse">
-            <a:avLst/>
-          </a:prstGeom>
-          <a:solidFill>
-            <a:srgbClr val="065A82"/>
-          </a:solidFill>
-          <a:ln/>
-        </p:spPr>
-      </p:sp>
-      <p:pic>
-        <p:nvPicPr>
-          <p:cNvPr id="26" name="Image 4" descr="preencoded.png">    </p:cNvPr>
-          <p:cNvPicPr>
-            <a:picLocks noChangeAspect="1"/>
-          </p:cNvPicPr>
-          <p:nvPr/>
-        </p:nvPicPr>
-        <p:blipFill>
-          <a:blip r:embed="rId5"/>
-          <a:stretch>
-            <a:fillRect/>
-          </a:stretch>
-        </p:blipFill>
-        <p:spPr>
-          <a:xfrm>
-            <a:off x="4686117" y="4137477"/>
-            <a:ext cx="210678" cy="210678"/>
-          </a:xfrm>
-          <a:prstGeom prst="rect">
-            <a:avLst/>
-          </a:prstGeom>
-        </p:spPr>
-      </p:pic>
-      <p:sp>
-        <p:nvSpPr>
-          <p:cNvPr id="27" name="Text 20"/>
-          <p:cNvSpPr/>
-          <p:nvPr/>
-        </p:nvSpPr>
-        <p:spPr>
-          <a:xfrm>
-            <a:off x="5138928" y="4041648"/>
-            <a:ext cx="2743200" cy="594360"/>
-          </a:xfrm>
-          <a:prstGeom prst="rect">
-            <a:avLst/>
-          </a:prstGeom>
-          <a:noFill/>
-          <a:ln/>
-        </p:spPr>
-        <p:txBody>
-          <a:bodyPr wrap="square" lIns="0" tIns="0" rIns="0" bIns="0" rtlCol="0" anchor="ctr"/>
-          <a:lstStyle/>
-          <a:p>
-            <a:pPr indent="0" marL="0">
-              <a:buNone/>
-            </a:pPr>
-            <a:r>
-              <a:rPr lang="en-US" sz="1300" b="1" dirty="0">
-                <a:solidFill>
-                  <a:srgbClr val="0A2239"/>
-                </a:solidFill>
-                <a:latin typeface="Calibri" pitchFamily="34" charset="0"/>
-                <a:ea typeface="Calibri" pitchFamily="34" charset="-122"/>
-                <a:cs typeface="Calibri" pitchFamily="34" charset="-120"/>
-              </a:rPr>
-              <a:t>Accurate card, wrong about the boat</a:t>
-            </a:r>
-            <a:endParaRPr lang="en-US" sz="1300" dirty="0"/>
-          </a:p>
-        </p:txBody>
-      </p:sp>
-      <p:sp>
-        <p:nvSpPr>
-          <p:cNvPr id="28" name="Text 21"/>
-          <p:cNvSpPr/>
-          <p:nvPr/>
-        </p:nvSpPr>
-        <p:spPr>
-          <a:xfrm>
-            <a:off x="4590288" y="4709160"/>
-            <a:ext cx="3200400" cy="1234440"/>
-          </a:xfrm>
-          <a:prstGeom prst="rect">
-            <a:avLst/>
-          </a:prstGeom>
-          <a:noFill/>
-          <a:ln/>
-        </p:spPr>
-        <p:txBody>
-          <a:bodyPr wrap="square" lIns="0" tIns="0" rIns="0" bIns="0" rtlCol="0" anchor="t"/>
-          <a:lstStyle/>
-          <a:p>
-            <a:pPr indent="0" marL="0">
-              <a:buNone/>
-            </a:pPr>
-            <a:r>
-              <a:rPr lang="en-US" sz="1050" dirty="0">
-                <a:solidFill>
-                  <a:srgbClr val="1A2733"/>
-                </a:solidFill>
-                <a:latin typeface="Calibri" pitchFamily="34" charset="0"/>
-                <a:ea typeface="Calibri" pitchFamily="34" charset="-122"/>
-                <a:cs typeface="Calibri" pitchFamily="34" charset="-120"/>
-              </a:rPr>
-              <a:t>A readout can be correct about its own field and still not answer the question the operator reads it for.</a:t>
-            </a:r>
-            <a:endParaRPr lang="en-US" sz="1050" dirty="0"/>
-          </a:p>
-        </p:txBody>
-      </p:sp>
-      <p:sp>
-        <p:nvSpPr>
-          <p:cNvPr id="29" name="Shape 22"/>
-          <p:cNvSpPr/>
-          <p:nvPr/>
-        </p:nvSpPr>
-        <p:spPr>
-          <a:xfrm>
-            <a:off x="8229600" y="3840480"/>
-            <a:ext cx="3611880" cy="2194560"/>
-          </a:xfrm>
-          <a:prstGeom prst="roundRect">
-            <a:avLst>
-              <a:gd name="adj" fmla="val 3333"/>
-            </a:avLst>
-          </a:prstGeom>
-          <a:solidFill>
-            <a:srgbClr val="EAF2F8"/>
-          </a:solidFill>
-          <a:ln w="9525">
-            <a:solidFill>
-              <a:srgbClr val="D5E2EC"/>
-            </a:solidFill>
-            <a:prstDash val="solid"/>
-          </a:ln>
-        </p:spPr>
-      </p:sp>
-      <p:sp>
-        <p:nvSpPr>
-          <p:cNvPr id="30" name="Shape 23"/>
-          <p:cNvSpPr/>
-          <p:nvPr/>
-        </p:nvSpPr>
-        <p:spPr>
-          <a:xfrm>
-            <a:off x="8412480" y="4023360"/>
-            <a:ext cx="438912" cy="438912"/>
-          </a:xfrm>
-          <a:prstGeom prst="ellipse">
-            <a:avLst/>
-          </a:prstGeom>
-          <a:solidFill>
-            <a:srgbClr val="065A82"/>
-          </a:solidFill>
-          <a:ln/>
-        </p:spPr>
-      </p:sp>
-      <p:pic>
-        <p:nvPicPr>
-          <p:cNvPr id="31" name="Image 5" descr="preencoded.png">    </p:cNvPr>
-          <p:cNvPicPr>
-            <a:picLocks noChangeAspect="1"/>
-          </p:cNvPicPr>
-          <p:nvPr/>
-        </p:nvPicPr>
-        <p:blipFill>
-          <a:blip r:embed="rId6"/>
-          <a:stretch>
-            <a:fillRect/>
-          </a:stretch>
-        </p:blipFill>
-        <p:spPr>
-          <a:xfrm>
-            <a:off x="8526597" y="4137477"/>
-            <a:ext cx="210678" cy="210678"/>
-          </a:xfrm>
-          <a:prstGeom prst="rect">
-            <a:avLst/>
-          </a:prstGeom>
-        </p:spPr>
-      </p:pic>
-      <p:sp>
-        <p:nvSpPr>
-          <p:cNvPr id="32" name="Text 24"/>
-          <p:cNvSpPr/>
-          <p:nvPr/>
-        </p:nvSpPr>
-        <p:spPr>
-          <a:xfrm>
-            <a:off x="8979408" y="4041648"/>
-            <a:ext cx="2743200" cy="594360"/>
-          </a:xfrm>
-          <a:prstGeom prst="rect">
-            <a:avLst/>
-          </a:prstGeom>
-          <a:noFill/>
-          <a:ln/>
-        </p:spPr>
-        <p:txBody>
-          <a:bodyPr wrap="square" lIns="0" tIns="0" rIns="0" bIns="0" rtlCol="0" anchor="ctr"/>
-          <a:lstStyle/>
-          <a:p>
-            <a:pPr indent="0" marL="0">
-              <a:buNone/>
-            </a:pPr>
-            <a:r>
-              <a:rPr lang="en-US" sz="1300" b="1" dirty="0">
-                <a:solidFill>
-                  <a:srgbClr val="0A2239"/>
-                </a:solidFill>
-                <a:latin typeface="Calibri" pitchFamily="34" charset="0"/>
-                <a:ea typeface="Calibri" pitchFamily="34" charset="-122"/>
-                <a:cs typeface="Calibri" pitchFamily="34" charset="-120"/>
-              </a:rPr>
-              <a:t>Build-time vs in-use verification</a:t>
-            </a:r>
-            <a:endParaRPr lang="en-US" sz="1300" dirty="0"/>
-          </a:p>
-        </p:txBody>
-      </p:sp>
-      <p:sp>
-        <p:nvSpPr>
-          <p:cNvPr id="33" name="Text 25"/>
-          <p:cNvSpPr/>
-          <p:nvPr/>
-        </p:nvSpPr>
-        <p:spPr>
-          <a:xfrm>
-            <a:off x="8430768" y="4709160"/>
-            <a:ext cx="3200400" cy="1234440"/>
-          </a:xfrm>
-          <a:prstGeom prst="rect">
-            <a:avLst/>
-          </a:prstGeom>
-          <a:noFill/>
-          <a:ln/>
-        </p:spPr>
-        <p:txBody>
-          <a:bodyPr wrap="square" lIns="0" tIns="0" rIns="0" bIns="0" rtlCol="0" anchor="t"/>
-          <a:lstStyle/>
-          <a:p>
-            <a:pPr indent="0" marL="0">
-              <a:buNone/>
-            </a:pPr>
-            <a:r>
-              <a:rPr lang="en-US" sz="1050" dirty="0">
-                <a:solidFill>
-                  <a:srgbClr val="1A2733"/>
-                </a:solidFill>
-                <a:latin typeface="Calibri" pitchFamily="34" charset="0"/>
-                <a:ea typeface="Calibri" pitchFamily="34" charset="-122"/>
-                <a:cs typeface="Calibri" pitchFamily="34" charset="-120"/>
-              </a:rPr>
-              <a:t>The Q-Hub lesson, confirmed here: passing the builder's tests does not discharge the operator's — real use finds the gap the test plan's author could not.</a:t>
+              <a:t>This estimate was produced by the development agent grading its own work — read it with the same suspicion the papers apply to their single shared estimator.</a:t>
             </a:r>
             <a:endParaRPr lang="en-US" sz="1050" dirty="0"/>
           </a:p>
@@ -3894,7 +8149,7 @@
                 <a:ea typeface="Calibri" pitchFamily="34" charset="-122"/>
                 <a:cs typeface="Calibri" pitchFamily="34" charset="-120"/>
               </a:rPr>
-              <a:t>LIMITS</a:t>
+              <a:t>THEORY FROM PRACTICE</a:t>
             </a:r>
             <a:endParaRPr lang="en-US" sz="1200" dirty="0"/>
           </a:p>
@@ -3933,7 +8188,7 @@
                 <a:ea typeface="Cambria" pitchFamily="34" charset="-122"/>
                 <a:cs typeface="Cambria" pitchFamily="34" charset="-120"/>
               </a:rPr>
-              <a:t>Threats to validity, and the study this calls for</a:t>
+              <a:t>Recurring defect shapes the conversation method surfaced</a:t>
             </a:r>
             <a:endParaRPr lang="en-US" sz="3100" dirty="0"/>
           </a:p>
@@ -3948,17 +8203,22 @@
         <p:spPr>
           <a:xfrm>
             <a:off x="548640" y="1463040"/>
-            <a:ext cx="5486400" cy="4480560"/>
+            <a:ext cx="3611880" cy="2194560"/>
           </a:xfrm>
           <a:prstGeom prst="roundRect">
             <a:avLst>
-              <a:gd name="adj" fmla="val 1633"/>
+              <a:gd name="adj" fmla="val 3333"/>
             </a:avLst>
           </a:prstGeom>
           <a:solidFill>
-            <a:srgbClr val="EAF2F8"/>
+            <a:srgbClr val="FFFFFF"/>
           </a:solidFill>
-          <a:ln/>
+          <a:ln w="9525">
+            <a:solidFill>
+              <a:srgbClr val="D5E2EC"/>
+            </a:solidFill>
+            <a:prstDash val="solid"/>
+          </a:ln>
         </p:spPr>
       </p:sp>
       <p:sp>
@@ -3969,14 +8229,14 @@
         </p:nvSpPr>
         <p:spPr>
           <a:xfrm>
-            <a:off x="868680" y="1691640"/>
-            <a:ext cx="502920" cy="502920"/>
+            <a:off x="731520" y="1645920"/>
+            <a:ext cx="438912" cy="438912"/>
           </a:xfrm>
           <a:prstGeom prst="ellipse">
             <a:avLst/>
           </a:prstGeom>
           <a:solidFill>
-            <a:srgbClr val="1C7293"/>
+            <a:srgbClr val="065A82"/>
           </a:solidFill>
           <a:ln/>
         </p:spPr>
@@ -3997,8 +8257,8 @@
         </p:blipFill>
         <p:spPr>
           <a:xfrm>
-            <a:off x="999439" y="1822399"/>
-            <a:ext cx="241402" cy="241402"/>
+            <a:off x="845637" y="1760037"/>
+            <a:ext cx="210678" cy="210678"/>
           </a:xfrm>
           <a:prstGeom prst="rect">
             <a:avLst/>
@@ -4013,8 +8273,8 @@
         </p:nvSpPr>
         <p:spPr>
           <a:xfrm>
-            <a:off x="1554480" y="1783080"/>
-            <a:ext cx="4114800" cy="365760"/>
+            <a:off x="1298448" y="1664208"/>
+            <a:ext cx="2743200" cy="594360"/>
           </a:xfrm>
           <a:prstGeom prst="rect">
             <a:avLst/>
@@ -4030,7 +8290,7 @@
               <a:buNone/>
             </a:pPr>
             <a:r>
-              <a:rPr lang="en-US" sz="1600" b="1" dirty="0">
+              <a:rPr lang="en-US" sz="1300" b="1" dirty="0">
                 <a:solidFill>
                   <a:srgbClr val="0A2239"/>
                 </a:solidFill>
@@ -4038,9 +8298,9 @@
                 <a:ea typeface="Calibri" pitchFamily="34" charset="-122"/>
                 <a:cs typeface="Calibri" pitchFamily="34" charset="-120"/>
               </a:rPr>
-              <a:t>Threats to validity</a:t>
-            </a:r>
-            <a:endParaRPr lang="en-US" sz="1600" dirty="0"/>
+              <a:t>One value, two masters</a:t>
+            </a:r>
+            <a:endParaRPr lang="en-US" sz="1300" dirty="0"/>
           </a:p>
         </p:txBody>
       </p:sp>
@@ -4052,8 +8312,8 @@
         </p:nvSpPr>
         <p:spPr>
           <a:xfrm>
-            <a:off x="914400" y="2286000"/>
-            <a:ext cx="4846320" cy="3520440"/>
+            <a:off x="749808" y="2331720"/>
+            <a:ext cx="3200400" cy="1234440"/>
           </a:xfrm>
           <a:prstGeom prst="rect">
             <a:avLst/>
@@ -4065,15 +8325,11 @@
           <a:bodyPr wrap="square" lIns="0" tIns="0" rIns="0" bIns="0" rtlCol="0" anchor="t"/>
           <a:lstStyle/>
           <a:p>
-            <a:pPr marL="342900" indent="-342900">
-              <a:spcAft>
-                <a:spcPts val="700"/>
-              </a:spcAft>
-              <a:buSzPct val="100000"/>
-              <a:buChar char="•"/>
-            </a:pPr>
-            <a:r>
-              <a:rPr lang="en-US" sz="1200" dirty="0">
+            <a:pPr indent="0" marL="0">
+              <a:buNone/>
+            </a:pPr>
+            <a:r>
+              <a:rPr lang="en-US" sz="1050" dirty="0">
                 <a:solidFill>
                   <a:srgbClr val="1A2733"/>
                 </a:solidFill>
@@ -4081,90 +8337,9 @@
                 <a:ea typeface="Calibri" pitchFamily="34" charset="-122"/>
                 <a:cs typeface="Calibri" pitchFamily="34" charset="-120"/>
               </a:rPr>
-              <a:t>Observed cases, not controlled trials — n = 1 four times over, pointing the same way but never aggregated</a:t>
-            </a:r>
-            <a:endParaRPr lang="en-US" sz="1200" dirty="0"/>
-          </a:p>
-          <a:p>
-            <a:pPr marL="342900" indent="-342900">
-              <a:spcAft>
-                <a:spcPts val="700"/>
-              </a:spcAft>
-              <a:buSzPct val="100000"/>
-              <a:buChar char="•"/>
-            </a:pPr>
-            <a:r>
-              <a:rPr lang="en-US" sz="1200" dirty="0">
-                <a:solidFill>
-                  <a:srgbClr val="1A2733"/>
-                </a:solidFill>
-                <a:latin typeface="Calibri" pitchFamily="34" charset="0"/>
-                <a:ea typeface="Calibri" pitchFamily="34" charset="-122"/>
-                <a:cs typeface="Calibri" pitchFamily="34" charset="-120"/>
-              </a:rPr>
-              <a:t>One author is specifier, estimator, and grader of his own schema — correlated bias by construction</a:t>
-            </a:r>
-            <a:endParaRPr lang="en-US" sz="1200" dirty="0"/>
-          </a:p>
-          <a:p>
-            <a:pPr marL="342900" indent="-342900">
-              <a:spcAft>
-                <a:spcPts val="700"/>
-              </a:spcAft>
-              <a:buSzPct val="100000"/>
-              <a:buChar char="•"/>
-            </a:pPr>
-            <a:r>
-              <a:rPr lang="en-US" sz="1200" dirty="0">
-                <a:solidFill>
-                  <a:srgbClr val="1A2733"/>
-                </a:solidFill>
-                <a:latin typeface="Calibri" pitchFamily="34" charset="0"/>
-                <a:ea typeface="Calibri" pitchFamily="34" charset="-122"/>
-                <a:cs typeface="Calibri" pitchFamily="34" charset="-120"/>
-              </a:rPr>
-              <a:t>Effort baselines are modeled (PERT), not measured; actuals are uninstrumented bounds</a:t>
-            </a:r>
-            <a:endParaRPr lang="en-US" sz="1200" dirty="0"/>
-          </a:p>
-          <a:p>
-            <a:pPr marL="342900" indent="-342900">
-              <a:spcAft>
-                <a:spcPts val="700"/>
-              </a:spcAft>
-              <a:buSzPct val="100000"/>
-              <a:buChar char="•"/>
-            </a:pPr>
-            <a:r>
-              <a:rPr lang="en-US" sz="1200" dirty="0">
-                <a:solidFill>
-                  <a:srgbClr val="1A2733"/>
-                </a:solidFill>
-                <a:latin typeface="Calibri" pitchFamily="34" charset="0"/>
-                <a:ea typeface="Calibri" pitchFamily="34" charset="-122"/>
-                <a:cs typeface="Calibri" pitchFamily="34" charset="-120"/>
-              </a:rPr>
-              <a:t>Ratios from single-purpose field instrumentation — they should not be stretched to large systems, where architecture and maintenance dominate</a:t>
-            </a:r>
-            <a:endParaRPr lang="en-US" sz="1200" dirty="0"/>
-          </a:p>
-          <a:p>
-            <a:pPr marL="342900" indent="-342900">
-              <a:buSzPct val="100000"/>
-              <a:buChar char="•"/>
-            </a:pPr>
-            <a:r>
-              <a:rPr lang="en-US" sz="1200" dirty="0">
-                <a:solidFill>
-                  <a:srgbClr val="1A2733"/>
-                </a:solidFill>
-                <a:latin typeface="Calibri" pitchFamily="34" charset="0"/>
-                <a:ea typeface="Calibri" pitchFamily="34" charset="-122"/>
-                <a:cs typeface="Calibri" pitchFamily="34" charset="-120"/>
-              </a:rPr>
-              <a:t>The schema leans on a capable agent: without empirical discovery and self-distrust, slots 4 and 7 give back little</a:t>
-            </a:r>
-            <a:endParaRPr lang="en-US" sz="1200" dirty="0"/>
+              <a:t>A field serving display and logic, or persistent and transient state — nearly every bug in the polish pass reduced to this.</a:t>
+            </a:r>
+            <a:endParaRPr lang="en-US" sz="1050" dirty="0"/>
           </a:p>
         </p:txBody>
       </p:sp>
@@ -4176,18 +8351,18 @@
         </p:nvSpPr>
         <p:spPr>
           <a:xfrm>
-            <a:off x="6263640" y="1463040"/>
-            <a:ext cx="5394960" cy="4480560"/>
+            <a:off x="4389120" y="1463040"/>
+            <a:ext cx="3611880" cy="2194560"/>
           </a:xfrm>
           <a:prstGeom prst="roundRect">
             <a:avLst>
-              <a:gd name="adj" fmla="val 1633"/>
+              <a:gd name="adj" fmla="val 3333"/>
             </a:avLst>
           </a:prstGeom>
           <a:solidFill>
-            <a:srgbClr val="FFFFFF"/>
+            <a:srgbClr val="EAF2F8"/>
           </a:solidFill>
-          <a:ln w="12700">
+          <a:ln w="9525">
             <a:solidFill>
               <a:srgbClr val="D5E2EC"/>
             </a:solidFill>
@@ -4203,14 +8378,14 @@
         </p:nvSpPr>
         <p:spPr>
           <a:xfrm>
-            <a:off x="6583680" y="1691640"/>
-            <a:ext cx="502920" cy="502920"/>
+            <a:off x="4572000" y="1645920"/>
+            <a:ext cx="438912" cy="438912"/>
           </a:xfrm>
           <a:prstGeom prst="ellipse">
             <a:avLst/>
           </a:prstGeom>
           <a:solidFill>
-            <a:srgbClr val="C9862B"/>
+            <a:srgbClr val="065A82"/>
           </a:solidFill>
           <a:ln/>
         </p:spPr>
@@ -4231,8 +8406,8 @@
         </p:blipFill>
         <p:spPr>
           <a:xfrm>
-            <a:off x="6714439" y="1822399"/>
-            <a:ext cx="241402" cy="241402"/>
+            <a:off x="4686117" y="1760037"/>
+            <a:ext cx="210678" cy="210678"/>
           </a:xfrm>
           <a:prstGeom prst="rect">
             <a:avLst/>
@@ -4247,8 +8422,8 @@
         </p:nvSpPr>
         <p:spPr>
           <a:xfrm>
-            <a:off x="7269480" y="1783080"/>
-            <a:ext cx="4206240" cy="365760"/>
+            <a:off x="5138928" y="1664208"/>
+            <a:ext cx="2743200" cy="594360"/>
           </a:xfrm>
           <a:prstGeom prst="rect">
             <a:avLst/>
@@ -4264,7 +8439,7 @@
               <a:buNone/>
             </a:pPr>
             <a:r>
-              <a:rPr lang="en-US" sz="1600" b="1" dirty="0">
+              <a:rPr lang="en-US" sz="1300" b="1" dirty="0">
                 <a:solidFill>
                   <a:srgbClr val="0A2239"/>
                 </a:solidFill>
@@ -4272,9 +8447,9 @@
                 <a:ea typeface="Calibri" pitchFamily="34" charset="-122"/>
                 <a:cs typeface="Calibri" pitchFamily="34" charset="-120"/>
               </a:rPr>
-              <a:t>The controlled study to run</a:t>
-            </a:r>
-            <a:endParaRPr lang="en-US" sz="1600" dirty="0"/>
+              <a:t>Remember vs derive</a:t>
+            </a:r>
+            <a:endParaRPr lang="en-US" sz="1300" dirty="0"/>
           </a:p>
         </p:txBody>
       </p:sp>
@@ -4286,8 +8461,8 @@
         </p:nvSpPr>
         <p:spPr>
           <a:xfrm>
-            <a:off x="6629400" y="2286000"/>
-            <a:ext cx="4754880" cy="3520440"/>
+            <a:off x="4590288" y="2331720"/>
+            <a:ext cx="3200400" cy="1234440"/>
           </a:xfrm>
           <a:prstGeom prst="rect">
             <a:avLst/>
@@ -4299,15 +8474,11 @@
           <a:bodyPr wrap="square" lIns="0" tIns="0" rIns="0" bIns="0" rtlCol="0" anchor="t"/>
           <a:lstStyle/>
           <a:p>
-            <a:pPr marL="342900" indent="-342900">
-              <a:spcAft>
-                <a:spcPts val="700"/>
-              </a:spcAft>
-              <a:buSzPct val="100000"/>
-              <a:buChar char="•"/>
-            </a:pPr>
-            <a:r>
-              <a:rPr lang="en-US" sz="1200" dirty="0">
+            <a:pPr indent="0" marL="0">
+              <a:buNone/>
+            </a:pPr>
+            <a:r>
+              <a:rPr lang="en-US" sz="1050" dirty="0">
                 <a:solidFill>
                   <a:srgbClr val="1A2733"/>
                 </a:solidFill>
@@ -4315,41 +8486,148 @@
                 <a:ea typeface="Calibri" pitchFamily="34" charset="-122"/>
                 <a:cs typeface="Calibri" pitchFamily="34" charset="-120"/>
               </a:rPr>
-              <a:t>Paired tasks: domain experts with and without the structured opening prompt, across several devices</a:t>
-            </a:r>
-            <a:endParaRPr lang="en-US" sz="1200" dirty="0"/>
-          </a:p>
-          <a:p>
-            <a:pPr marL="342900" indent="-342900">
-              <a:spcAft>
-                <a:spcPts val="700"/>
-              </a:spcAft>
-              <a:buSzPct val="100000"/>
-              <a:buChar char="•"/>
-            </a:pPr>
-            <a:r>
-              <a:rPr lang="en-US" sz="1200" dirty="0">
-                <a:solidFill>
-                  <a:srgbClr val="1A2733"/>
+              <a:t>A snapshot drifts from the thing it describes; a value re-derived from the source of truth cannot. Deriving forced out two bugs a snapshot would have hidden.</a:t>
+            </a:r>
+            <a:endParaRPr lang="en-US" sz="1050" dirty="0"/>
+          </a:p>
+        </p:txBody>
+      </p:sp>
+      <p:sp>
+        <p:nvSpPr>
+          <p:cNvPr id="14" name="Shape 10"/>
+          <p:cNvSpPr/>
+          <p:nvPr/>
+        </p:nvSpPr>
+        <p:spPr>
+          <a:xfrm>
+            <a:off x="8229600" y="1463040"/>
+            <a:ext cx="3611880" cy="2194560"/>
+          </a:xfrm>
+          <a:prstGeom prst="roundRect">
+            <a:avLst>
+              <a:gd name="adj" fmla="val 3333"/>
+            </a:avLst>
+          </a:prstGeom>
+          <a:solidFill>
+            <a:srgbClr val="FFFFFF"/>
+          </a:solidFill>
+          <a:ln w="9525">
+            <a:solidFill>
+              <a:srgbClr val="D5E2EC"/>
+            </a:solidFill>
+            <a:prstDash val="solid"/>
+          </a:ln>
+        </p:spPr>
+      </p:sp>
+      <p:sp>
+        <p:nvSpPr>
+          <p:cNvPr id="15" name="Shape 11"/>
+          <p:cNvSpPr/>
+          <p:nvPr/>
+        </p:nvSpPr>
+        <p:spPr>
+          <a:xfrm>
+            <a:off x="8412480" y="1645920"/>
+            <a:ext cx="438912" cy="438912"/>
+          </a:xfrm>
+          <a:prstGeom prst="ellipse">
+            <a:avLst/>
+          </a:prstGeom>
+          <a:solidFill>
+            <a:srgbClr val="065A82"/>
+          </a:solidFill>
+          <a:ln/>
+        </p:spPr>
+      </p:sp>
+      <p:pic>
+        <p:nvPicPr>
+          <p:cNvPr id="16" name="Image 2" descr="preencoded.png">    </p:cNvPr>
+          <p:cNvPicPr>
+            <a:picLocks noChangeAspect="1"/>
+          </p:cNvPicPr>
+          <p:nvPr/>
+        </p:nvPicPr>
+        <p:blipFill>
+          <a:blip r:embed="rId3"/>
+          <a:stretch>
+            <a:fillRect/>
+          </a:stretch>
+        </p:blipFill>
+        <p:spPr>
+          <a:xfrm>
+            <a:off x="8526597" y="1760037"/>
+            <a:ext cx="210678" cy="210678"/>
+          </a:xfrm>
+          <a:prstGeom prst="rect">
+            <a:avLst/>
+          </a:prstGeom>
+        </p:spPr>
+      </p:pic>
+      <p:sp>
+        <p:nvSpPr>
+          <p:cNvPr id="17" name="Text 12"/>
+          <p:cNvSpPr/>
+          <p:nvPr/>
+        </p:nvSpPr>
+        <p:spPr>
+          <a:xfrm>
+            <a:off x="8979408" y="1664208"/>
+            <a:ext cx="2743200" cy="594360"/>
+          </a:xfrm>
+          <a:prstGeom prst="rect">
+            <a:avLst/>
+          </a:prstGeom>
+          <a:noFill/>
+          <a:ln/>
+        </p:spPr>
+        <p:txBody>
+          <a:bodyPr wrap="square" lIns="0" tIns="0" rIns="0" bIns="0" rtlCol="0" anchor="ctr"/>
+          <a:lstStyle/>
+          <a:p>
+            <a:pPr indent="0" marL="0">
+              <a:buNone/>
+            </a:pPr>
+            <a:r>
+              <a:rPr lang="en-US" sz="1300" b="1" dirty="0">
+                <a:solidFill>
+                  <a:srgbClr val="0A2239"/>
                 </a:solidFill>
                 <a:latin typeface="Calibri" pitchFamily="34" charset="0"/>
                 <a:ea typeface="Calibri" pitchFamily="34" charset="-122"/>
                 <a:cs typeface="Calibri" pitchFamily="34" charset="-120"/>
               </a:rPr>
-              <a:t>A condition the Q-Hub case approximates at n = 1: experts writing their own opening in schema form vs discovering requirements turn by turn</a:t>
-            </a:r>
-            <a:endParaRPr lang="en-US" sz="1200" dirty="0"/>
-          </a:p>
-          <a:p>
-            <a:pPr marL="342900" indent="-342900">
-              <a:spcAft>
-                <a:spcPts val="700"/>
-              </a:spcAft>
-              <a:buSzPct val="100000"/>
-              <a:buChar char="•"/>
-            </a:pPr>
-            <a:r>
-              <a:rPr lang="en-US" sz="1200" dirty="0">
+              <a:t>The masked branch</a:t>
+            </a:r>
+            <a:endParaRPr lang="en-US" sz="1300" dirty="0"/>
+          </a:p>
+        </p:txBody>
+      </p:sp>
+      <p:sp>
+        <p:nvSpPr>
+          <p:cNvPr id="18" name="Text 13"/>
+          <p:cNvSpPr/>
+          <p:nvPr/>
+        </p:nvSpPr>
+        <p:spPr>
+          <a:xfrm>
+            <a:off x="8430768" y="2331720"/>
+            <a:ext cx="3200400" cy="1234440"/>
+          </a:xfrm>
+          <a:prstGeom prst="rect">
+            <a:avLst/>
+          </a:prstGeom>
+          <a:noFill/>
+          <a:ln/>
+        </p:spPr>
+        <p:txBody>
+          <a:bodyPr wrap="square" lIns="0" tIns="0" rIns="0" bIns="0" rtlCol="0" anchor="t"/>
+          <a:lstStyle/>
+          <a:p>
+            <a:pPr indent="0" marL="0">
+              <a:buNone/>
+            </a:pPr>
+            <a:r>
+              <a:rPr lang="en-US" sz="1050" dirty="0">
                 <a:solidFill>
                   <a:srgbClr val="1A2733"/>
                 </a:solidFill>
@@ -4357,27 +8635,456 @@
                 <a:ea typeface="Calibri" pitchFamily="34" charset="-122"/>
                 <a:cs typeface="Calibri" pitchFamily="34" charset="-120"/>
               </a:rPr>
-              <a:t>Measures: turns to acceptance, defect counts, instrumented time, share of corrections traceable to specification gaps vs discovery</a:t>
-            </a:r>
-            <a:endParaRPr lang="en-US" sz="1200" dirty="0"/>
-          </a:p>
-          <a:p>
-            <a:pPr marL="342900" indent="-342900">
-              <a:buSzPct val="100000"/>
-              <a:buChar char="•"/>
-            </a:pPr>
-            <a:r>
-              <a:rPr lang="en-US" sz="1200" dirty="0">
-                <a:solidFill>
-                  <a:srgbClr val="1A2733"/>
+              <a:t>Every harness passed --no-log, so the logging branch went untested no matter how many suites ran past it. A masked branch is an untested branch.</a:t>
+            </a:r>
+            <a:endParaRPr lang="en-US" sz="1050" dirty="0"/>
+          </a:p>
+        </p:txBody>
+      </p:sp>
+      <p:sp>
+        <p:nvSpPr>
+          <p:cNvPr id="19" name="Shape 14"/>
+          <p:cNvSpPr/>
+          <p:nvPr/>
+        </p:nvSpPr>
+        <p:spPr>
+          <a:xfrm>
+            <a:off x="548640" y="3840480"/>
+            <a:ext cx="3611880" cy="2194560"/>
+          </a:xfrm>
+          <a:prstGeom prst="roundRect">
+            <a:avLst>
+              <a:gd name="adj" fmla="val 3333"/>
+            </a:avLst>
+          </a:prstGeom>
+          <a:solidFill>
+            <a:srgbClr val="EAF2F8"/>
+          </a:solidFill>
+          <a:ln w="9525">
+            <a:solidFill>
+              <a:srgbClr val="D5E2EC"/>
+            </a:solidFill>
+            <a:prstDash val="solid"/>
+          </a:ln>
+        </p:spPr>
+      </p:sp>
+      <p:sp>
+        <p:nvSpPr>
+          <p:cNvPr id="20" name="Shape 15"/>
+          <p:cNvSpPr/>
+          <p:nvPr/>
+        </p:nvSpPr>
+        <p:spPr>
+          <a:xfrm>
+            <a:off x="731520" y="4023360"/>
+            <a:ext cx="438912" cy="438912"/>
+          </a:xfrm>
+          <a:prstGeom prst="ellipse">
+            <a:avLst/>
+          </a:prstGeom>
+          <a:solidFill>
+            <a:srgbClr val="065A82"/>
+          </a:solidFill>
+          <a:ln/>
+        </p:spPr>
+      </p:sp>
+      <p:pic>
+        <p:nvPicPr>
+          <p:cNvPr id="21" name="Image 3" descr="preencoded.png">    </p:cNvPr>
+          <p:cNvPicPr>
+            <a:picLocks noChangeAspect="1"/>
+          </p:cNvPicPr>
+          <p:nvPr/>
+        </p:nvPicPr>
+        <p:blipFill>
+          <a:blip r:embed="rId4"/>
+          <a:stretch>
+            <a:fillRect/>
+          </a:stretch>
+        </p:blipFill>
+        <p:spPr>
+          <a:xfrm>
+            <a:off x="845637" y="4137477"/>
+            <a:ext cx="210678" cy="210678"/>
+          </a:xfrm>
+          <a:prstGeom prst="rect">
+            <a:avLst/>
+          </a:prstGeom>
+        </p:spPr>
+      </p:pic>
+      <p:sp>
+        <p:nvSpPr>
+          <p:cNvPr id="22" name="Text 16"/>
+          <p:cNvSpPr/>
+          <p:nvPr/>
+        </p:nvSpPr>
+        <p:spPr>
+          <a:xfrm>
+            <a:off x="1298448" y="4041648"/>
+            <a:ext cx="2743200" cy="594360"/>
+          </a:xfrm>
+          <a:prstGeom prst="rect">
+            <a:avLst/>
+          </a:prstGeom>
+          <a:noFill/>
+          <a:ln/>
+        </p:spPr>
+        <p:txBody>
+          <a:bodyPr wrap="square" lIns="0" tIns="0" rIns="0" bIns="0" rtlCol="0" anchor="ctr"/>
+          <a:lstStyle/>
+          <a:p>
+            <a:pPr indent="0" marL="0">
+              <a:buNone/>
+            </a:pPr>
+            <a:r>
+              <a:rPr lang="en-US" sz="1300" b="1" dirty="0">
+                <a:solidFill>
+                  <a:srgbClr val="0A2239"/>
                 </a:solidFill>
                 <a:latin typeface="Calibri" pitchFamily="34" charset="0"/>
                 <a:ea typeface="Calibri" pitchFamily="34" charset="-122"/>
                 <a:cs typeface="Calibri" pitchFamily="34" charset="-120"/>
               </a:rPr>
-              <a:t>And separately: defect rate and time-to-diagnosis under real post-delivery use — where the Q-Hub artifact was actually caught out</a:t>
-            </a:r>
-            <a:endParaRPr lang="en-US" sz="1200" dirty="0"/>
+              <a:t>A check that can't tell bug from fix</a:t>
+            </a:r>
+            <a:endParaRPr lang="en-US" sz="1300" dirty="0"/>
+          </a:p>
+        </p:txBody>
+      </p:sp>
+      <p:sp>
+        <p:nvSpPr>
+          <p:cNvPr id="23" name="Text 17"/>
+          <p:cNvSpPr/>
+          <p:nvPr/>
+        </p:nvSpPr>
+        <p:spPr>
+          <a:xfrm>
+            <a:off x="749808" y="4709160"/>
+            <a:ext cx="3200400" cy="1234440"/>
+          </a:xfrm>
+          <a:prstGeom prst="rect">
+            <a:avLst/>
+          </a:prstGeom>
+          <a:noFill/>
+          <a:ln/>
+        </p:spPr>
+        <p:txBody>
+          <a:bodyPr wrap="square" lIns="0" tIns="0" rIns="0" bIns="0" rtlCol="0" anchor="t"/>
+          <a:lstStyle/>
+          <a:p>
+            <a:pPr indent="0" marL="0">
+              <a:buNone/>
+            </a:pPr>
+            <a:r>
+              <a:rPr lang="en-US" sz="1050" dirty="0">
+                <a:solidFill>
+                  <a:srgbClr val="1A2733"/>
+                </a:solidFill>
+                <a:latin typeface="Calibri" pitchFamily="34" charset="0"/>
+                <a:ea typeface="Calibri" pitchFamily="34" charset="-122"/>
+                <a:cs typeface="Calibri" pitchFamily="34" charset="-120"/>
+              </a:rPr>
+              <a:t>A filter test with nothing to filter; a hash compared to itself; asserting a field's name instead of its value. Hit three times in one session.</a:t>
+            </a:r>
+            <a:endParaRPr lang="en-US" sz="1050" dirty="0"/>
+          </a:p>
+        </p:txBody>
+      </p:sp>
+      <p:sp>
+        <p:nvSpPr>
+          <p:cNvPr id="24" name="Shape 18"/>
+          <p:cNvSpPr/>
+          <p:nvPr/>
+        </p:nvSpPr>
+        <p:spPr>
+          <a:xfrm>
+            <a:off x="4389120" y="3840480"/>
+            <a:ext cx="3611880" cy="2194560"/>
+          </a:xfrm>
+          <a:prstGeom prst="roundRect">
+            <a:avLst>
+              <a:gd name="adj" fmla="val 3333"/>
+            </a:avLst>
+          </a:prstGeom>
+          <a:solidFill>
+            <a:srgbClr val="FFFFFF"/>
+          </a:solidFill>
+          <a:ln w="9525">
+            <a:solidFill>
+              <a:srgbClr val="D5E2EC"/>
+            </a:solidFill>
+            <a:prstDash val="solid"/>
+          </a:ln>
+        </p:spPr>
+      </p:sp>
+      <p:sp>
+        <p:nvSpPr>
+          <p:cNvPr id="25" name="Shape 19"/>
+          <p:cNvSpPr/>
+          <p:nvPr/>
+        </p:nvSpPr>
+        <p:spPr>
+          <a:xfrm>
+            <a:off x="4572000" y="4023360"/>
+            <a:ext cx="438912" cy="438912"/>
+          </a:xfrm>
+          <a:prstGeom prst="ellipse">
+            <a:avLst/>
+          </a:prstGeom>
+          <a:solidFill>
+            <a:srgbClr val="065A82"/>
+          </a:solidFill>
+          <a:ln/>
+        </p:spPr>
+      </p:sp>
+      <p:pic>
+        <p:nvPicPr>
+          <p:cNvPr id="26" name="Image 4" descr="preencoded.png">    </p:cNvPr>
+          <p:cNvPicPr>
+            <a:picLocks noChangeAspect="1"/>
+          </p:cNvPicPr>
+          <p:nvPr/>
+        </p:nvPicPr>
+        <p:blipFill>
+          <a:blip r:embed="rId5"/>
+          <a:stretch>
+            <a:fillRect/>
+          </a:stretch>
+        </p:blipFill>
+        <p:spPr>
+          <a:xfrm>
+            <a:off x="4686117" y="4137477"/>
+            <a:ext cx="210678" cy="210678"/>
+          </a:xfrm>
+          <a:prstGeom prst="rect">
+            <a:avLst/>
+          </a:prstGeom>
+        </p:spPr>
+      </p:pic>
+      <p:sp>
+        <p:nvSpPr>
+          <p:cNvPr id="27" name="Text 20"/>
+          <p:cNvSpPr/>
+          <p:nvPr/>
+        </p:nvSpPr>
+        <p:spPr>
+          <a:xfrm>
+            <a:off x="5138928" y="4041648"/>
+            <a:ext cx="2743200" cy="594360"/>
+          </a:xfrm>
+          <a:prstGeom prst="rect">
+            <a:avLst/>
+          </a:prstGeom>
+          <a:noFill/>
+          <a:ln/>
+        </p:spPr>
+        <p:txBody>
+          <a:bodyPr wrap="square" lIns="0" tIns="0" rIns="0" bIns="0" rtlCol="0" anchor="ctr"/>
+          <a:lstStyle/>
+          <a:p>
+            <a:pPr indent="0" marL="0">
+              <a:buNone/>
+            </a:pPr>
+            <a:r>
+              <a:rPr lang="en-US" sz="1300" b="1" dirty="0">
+                <a:solidFill>
+                  <a:srgbClr val="0A2239"/>
+                </a:solidFill>
+                <a:latin typeface="Calibri" pitchFamily="34" charset="0"/>
+                <a:ea typeface="Calibri" pitchFamily="34" charset="-122"/>
+                <a:cs typeface="Calibri" pitchFamily="34" charset="-120"/>
+              </a:rPr>
+              <a:t>Accurate card, wrong about the boat</a:t>
+            </a:r>
+            <a:endParaRPr lang="en-US" sz="1300" dirty="0"/>
+          </a:p>
+        </p:txBody>
+      </p:sp>
+      <p:sp>
+        <p:nvSpPr>
+          <p:cNvPr id="28" name="Text 21"/>
+          <p:cNvSpPr/>
+          <p:nvPr/>
+        </p:nvSpPr>
+        <p:spPr>
+          <a:xfrm>
+            <a:off x="4590288" y="4709160"/>
+            <a:ext cx="3200400" cy="1234440"/>
+          </a:xfrm>
+          <a:prstGeom prst="rect">
+            <a:avLst/>
+          </a:prstGeom>
+          <a:noFill/>
+          <a:ln/>
+        </p:spPr>
+        <p:txBody>
+          <a:bodyPr wrap="square" lIns="0" tIns="0" rIns="0" bIns="0" rtlCol="0" anchor="t"/>
+          <a:lstStyle/>
+          <a:p>
+            <a:pPr indent="0" marL="0">
+              <a:buNone/>
+            </a:pPr>
+            <a:r>
+              <a:rPr lang="en-US" sz="1050" dirty="0">
+                <a:solidFill>
+                  <a:srgbClr val="1A2733"/>
+                </a:solidFill>
+                <a:latin typeface="Calibri" pitchFamily="34" charset="0"/>
+                <a:ea typeface="Calibri" pitchFamily="34" charset="-122"/>
+                <a:cs typeface="Calibri" pitchFamily="34" charset="-120"/>
+              </a:rPr>
+              <a:t>A readout can be correct about its own field and still not answer the question the operator reads it for.</a:t>
+            </a:r>
+            <a:endParaRPr lang="en-US" sz="1050" dirty="0"/>
+          </a:p>
+        </p:txBody>
+      </p:sp>
+      <p:sp>
+        <p:nvSpPr>
+          <p:cNvPr id="29" name="Shape 22"/>
+          <p:cNvSpPr/>
+          <p:nvPr/>
+        </p:nvSpPr>
+        <p:spPr>
+          <a:xfrm>
+            <a:off x="8229600" y="3840480"/>
+            <a:ext cx="3611880" cy="2194560"/>
+          </a:xfrm>
+          <a:prstGeom prst="roundRect">
+            <a:avLst>
+              <a:gd name="adj" fmla="val 3333"/>
+            </a:avLst>
+          </a:prstGeom>
+          <a:solidFill>
+            <a:srgbClr val="EAF2F8"/>
+          </a:solidFill>
+          <a:ln w="9525">
+            <a:solidFill>
+              <a:srgbClr val="D5E2EC"/>
+            </a:solidFill>
+            <a:prstDash val="solid"/>
+          </a:ln>
+        </p:spPr>
+      </p:sp>
+      <p:sp>
+        <p:nvSpPr>
+          <p:cNvPr id="30" name="Shape 23"/>
+          <p:cNvSpPr/>
+          <p:nvPr/>
+        </p:nvSpPr>
+        <p:spPr>
+          <a:xfrm>
+            <a:off x="8412480" y="4023360"/>
+            <a:ext cx="438912" cy="438912"/>
+          </a:xfrm>
+          <a:prstGeom prst="ellipse">
+            <a:avLst/>
+          </a:prstGeom>
+          <a:solidFill>
+            <a:srgbClr val="065A82"/>
+          </a:solidFill>
+          <a:ln/>
+        </p:spPr>
+      </p:sp>
+      <p:pic>
+        <p:nvPicPr>
+          <p:cNvPr id="31" name="Image 5" descr="preencoded.png">    </p:cNvPr>
+          <p:cNvPicPr>
+            <a:picLocks noChangeAspect="1"/>
+          </p:cNvPicPr>
+          <p:nvPr/>
+        </p:nvPicPr>
+        <p:blipFill>
+          <a:blip r:embed="rId6"/>
+          <a:stretch>
+            <a:fillRect/>
+          </a:stretch>
+        </p:blipFill>
+        <p:spPr>
+          <a:xfrm>
+            <a:off x="8526597" y="4137477"/>
+            <a:ext cx="210678" cy="210678"/>
+          </a:xfrm>
+          <a:prstGeom prst="rect">
+            <a:avLst/>
+          </a:prstGeom>
+        </p:spPr>
+      </p:pic>
+      <p:sp>
+        <p:nvSpPr>
+          <p:cNvPr id="32" name="Text 24"/>
+          <p:cNvSpPr/>
+          <p:nvPr/>
+        </p:nvSpPr>
+        <p:spPr>
+          <a:xfrm>
+            <a:off x="8979408" y="4041648"/>
+            <a:ext cx="2743200" cy="594360"/>
+          </a:xfrm>
+          <a:prstGeom prst="rect">
+            <a:avLst/>
+          </a:prstGeom>
+          <a:noFill/>
+          <a:ln/>
+        </p:spPr>
+        <p:txBody>
+          <a:bodyPr wrap="square" lIns="0" tIns="0" rIns="0" bIns="0" rtlCol="0" anchor="ctr"/>
+          <a:lstStyle/>
+          <a:p>
+            <a:pPr indent="0" marL="0">
+              <a:buNone/>
+            </a:pPr>
+            <a:r>
+              <a:rPr lang="en-US" sz="1300" b="1" dirty="0">
+                <a:solidFill>
+                  <a:srgbClr val="0A2239"/>
+                </a:solidFill>
+                <a:latin typeface="Calibri" pitchFamily="34" charset="0"/>
+                <a:ea typeface="Calibri" pitchFamily="34" charset="-122"/>
+                <a:cs typeface="Calibri" pitchFamily="34" charset="-120"/>
+              </a:rPr>
+              <a:t>Build-time vs in-use verification</a:t>
+            </a:r>
+            <a:endParaRPr lang="en-US" sz="1300" dirty="0"/>
+          </a:p>
+        </p:txBody>
+      </p:sp>
+      <p:sp>
+        <p:nvSpPr>
+          <p:cNvPr id="33" name="Text 25"/>
+          <p:cNvSpPr/>
+          <p:nvPr/>
+        </p:nvSpPr>
+        <p:spPr>
+          <a:xfrm>
+            <a:off x="8430768" y="4709160"/>
+            <a:ext cx="3200400" cy="1234440"/>
+          </a:xfrm>
+          <a:prstGeom prst="rect">
+            <a:avLst/>
+          </a:prstGeom>
+          <a:noFill/>
+          <a:ln/>
+        </p:spPr>
+        <p:txBody>
+          <a:bodyPr wrap="square" lIns="0" tIns="0" rIns="0" bIns="0" rtlCol="0" anchor="t"/>
+          <a:lstStyle/>
+          <a:p>
+            <a:pPr indent="0" marL="0">
+              <a:buNone/>
+            </a:pPr>
+            <a:r>
+              <a:rPr lang="en-US" sz="1050" dirty="0">
+                <a:solidFill>
+                  <a:srgbClr val="1A2733"/>
+                </a:solidFill>
+                <a:latin typeface="Calibri" pitchFamily="34" charset="0"/>
+                <a:ea typeface="Calibri" pitchFamily="34" charset="-122"/>
+                <a:cs typeface="Calibri" pitchFamily="34" charset="-120"/>
+              </a:rPr>
+              <a:t>The Q-Hub lesson, confirmed here: passing the builder's tests does not discharge the operator's — real use finds the gap the test plan's author could not.</a:t>
+            </a:r>
+            <a:endParaRPr lang="en-US" sz="1050" dirty="0"/>
           </a:p>
         </p:txBody>
       </p:sp>
@@ -4392,6 +9099,558 @@
 <file path=ppt/slides/slide13.xml><?xml version="1.0" encoding="utf-8"?>
 <p:sld xmlns:a="http://schemas.openxmlformats.org/drawingml/2006/main" xmlns:r="http://schemas.openxmlformats.org/officeDocument/2006/relationships" xmlns:p="http://schemas.openxmlformats.org/presentationml/2006/main">
   <p:cSld name="Slide 13">
+    <p:bg>
+      <p:bgPr>
+        <a:solidFill>
+          <a:srgbClr val="FFFFFF"/>
+        </a:solidFill>
+      </p:bgPr>
+    </p:bg>
+    <p:spTree>
+      <p:nvGrpSpPr>
+        <p:cNvPr id="1" name=""/>
+        <p:cNvGrpSpPr/>
+        <p:nvPr/>
+      </p:nvGrpSpPr>
+      <p:grpSpPr>
+        <a:xfrm>
+          <a:off x="0" y="0"/>
+          <a:ext cx="0" cy="0"/>
+          <a:chOff x="0" y="0"/>
+          <a:chExt cx="0" cy="0"/>
+        </a:xfrm>
+      </p:grpSpPr>
+      <p:sp>
+        <p:nvSpPr>
+          <p:cNvPr id="2" name="Text 0"/>
+          <p:cNvSpPr/>
+          <p:nvPr/>
+        </p:nvSpPr>
+        <p:spPr>
+          <a:xfrm>
+            <a:off x="548640" y="292608"/>
+            <a:ext cx="11064240" cy="274320"/>
+          </a:xfrm>
+          <a:prstGeom prst="rect">
+            <a:avLst/>
+          </a:prstGeom>
+          <a:noFill/>
+          <a:ln/>
+        </p:spPr>
+        <p:txBody>
+          <a:bodyPr wrap="square" lIns="0" tIns="0" rIns="0" bIns="0" rtlCol="0" anchor="ctr"/>
+          <a:lstStyle/>
+          <a:p>
+            <a:pPr indent="0" marL="0">
+              <a:buNone/>
+            </a:pPr>
+            <a:r>
+              <a:rPr lang="en-US" sz="1200" b="1" spc="200" kern="0" dirty="0">
+                <a:solidFill>
+                  <a:srgbClr val="1C7293"/>
+                </a:solidFill>
+                <a:latin typeface="Calibri" pitchFamily="34" charset="0"/>
+                <a:ea typeface="Calibri" pitchFamily="34" charset="-122"/>
+                <a:cs typeface="Calibri" pitchFamily="34" charset="-120"/>
+              </a:rPr>
+              <a:t>LIMITS</a:t>
+            </a:r>
+            <a:endParaRPr lang="en-US" sz="1200" dirty="0"/>
+          </a:p>
+        </p:txBody>
+      </p:sp>
+      <p:sp>
+        <p:nvSpPr>
+          <p:cNvPr id="3" name="Text 1"/>
+          <p:cNvSpPr/>
+          <p:nvPr/>
+        </p:nvSpPr>
+        <p:spPr>
+          <a:xfrm>
+            <a:off x="548640" y="530352"/>
+            <a:ext cx="11064240" cy="685800"/>
+          </a:xfrm>
+          <a:prstGeom prst="rect">
+            <a:avLst/>
+          </a:prstGeom>
+          <a:noFill/>
+          <a:ln/>
+        </p:spPr>
+        <p:txBody>
+          <a:bodyPr wrap="square" lIns="0" tIns="0" rIns="0" bIns="0" rtlCol="0" anchor="ctr"/>
+          <a:lstStyle/>
+          <a:p>
+            <a:pPr indent="0" marL="0">
+              <a:buNone/>
+            </a:pPr>
+            <a:r>
+              <a:rPr lang="en-US" sz="3100" b="1" dirty="0">
+                <a:solidFill>
+                  <a:srgbClr val="0A2239"/>
+                </a:solidFill>
+                <a:latin typeface="Cambria" pitchFamily="34" charset="0"/>
+                <a:ea typeface="Cambria" pitchFamily="34" charset="-122"/>
+                <a:cs typeface="Cambria" pitchFamily="34" charset="-120"/>
+              </a:rPr>
+              <a:t>Threats to validity, and the study this calls for</a:t>
+            </a:r>
+            <a:endParaRPr lang="en-US" sz="3100" dirty="0"/>
+          </a:p>
+        </p:txBody>
+      </p:sp>
+      <p:sp>
+        <p:nvSpPr>
+          <p:cNvPr id="4" name="Shape 2"/>
+          <p:cNvSpPr/>
+          <p:nvPr/>
+        </p:nvSpPr>
+        <p:spPr>
+          <a:xfrm>
+            <a:off x="548640" y="1463040"/>
+            <a:ext cx="5486400" cy="4480560"/>
+          </a:xfrm>
+          <a:prstGeom prst="roundRect">
+            <a:avLst>
+              <a:gd name="adj" fmla="val 1633"/>
+            </a:avLst>
+          </a:prstGeom>
+          <a:solidFill>
+            <a:srgbClr val="EAF2F8"/>
+          </a:solidFill>
+          <a:ln/>
+        </p:spPr>
+      </p:sp>
+      <p:sp>
+        <p:nvSpPr>
+          <p:cNvPr id="5" name="Shape 3"/>
+          <p:cNvSpPr/>
+          <p:nvPr/>
+        </p:nvSpPr>
+        <p:spPr>
+          <a:xfrm>
+            <a:off x="868680" y="1691640"/>
+            <a:ext cx="502920" cy="502920"/>
+          </a:xfrm>
+          <a:prstGeom prst="ellipse">
+            <a:avLst/>
+          </a:prstGeom>
+          <a:solidFill>
+            <a:srgbClr val="1C7293"/>
+          </a:solidFill>
+          <a:ln/>
+        </p:spPr>
+      </p:sp>
+      <p:pic>
+        <p:nvPicPr>
+          <p:cNvPr id="6" name="Image 0" descr="preencoded.png">    </p:cNvPr>
+          <p:cNvPicPr>
+            <a:picLocks noChangeAspect="1"/>
+          </p:cNvPicPr>
+          <p:nvPr/>
+        </p:nvPicPr>
+        <p:blipFill>
+          <a:blip r:embed="rId1"/>
+          <a:stretch>
+            <a:fillRect/>
+          </a:stretch>
+        </p:blipFill>
+        <p:spPr>
+          <a:xfrm>
+            <a:off x="999439" y="1822399"/>
+            <a:ext cx="241402" cy="241402"/>
+          </a:xfrm>
+          <a:prstGeom prst="rect">
+            <a:avLst/>
+          </a:prstGeom>
+        </p:spPr>
+      </p:pic>
+      <p:sp>
+        <p:nvSpPr>
+          <p:cNvPr id="7" name="Text 4"/>
+          <p:cNvSpPr/>
+          <p:nvPr/>
+        </p:nvSpPr>
+        <p:spPr>
+          <a:xfrm>
+            <a:off x="1554480" y="1783080"/>
+            <a:ext cx="4114800" cy="365760"/>
+          </a:xfrm>
+          <a:prstGeom prst="rect">
+            <a:avLst/>
+          </a:prstGeom>
+          <a:noFill/>
+          <a:ln/>
+        </p:spPr>
+        <p:txBody>
+          <a:bodyPr wrap="square" lIns="0" tIns="0" rIns="0" bIns="0" rtlCol="0" anchor="ctr"/>
+          <a:lstStyle/>
+          <a:p>
+            <a:pPr indent="0" marL="0">
+              <a:buNone/>
+            </a:pPr>
+            <a:r>
+              <a:rPr lang="en-US" sz="1600" b="1" dirty="0">
+                <a:solidFill>
+                  <a:srgbClr val="0A2239"/>
+                </a:solidFill>
+                <a:latin typeface="Calibri" pitchFamily="34" charset="0"/>
+                <a:ea typeface="Calibri" pitchFamily="34" charset="-122"/>
+                <a:cs typeface="Calibri" pitchFamily="34" charset="-120"/>
+              </a:rPr>
+              <a:t>Threats to validity</a:t>
+            </a:r>
+            <a:endParaRPr lang="en-US" sz="1600" dirty="0"/>
+          </a:p>
+        </p:txBody>
+      </p:sp>
+      <p:sp>
+        <p:nvSpPr>
+          <p:cNvPr id="8" name="Text 5"/>
+          <p:cNvSpPr/>
+          <p:nvPr/>
+        </p:nvSpPr>
+        <p:spPr>
+          <a:xfrm>
+            <a:off x="914400" y="2286000"/>
+            <a:ext cx="4846320" cy="3520440"/>
+          </a:xfrm>
+          <a:prstGeom prst="rect">
+            <a:avLst/>
+          </a:prstGeom>
+          <a:noFill/>
+          <a:ln/>
+        </p:spPr>
+        <p:txBody>
+          <a:bodyPr wrap="square" lIns="0" tIns="0" rIns="0" bIns="0" rtlCol="0" anchor="t"/>
+          <a:lstStyle/>
+          <a:p>
+            <a:pPr marL="342900" indent="-342900">
+              <a:spcAft>
+                <a:spcPts val="700"/>
+              </a:spcAft>
+              <a:buSzPct val="100000"/>
+              <a:buChar char="•"/>
+            </a:pPr>
+            <a:r>
+              <a:rPr lang="en-US" sz="1200" dirty="0">
+                <a:solidFill>
+                  <a:srgbClr val="1A2733"/>
+                </a:solidFill>
+                <a:latin typeface="Calibri" pitchFamily="34" charset="0"/>
+                <a:ea typeface="Calibri" pitchFamily="34" charset="-122"/>
+                <a:cs typeface="Calibri" pitchFamily="34" charset="-120"/>
+              </a:rPr>
+              <a:t>Observed cases, not controlled trials — n = 1 four times over, pointing the same way but never aggregated</a:t>
+            </a:r>
+            <a:endParaRPr lang="en-US" sz="1200" dirty="0"/>
+          </a:p>
+          <a:p>
+            <a:pPr marL="342900" indent="-342900">
+              <a:spcAft>
+                <a:spcPts val="700"/>
+              </a:spcAft>
+              <a:buSzPct val="100000"/>
+              <a:buChar char="•"/>
+            </a:pPr>
+            <a:r>
+              <a:rPr lang="en-US" sz="1200" dirty="0">
+                <a:solidFill>
+                  <a:srgbClr val="1A2733"/>
+                </a:solidFill>
+                <a:latin typeface="Calibri" pitchFamily="34" charset="0"/>
+                <a:ea typeface="Calibri" pitchFamily="34" charset="-122"/>
+                <a:cs typeface="Calibri" pitchFamily="34" charset="-120"/>
+              </a:rPr>
+              <a:t>One author is specifier, estimator, and grader of his own schema — correlated bias by construction</a:t>
+            </a:r>
+            <a:endParaRPr lang="en-US" sz="1200" dirty="0"/>
+          </a:p>
+          <a:p>
+            <a:pPr marL="342900" indent="-342900">
+              <a:spcAft>
+                <a:spcPts val="700"/>
+              </a:spcAft>
+              <a:buSzPct val="100000"/>
+              <a:buChar char="•"/>
+            </a:pPr>
+            <a:r>
+              <a:rPr lang="en-US" sz="1200" dirty="0">
+                <a:solidFill>
+                  <a:srgbClr val="1A2733"/>
+                </a:solidFill>
+                <a:latin typeface="Calibri" pitchFamily="34" charset="0"/>
+                <a:ea typeface="Calibri" pitchFamily="34" charset="-122"/>
+                <a:cs typeface="Calibri" pitchFamily="34" charset="-120"/>
+              </a:rPr>
+              <a:t>Effort baselines are modeled (PERT), not measured; actuals are uninstrumented bounds</a:t>
+            </a:r>
+            <a:endParaRPr lang="en-US" sz="1200" dirty="0"/>
+          </a:p>
+          <a:p>
+            <a:pPr marL="342900" indent="-342900">
+              <a:spcAft>
+                <a:spcPts val="700"/>
+              </a:spcAft>
+              <a:buSzPct val="100000"/>
+              <a:buChar char="•"/>
+            </a:pPr>
+            <a:r>
+              <a:rPr lang="en-US" sz="1200" dirty="0">
+                <a:solidFill>
+                  <a:srgbClr val="1A2733"/>
+                </a:solidFill>
+                <a:latin typeface="Calibri" pitchFamily="34" charset="0"/>
+                <a:ea typeface="Calibri" pitchFamily="34" charset="-122"/>
+                <a:cs typeface="Calibri" pitchFamily="34" charset="-120"/>
+              </a:rPr>
+              <a:t>Ratios from single-purpose field instrumentation — they should not be stretched to large systems, where architecture and maintenance dominate</a:t>
+            </a:r>
+            <a:endParaRPr lang="en-US" sz="1200" dirty="0"/>
+          </a:p>
+          <a:p>
+            <a:pPr marL="342900" indent="-342900">
+              <a:buSzPct val="100000"/>
+              <a:buChar char="•"/>
+            </a:pPr>
+            <a:r>
+              <a:rPr lang="en-US" sz="1200" dirty="0">
+                <a:solidFill>
+                  <a:srgbClr val="1A2733"/>
+                </a:solidFill>
+                <a:latin typeface="Calibri" pitchFamily="34" charset="0"/>
+                <a:ea typeface="Calibri" pitchFamily="34" charset="-122"/>
+                <a:cs typeface="Calibri" pitchFamily="34" charset="-120"/>
+              </a:rPr>
+              <a:t>The schema leans on a capable agent: without empirical discovery and self-distrust, slots 4 and 7 give back little</a:t>
+            </a:r>
+            <a:endParaRPr lang="en-US" sz="1200" dirty="0"/>
+          </a:p>
+        </p:txBody>
+      </p:sp>
+      <p:sp>
+        <p:nvSpPr>
+          <p:cNvPr id="9" name="Shape 6"/>
+          <p:cNvSpPr/>
+          <p:nvPr/>
+        </p:nvSpPr>
+        <p:spPr>
+          <a:xfrm>
+            <a:off x="6263640" y="1463040"/>
+            <a:ext cx="5394960" cy="4480560"/>
+          </a:xfrm>
+          <a:prstGeom prst="roundRect">
+            <a:avLst>
+              <a:gd name="adj" fmla="val 1633"/>
+            </a:avLst>
+          </a:prstGeom>
+          <a:solidFill>
+            <a:srgbClr val="FFFFFF"/>
+          </a:solidFill>
+          <a:ln w="12700">
+            <a:solidFill>
+              <a:srgbClr val="D5E2EC"/>
+            </a:solidFill>
+            <a:prstDash val="solid"/>
+          </a:ln>
+        </p:spPr>
+      </p:sp>
+      <p:sp>
+        <p:nvSpPr>
+          <p:cNvPr id="10" name="Shape 7"/>
+          <p:cNvSpPr/>
+          <p:nvPr/>
+        </p:nvSpPr>
+        <p:spPr>
+          <a:xfrm>
+            <a:off x="6583680" y="1691640"/>
+            <a:ext cx="502920" cy="502920"/>
+          </a:xfrm>
+          <a:prstGeom prst="ellipse">
+            <a:avLst/>
+          </a:prstGeom>
+          <a:solidFill>
+            <a:srgbClr val="C9862B"/>
+          </a:solidFill>
+          <a:ln/>
+        </p:spPr>
+      </p:sp>
+      <p:pic>
+        <p:nvPicPr>
+          <p:cNvPr id="11" name="Image 1" descr="preencoded.png">    </p:cNvPr>
+          <p:cNvPicPr>
+            <a:picLocks noChangeAspect="1"/>
+          </p:cNvPicPr>
+          <p:nvPr/>
+        </p:nvPicPr>
+        <p:blipFill>
+          <a:blip r:embed="rId2"/>
+          <a:stretch>
+            <a:fillRect/>
+          </a:stretch>
+        </p:blipFill>
+        <p:spPr>
+          <a:xfrm>
+            <a:off x="6714439" y="1822399"/>
+            <a:ext cx="241402" cy="241402"/>
+          </a:xfrm>
+          <a:prstGeom prst="rect">
+            <a:avLst/>
+          </a:prstGeom>
+        </p:spPr>
+      </p:pic>
+      <p:sp>
+        <p:nvSpPr>
+          <p:cNvPr id="12" name="Text 8"/>
+          <p:cNvSpPr/>
+          <p:nvPr/>
+        </p:nvSpPr>
+        <p:spPr>
+          <a:xfrm>
+            <a:off x="7269480" y="1783080"/>
+            <a:ext cx="4206240" cy="365760"/>
+          </a:xfrm>
+          <a:prstGeom prst="rect">
+            <a:avLst/>
+          </a:prstGeom>
+          <a:noFill/>
+          <a:ln/>
+        </p:spPr>
+        <p:txBody>
+          <a:bodyPr wrap="square" lIns="0" tIns="0" rIns="0" bIns="0" rtlCol="0" anchor="ctr"/>
+          <a:lstStyle/>
+          <a:p>
+            <a:pPr indent="0" marL="0">
+              <a:buNone/>
+            </a:pPr>
+            <a:r>
+              <a:rPr lang="en-US" sz="1600" b="1" dirty="0">
+                <a:solidFill>
+                  <a:srgbClr val="0A2239"/>
+                </a:solidFill>
+                <a:latin typeface="Calibri" pitchFamily="34" charset="0"/>
+                <a:ea typeface="Calibri" pitchFamily="34" charset="-122"/>
+                <a:cs typeface="Calibri" pitchFamily="34" charset="-120"/>
+              </a:rPr>
+              <a:t>The controlled study to run</a:t>
+            </a:r>
+            <a:endParaRPr lang="en-US" sz="1600" dirty="0"/>
+          </a:p>
+        </p:txBody>
+      </p:sp>
+      <p:sp>
+        <p:nvSpPr>
+          <p:cNvPr id="13" name="Text 9"/>
+          <p:cNvSpPr/>
+          <p:nvPr/>
+        </p:nvSpPr>
+        <p:spPr>
+          <a:xfrm>
+            <a:off x="6629400" y="2286000"/>
+            <a:ext cx="4754880" cy="3520440"/>
+          </a:xfrm>
+          <a:prstGeom prst="rect">
+            <a:avLst/>
+          </a:prstGeom>
+          <a:noFill/>
+          <a:ln/>
+        </p:spPr>
+        <p:txBody>
+          <a:bodyPr wrap="square" lIns="0" tIns="0" rIns="0" bIns="0" rtlCol="0" anchor="t"/>
+          <a:lstStyle/>
+          <a:p>
+            <a:pPr marL="342900" indent="-342900">
+              <a:spcAft>
+                <a:spcPts val="700"/>
+              </a:spcAft>
+              <a:buSzPct val="100000"/>
+              <a:buChar char="•"/>
+            </a:pPr>
+            <a:r>
+              <a:rPr lang="en-US" sz="1200" dirty="0">
+                <a:solidFill>
+                  <a:srgbClr val="1A2733"/>
+                </a:solidFill>
+                <a:latin typeface="Calibri" pitchFamily="34" charset="0"/>
+                <a:ea typeface="Calibri" pitchFamily="34" charset="-122"/>
+                <a:cs typeface="Calibri" pitchFamily="34" charset="-120"/>
+              </a:rPr>
+              <a:t>Paired tasks: domain experts with and without the structured opening prompt, across several devices</a:t>
+            </a:r>
+            <a:endParaRPr lang="en-US" sz="1200" dirty="0"/>
+          </a:p>
+          <a:p>
+            <a:pPr marL="342900" indent="-342900">
+              <a:spcAft>
+                <a:spcPts val="700"/>
+              </a:spcAft>
+              <a:buSzPct val="100000"/>
+              <a:buChar char="•"/>
+            </a:pPr>
+            <a:r>
+              <a:rPr lang="en-US" sz="1200" dirty="0">
+                <a:solidFill>
+                  <a:srgbClr val="1A2733"/>
+                </a:solidFill>
+                <a:latin typeface="Calibri" pitchFamily="34" charset="0"/>
+                <a:ea typeface="Calibri" pitchFamily="34" charset="-122"/>
+                <a:cs typeface="Calibri" pitchFamily="34" charset="-120"/>
+              </a:rPr>
+              <a:t>A condition the Q-Hub case approximates at n = 1: experts writing their own opening in schema form vs discovering requirements turn by turn</a:t>
+            </a:r>
+            <a:endParaRPr lang="en-US" sz="1200" dirty="0"/>
+          </a:p>
+          <a:p>
+            <a:pPr marL="342900" indent="-342900">
+              <a:spcAft>
+                <a:spcPts val="700"/>
+              </a:spcAft>
+              <a:buSzPct val="100000"/>
+              <a:buChar char="•"/>
+            </a:pPr>
+            <a:r>
+              <a:rPr lang="en-US" sz="1200" dirty="0">
+                <a:solidFill>
+                  <a:srgbClr val="1A2733"/>
+                </a:solidFill>
+                <a:latin typeface="Calibri" pitchFamily="34" charset="0"/>
+                <a:ea typeface="Calibri" pitchFamily="34" charset="-122"/>
+                <a:cs typeface="Calibri" pitchFamily="34" charset="-120"/>
+              </a:rPr>
+              <a:t>Measures: turns to acceptance, defect counts, instrumented time, share of corrections traceable to specification gaps vs discovery</a:t>
+            </a:r>
+            <a:endParaRPr lang="en-US" sz="1200" dirty="0"/>
+          </a:p>
+          <a:p>
+            <a:pPr marL="342900" indent="-342900">
+              <a:buSzPct val="100000"/>
+              <a:buChar char="•"/>
+            </a:pPr>
+            <a:r>
+              <a:rPr lang="en-US" sz="1200" dirty="0">
+                <a:solidFill>
+                  <a:srgbClr val="1A2733"/>
+                </a:solidFill>
+                <a:latin typeface="Calibri" pitchFamily="34" charset="0"/>
+                <a:ea typeface="Calibri" pitchFamily="34" charset="-122"/>
+                <a:cs typeface="Calibri" pitchFamily="34" charset="-120"/>
+              </a:rPr>
+              <a:t>And separately: defect rate and time-to-diagnosis under real post-delivery use — where the Q-Hub artifact was actually caught out</a:t>
+            </a:r>
+            <a:endParaRPr lang="en-US" sz="1200" dirty="0"/>
+          </a:p>
+        </p:txBody>
+      </p:sp>
+    </p:spTree>
+  </p:cSld>
+  <p:clrMapOvr>
+    <a:masterClrMapping/>
+  </p:clrMapOvr>
+</p:sld>
+</file>
+
+<file path=ppt/slides/slide14.xml><?xml version="1.0" encoding="utf-8"?>
+<p:sld xmlns:a="http://schemas.openxmlformats.org/drawingml/2006/main" xmlns:r="http://schemas.openxmlformats.org/officeDocument/2006/relationships" xmlns:p="http://schemas.openxmlformats.org/presentationml/2006/main">
+  <p:cSld name="Slide 14">
     <p:bg>
       <p:bgPr>
         <a:solidFill>

--- a/docs/ASV-Console-Programming-by-Conversation.pptx
+++ b/docs/ASV-Console-Programming-by-Conversation.pptx
@@ -6364,7 +6364,7 @@
                           <a:ea typeface="Calibri" pitchFamily="34" charset="-122"/>
                           <a:cs typeface="Calibri" pitchFamily="34" charset="-120"/>
                         </a:rPr>
-                        <a:t>Test infrastructure (30 suites / 415 assertions, mutation verification, real-console harnesses, hook)</a:t>
+                        <a:t>Test infrastructure (96 suites, mutation verification, real-console harnesses, hook)</a:t>
                       </a:r>
                       <a:endParaRPr lang="en-US" sz="1000" dirty="0">
                         <a:latin typeface="Calibri" charset="0"/>
@@ -9866,7 +9866,7 @@
                 <a:ea typeface="Calibri" pitchFamily="34" charset="-122"/>
                 <a:cs typeface="Calibri" pitchFamily="34" charset="-120"/>
               </a:rPr>
-              <a:t>The expert brings the what, the why, and the distrust; the agent brings the how and the discovery. It held for a relay board, and it held for an 11,700-line C2 console.</a:t>
+              <a:t>The expert brings the what, the why, and the distrust; the agent brings the how and the discovery. It held for a relay board, and it held for a C2 console of 28,675 lines.</a:t>
             </a:r>
             <a:endParaRPr lang="en-US" sz="1250" dirty="0"/>
           </a:p>
@@ -10609,7 +10609,7 @@
                 <a:ea typeface="Cambria" pitchFamily="34" charset="-122"/>
                 <a:cs typeface="Cambria" pitchFamily="34" charset="-120"/>
               </a:rPr>
-              <a:t>~11,700</a:t>
+              <a:t>28,675</a:t>
             </a:r>
             <a:endParaRPr lang="en-US" sz="3000" dirty="0"/>
           </a:p>
@@ -10648,7 +10648,7 @@
                 <a:ea typeface="Calibri" pitchFamily="34" charset="-122"/>
                 <a:cs typeface="Calibri" pitchFamily="34" charset="-120"/>
               </a:rPr>
-              <a:t>lines across 6 source files</a:t>
+              <a:t>lines across 21 source files</a:t>
             </a:r>
             <a:endParaRPr lang="en-US" sz="1100" dirty="0"/>
           </a:p>
@@ -10665,7 +10665,7 @@
                 <a:ea typeface="Calibri" pitchFamily="34" charset="-122"/>
                 <a:cs typeface="Calibri" pitchFamily="34" charset="-120"/>
               </a:rPr>
-              <a:t>(one server file, one UI page)</a:t>
+              <a:t>(one server file, one UI page, shared modules)</a:t>
             </a:r>
             <a:endParaRPr lang="en-US" sz="1100" dirty="0"/>
           </a:p>
@@ -10843,7 +10843,7 @@
                 <a:ea typeface="Cambria" pitchFamily="34" charset="-122"/>
                 <a:cs typeface="Cambria" pitchFamily="34" charset="-120"/>
               </a:rPr>
-              <a:t>30 / 415</a:t>
+              <a:t>96</a:t>
             </a:r>
             <a:endParaRPr lang="en-US" sz="3000" dirty="0"/>
           </a:p>
@@ -10882,7 +10882,7 @@
                 <a:ea typeface="Calibri" pitchFamily="34" charset="-122"/>
                 <a:cs typeface="Calibri" pitchFamily="34" charset="-120"/>
               </a:rPr>
-              <a:t>regression suites / assertions,</a:t>
+              <a:t>regression suites,</a:t>
             </a:r>
             <a:endParaRPr lang="en-US" sz="1100" dirty="0"/>
           </a:p>
@@ -10899,7 +10899,7 @@
                 <a:ea typeface="Calibri" pitchFamily="34" charset="-122"/>
                 <a:cs typeface="Calibri" pitchFamily="34" charset="-120"/>
               </a:rPr>
-              <a:t>all run by the pre-commit hook</a:t>
+              <a:t>every one run by the pre-commit hook</a:t>
             </a:r>
             <a:endParaRPr lang="en-US" sz="1100" dirty="0"/>
           </a:p>
@@ -16203,7 +16203,7 @@
                           <a:ea typeface="Calibri" pitchFamily="34" charset="-122"/>
                           <a:cs typeface="Calibri" pitchFamily="34" charset="-120"/>
                         </a:rPr>
-                        <a:t>30 suites / 415 assertions run by the pre-commit hook; suites verified by mutation; live checks against a real browser, real Word, a real server's stderr.</a:t>
+                        <a:t>96 suites run by the pre-commit hook; suites verified by mutation; live checks against a real browser, real Word, a real server's stderr.</a:t>
                       </a:r>
                       <a:endParaRPr lang="en-US" sz="1150" dirty="0">
                         <a:latin typeface="Calibri" charset="0"/>
@@ -17832,7 +17832,7 @@
                 <a:ea typeface="Calibri" pitchFamily="34" charset="-122"/>
                 <a:cs typeface="Calibri" pitchFamily="34" charset="-120"/>
               </a:rPr>
-              <a:t>Outcome of the route-coverage campaign: every route whose failure mode matters has a behavioural suite — and writing those suites found five live defects on the way.</a:t>
+              <a:t>Outcome of the route-coverage campaign: every route whose failure mode matters has a behavioral suite — and writing those suites found five live defects on the way.</a:t>
             </a:r>
             <a:endParaRPr lang="en-US" sz="1300" dirty="0"/>
           </a:p>

--- a/docs/ASV-Console-Programming-by-Conversation.pptx
+++ b/docs/ASV-Console-Programming-by-Conversation.pptx
@@ -6364,7 +6364,7 @@
                           <a:ea typeface="Calibri" pitchFamily="34" charset="-122"/>
                           <a:cs typeface="Calibri" pitchFamily="34" charset="-120"/>
                         </a:rPr>
-                        <a:t>Test infrastructure (96 suites, mutation verification, real-console harnesses, hook)</a:t>
+                        <a:t>Test infrastructure (97 suites, mutation verification, real-console harnesses, hook)</a:t>
                       </a:r>
                       <a:endParaRPr lang="en-US" sz="1000" dirty="0">
                         <a:latin typeface="Calibri" charset="0"/>
@@ -9866,7 +9866,7 @@
                 <a:ea typeface="Calibri" pitchFamily="34" charset="-122"/>
                 <a:cs typeface="Calibri" pitchFamily="34" charset="-120"/>
               </a:rPr>
-              <a:t>The expert brings the what, the why, and the distrust; the agent brings the how and the discovery. It held for a relay board, and it held for a C2 console of 28,675 lines.</a:t>
+              <a:t>The expert brings the what, the why, and the distrust; the agent brings the how and the discovery. It held for a relay board, and it held for a C2 console of 28,734 lines.</a:t>
             </a:r>
             <a:endParaRPr lang="en-US" sz="1250" dirty="0"/>
           </a:p>
@@ -10609,7 +10609,7 @@
                 <a:ea typeface="Cambria" pitchFamily="34" charset="-122"/>
                 <a:cs typeface="Cambria" pitchFamily="34" charset="-120"/>
               </a:rPr>
-              <a:t>28,675</a:t>
+              <a:t>28,734</a:t>
             </a:r>
             <a:endParaRPr lang="en-US" sz="3000" dirty="0"/>
           </a:p>
@@ -10843,7 +10843,7 @@
                 <a:ea typeface="Cambria" pitchFamily="34" charset="-122"/>
                 <a:cs typeface="Cambria" pitchFamily="34" charset="-120"/>
               </a:rPr>
-              <a:t>96</a:t>
+              <a:t>97</a:t>
             </a:r>
             <a:endParaRPr lang="en-US" sz="3000" dirty="0"/>
           </a:p>
@@ -16203,7 +16203,7 @@
                           <a:ea typeface="Calibri" pitchFamily="34" charset="-122"/>
                           <a:cs typeface="Calibri" pitchFamily="34" charset="-120"/>
                         </a:rPr>
-                        <a:t>96 suites run by the pre-commit hook; suites verified by mutation; live checks against a real browser, real Word, a real server's stderr.</a:t>
+                        <a:t>97 suites run by the pre-commit hook; suites verified by mutation; live checks against a real browser, real Word, a real server's stderr.</a:t>
                       </a:r>
                       <a:endParaRPr lang="en-US" sz="1150" dirty="0">
                         <a:latin typeface="Calibri" charset="0"/>

--- a/docs/ASV-Console-Programming-by-Conversation.pptx
+++ b/docs/ASV-Console-Programming-by-Conversation.pptx
@@ -6364,7 +6364,7 @@
                           <a:ea typeface="Calibri" pitchFamily="34" charset="-122"/>
                           <a:cs typeface="Calibri" pitchFamily="34" charset="-120"/>
                         </a:rPr>
-                        <a:t>Test infrastructure (99 suites, mutation verification, real-console harnesses, hook)</a:t>
+                        <a:t>Test infrastructure (100 suites, mutation verification, real-console harnesses, hook)</a:t>
                       </a:r>
                       <a:endParaRPr lang="en-US" sz="1000" dirty="0">
                         <a:latin typeface="Calibri" charset="0"/>
@@ -9866,7 +9866,7 @@
                 <a:ea typeface="Calibri" pitchFamily="34" charset="-122"/>
                 <a:cs typeface="Calibri" pitchFamily="34" charset="-120"/>
               </a:rPr>
-              <a:t>The expert brings the what, the why, and the distrust; the agent brings the how and the discovery. It held for a relay board, and it held for a C2 console of 29,868 lines.</a:t>
+              <a:t>The expert brings the what, the why, and the distrust; the agent brings the how and the discovery. It held for a relay board, and it held for a C2 console of 29,919 lines.</a:t>
             </a:r>
             <a:endParaRPr lang="en-US" sz="1250" dirty="0"/>
           </a:p>
@@ -10609,7 +10609,7 @@
                 <a:ea typeface="Cambria" pitchFamily="34" charset="-122"/>
                 <a:cs typeface="Cambria" pitchFamily="34" charset="-120"/>
               </a:rPr>
-              <a:t>29,868</a:t>
+              <a:t>29,919</a:t>
             </a:r>
             <a:endParaRPr lang="en-US" sz="3000" dirty="0"/>
           </a:p>
@@ -10843,7 +10843,7 @@
                 <a:ea typeface="Cambria" pitchFamily="34" charset="-122"/>
                 <a:cs typeface="Cambria" pitchFamily="34" charset="-120"/>
               </a:rPr>
-              <a:t>99</a:t>
+              <a:t>100</a:t>
             </a:r>
             <a:endParaRPr lang="en-US" sz="3000" dirty="0"/>
           </a:p>
@@ -16203,7 +16203,7 @@
                           <a:ea typeface="Calibri" pitchFamily="34" charset="-122"/>
                           <a:cs typeface="Calibri" pitchFamily="34" charset="-120"/>
                         </a:rPr>
-                        <a:t>99 suites run by the pre-commit hook; suites verified by mutation; live checks against a real browser, real Word, a real server's stderr.</a:t>
+                        <a:t>100 suites run by the pre-commit hook; suites verified by mutation; live checks against a real browser, real Word, a real server's stderr.</a:t>
                       </a:r>
                       <a:endParaRPr lang="en-US" sz="1150" dirty="0">
                         <a:latin typeface="Calibri" charset="0"/>
